--- a/deck/verification-budget.pptx
+++ b/deck/verification-budget.pptx
@@ -6462,7 +6462,49 @@
       <p:grpSpPr/>
       <p:sp>
         <p:nvSpPr>
-          <p:cNvPr id="2" name="Rectangle 1"/>
+          <p:cNvPr id="2" name="TextBox 1"/>
+          <p:cNvSpPr txBox="1"/>
+          <p:nvPr/>
+        </p:nvSpPr>
+        <p:spPr>
+          <a:xfrm>
+            <a:off x="777240" y="1298448"/>
+            <a:ext cx="7315200" cy="274320"/>
+          </a:xfrm>
+          <a:prstGeom prst="rect">
+            <a:avLst/>
+          </a:prstGeom>
+          <a:noFill/>
+        </p:spPr>
+        <p:txBody>
+          <a:bodyPr wrap="square" anchor="t" lIns="0" rIns="0" tIns="0" bIns="0">
+            <a:spAutoFit/>
+          </a:bodyPr>
+          <a:lstStyle/>
+          <a:p>
+            <a:pPr algn="l">
+              <a:lnSpc>
+                <a:spcPct val="125000"/>
+              </a:lnSpc>
+              <a:spcAft>
+                <a:spcPts val="0"/>
+              </a:spcAft>
+            </a:pPr>
+            <a:r>
+              <a:rPr sz="1100" b="1" i="0">
+                <a:solidFill>
+                  <a:srgbClr val="7FD8C2"/>
+                </a:solidFill>
+                <a:latin typeface="Calibri"/>
+              </a:rPr>
+              <a:t>GSDC CERTIFIED LEARNING MASTERCLASS SERIES</a:t>
+            </a:r>
+          </a:p>
+        </p:txBody>
+      </p:sp>
+      <p:sp>
+        <p:nvSpPr>
+          <p:cNvPr id="3" name="Rectangle 2"/>
           <p:cNvSpPr/>
           <p:nvPr/>
         </p:nvSpPr>
@@ -6506,7 +6548,7 @@
       </p:sp>
       <p:sp>
         <p:nvSpPr>
-          <p:cNvPr id="3" name="TextBox 2"/>
+          <p:cNvPr id="4" name="TextBox 3"/>
           <p:cNvSpPr txBox="1"/>
           <p:nvPr/>
         </p:nvSpPr>
@@ -6548,7 +6590,7 @@
       </p:sp>
       <p:sp>
         <p:nvSpPr>
-          <p:cNvPr id="4" name="TextBox 3"/>
+          <p:cNvPr id="5" name="TextBox 4"/>
           <p:cNvSpPr txBox="1"/>
           <p:nvPr/>
         </p:nvSpPr>
@@ -6609,7 +6651,7 @@
       </p:sp>
       <p:sp>
         <p:nvSpPr>
-          <p:cNvPr id="5" name="Rectangle 4"/>
+          <p:cNvPr id="6" name="Rectangle 5"/>
           <p:cNvSpPr/>
           <p:nvPr/>
         </p:nvSpPr>
@@ -6653,7 +6695,7 @@
       </p:sp>
       <p:sp>
         <p:nvSpPr>
-          <p:cNvPr id="6" name="TextBox 5"/>
+          <p:cNvPr id="7" name="TextBox 6"/>
           <p:cNvSpPr txBox="1"/>
           <p:nvPr/>
         </p:nvSpPr>
@@ -6695,7 +6737,7 @@
       </p:sp>
       <p:sp>
         <p:nvSpPr>
-          <p:cNvPr id="7" name="TextBox 6"/>
+          <p:cNvPr id="8" name="TextBox 7"/>
           <p:cNvSpPr txBox="1"/>
           <p:nvPr/>
         </p:nvSpPr>

--- a/deck/verification-budget.pptx
+++ b/deck/verification-budget.pptx
@@ -6702,35 +6702,41 @@
         <p:spPr>
           <a:xfrm>
             <a:off x="777240" y="5413248"/>
-            <a:ext cx="3108960" cy="274320"/>
-          </a:xfrm>
-          <a:prstGeom prst="rect">
-            <a:avLst/>
-          </a:prstGeom>
-          <a:noFill/>
-        </p:spPr>
-        <p:txBody>
-          <a:bodyPr wrap="square" anchor="t" lIns="0" rIns="0" tIns="0" bIns="0">
-            <a:spAutoFit/>
-          </a:bodyPr>
-          <a:lstStyle/>
-          <a:p>
-            <a:pPr algn="l">
+            <a:ext cx="4754880" cy="274320"/>
+          </a:xfrm>
+          <a:prstGeom prst="rect">
+            <a:avLst/>
+          </a:prstGeom>
+          <a:noFill/>
+        </p:spPr>
+        <p:txBody>
+          <a:bodyPr wrap="square" lIns="0" rIns="0" tIns="0" bIns="0">
+            <a:spAutoFit/>
+          </a:bodyPr>
+          <a:lstStyle/>
+          <a:p>
+            <a:pPr>
               <a:lnSpc>
                 <a:spcPct val="125000"/>
               </a:lnSpc>
-              <a:spcAft>
-                <a:spcPts val="0"/>
-              </a:spcAft>
-            </a:pPr>
+            </a:pPr>
+            <a:r>
+              <a:rPr sz="1300" b="1" i="0">
+                <a:solidFill>
+                  <a:srgbClr val="F7F6F3"/>
+                </a:solidFill>
+                <a:latin typeface="Calibri"/>
+              </a:rPr>
+              <a:t>Hotragn Pettugani</a:t>
+            </a:r>
             <a:r>
               <a:rPr sz="1300" b="0" i="0">
                 <a:solidFill>
-                  <a:srgbClr val="F7F6F3"/>
-                </a:solidFill>
-                <a:latin typeface="Calibri"/>
-              </a:rPr>
-              <a:t>Hotragn Pettugani</a:t>
+                  <a:srgbClr val="C9C6BF"/>
+                </a:solidFill>
+                <a:latin typeface="Calibri"/>
+              </a:rPr>
+              <a:t>   CTO, Future Median (non-profit)</a:t>
             </a:r>
           </a:p>
         </p:txBody>
@@ -6743,21 +6749,21 @@
         </p:nvSpPr>
         <p:spPr>
           <a:xfrm>
-            <a:off x="3977639" y="5413248"/>
-            <a:ext cx="7772400" cy="274320"/>
-          </a:xfrm>
-          <a:prstGeom prst="rect">
-            <a:avLst/>
-          </a:prstGeom>
-          <a:noFill/>
-        </p:spPr>
-        <p:txBody>
-          <a:bodyPr wrap="square" anchor="t" lIns="0" rIns="0" tIns="0" bIns="0">
-            <a:spAutoFit/>
-          </a:bodyPr>
-          <a:lstStyle/>
-          <a:p>
-            <a:pPr algn="l">
+            <a:off x="5623559" y="5413248"/>
+            <a:ext cx="6309360" cy="274320"/>
+          </a:xfrm>
+          <a:prstGeom prst="rect">
+            <a:avLst/>
+          </a:prstGeom>
+          <a:noFill/>
+        </p:spPr>
+        <p:txBody>
+          <a:bodyPr wrap="square" anchor="t" lIns="0" rIns="0" tIns="0" bIns="0">
+            <a:spAutoFit/>
+          </a:bodyPr>
+          <a:lstStyle/>
+          <a:p>
+            <a:pPr algn="r">
               <a:lnSpc>
                 <a:spcPct val="125000"/>
               </a:lnSpc>
@@ -6766,13 +6772,13 @@
               </a:spcAft>
             </a:pPr>
             <a:r>
-              <a:rPr sz="1300" b="0" i="0">
+              <a:rPr sz="1200" b="0" i="0">
                 <a:solidFill>
                   <a:srgbClr val="7FD8C2"/>
                 </a:solidFill>
                 <a:latin typeface="Calibri"/>
               </a:rPr>
-              <a:t>github.com/hotragn/verb          x.com/hotragn          linkedin.com/in/hotragn-pettugani</a:t>
+              <a:t>github.com/hotragn/verb     x.com/hotragn     linkedin.com/in/hotragn-pettugani</a:t>
             </a:r>
           </a:p>
         </p:txBody>
@@ -7213,9 +7219,33 @@
           </a:p>
         </p:txBody>
       </p:sp>
-      <p:sp>
-        <p:nvSpPr>
-          <p:cNvPr id="7" name="TextBox 6"/>
+      <p:pic>
+        <p:nvPicPr>
+          <p:cNvPr id="7" name="Picture 6" descr="GSDC Logo.png"/>
+          <p:cNvPicPr>
+            <a:picLocks noChangeAspect="1"/>
+          </p:cNvPicPr>
+          <p:nvPr/>
+        </p:nvPicPr>
+        <p:blipFill>
+          <a:blip r:embed="rId2"/>
+          <a:stretch>
+            <a:fillRect/>
+          </a:stretch>
+        </p:blipFill>
+        <p:spPr>
+          <a:xfrm>
+            <a:off x="10286695" y="310896"/>
+            <a:ext cx="1127760" cy="365760"/>
+          </a:xfrm>
+          <a:prstGeom prst="rect">
+            <a:avLst/>
+          </a:prstGeom>
+        </p:spPr>
+      </p:pic>
+      <p:sp>
+        <p:nvSpPr>
+          <p:cNvPr id="8" name="TextBox 7"/>
           <p:cNvSpPr txBox="1"/>
           <p:nvPr/>
         </p:nvSpPr>
@@ -7257,7 +7287,7 @@
       </p:sp>
       <p:sp>
         <p:nvSpPr>
-          <p:cNvPr id="8" name="TextBox 7"/>
+          <p:cNvPr id="9" name="TextBox 8"/>
           <p:cNvSpPr txBox="1"/>
           <p:nvPr/>
         </p:nvSpPr>
@@ -7299,7 +7329,7 @@
       </p:sp>
       <p:sp>
         <p:nvSpPr>
-          <p:cNvPr id="9" name="TextBox 8"/>
+          <p:cNvPr id="10" name="TextBox 9"/>
           <p:cNvSpPr txBox="1"/>
           <p:nvPr/>
         </p:nvSpPr>
@@ -7341,7 +7371,7 @@
       </p:sp>
       <p:sp>
         <p:nvSpPr>
-          <p:cNvPr id="10" name="TextBox 9"/>
+          <p:cNvPr id="11" name="TextBox 10"/>
           <p:cNvSpPr txBox="1"/>
           <p:nvPr/>
         </p:nvSpPr>
@@ -7383,7 +7413,7 @@
       </p:sp>
       <p:sp>
         <p:nvSpPr>
-          <p:cNvPr id="11" name="TextBox 10"/>
+          <p:cNvPr id="12" name="TextBox 11"/>
           <p:cNvSpPr txBox="1"/>
           <p:nvPr/>
         </p:nvSpPr>
@@ -7425,7 +7455,7 @@
       </p:sp>
       <p:sp>
         <p:nvSpPr>
-          <p:cNvPr id="12" name="Rectangle 11"/>
+          <p:cNvPr id="13" name="Rectangle 12"/>
           <p:cNvSpPr/>
           <p:nvPr/>
         </p:nvSpPr>
@@ -7469,7 +7499,7 @@
       </p:sp>
       <p:sp>
         <p:nvSpPr>
-          <p:cNvPr id="13" name="TextBox 12"/>
+          <p:cNvPr id="14" name="TextBox 13"/>
           <p:cNvSpPr txBox="1"/>
           <p:nvPr/>
         </p:nvSpPr>
@@ -7511,7 +7541,7 @@
       </p:sp>
       <p:sp>
         <p:nvSpPr>
-          <p:cNvPr id="14" name="TextBox 13"/>
+          <p:cNvPr id="15" name="TextBox 14"/>
           <p:cNvSpPr txBox="1"/>
           <p:nvPr/>
         </p:nvSpPr>
@@ -7553,7 +7583,7 @@
       </p:sp>
       <p:sp>
         <p:nvSpPr>
-          <p:cNvPr id="15" name="TextBox 14"/>
+          <p:cNvPr id="16" name="TextBox 15"/>
           <p:cNvSpPr txBox="1"/>
           <p:nvPr/>
         </p:nvSpPr>
@@ -7595,7 +7625,7 @@
       </p:sp>
       <p:sp>
         <p:nvSpPr>
-          <p:cNvPr id="16" name="TextBox 15"/>
+          <p:cNvPr id="17" name="TextBox 16"/>
           <p:cNvSpPr txBox="1"/>
           <p:nvPr/>
         </p:nvSpPr>
@@ -7637,7 +7667,7 @@
       </p:sp>
       <p:sp>
         <p:nvSpPr>
-          <p:cNvPr id="17" name="Rectangle 16"/>
+          <p:cNvPr id="18" name="Rectangle 17"/>
           <p:cNvSpPr/>
           <p:nvPr/>
         </p:nvSpPr>
@@ -7681,7 +7711,7 @@
       </p:sp>
       <p:sp>
         <p:nvSpPr>
-          <p:cNvPr id="18" name="TextBox 17"/>
+          <p:cNvPr id="19" name="TextBox 18"/>
           <p:cNvSpPr txBox="1"/>
           <p:nvPr/>
         </p:nvSpPr>
@@ -7723,7 +7753,7 @@
       </p:sp>
       <p:sp>
         <p:nvSpPr>
-          <p:cNvPr id="19" name="TextBox 18"/>
+          <p:cNvPr id="20" name="TextBox 19"/>
           <p:cNvSpPr txBox="1"/>
           <p:nvPr/>
         </p:nvSpPr>
@@ -7765,7 +7795,7 @@
       </p:sp>
       <p:sp>
         <p:nvSpPr>
-          <p:cNvPr id="20" name="TextBox 19"/>
+          <p:cNvPr id="21" name="TextBox 20"/>
           <p:cNvSpPr txBox="1"/>
           <p:nvPr/>
         </p:nvSpPr>
@@ -7807,7 +7837,7 @@
       </p:sp>
       <p:sp>
         <p:nvSpPr>
-          <p:cNvPr id="21" name="TextBox 20"/>
+          <p:cNvPr id="22" name="TextBox 21"/>
           <p:cNvSpPr txBox="1"/>
           <p:nvPr/>
         </p:nvSpPr>
@@ -7849,7 +7879,7 @@
       </p:sp>
       <p:sp>
         <p:nvSpPr>
-          <p:cNvPr id="22" name="Rectangle 21"/>
+          <p:cNvPr id="23" name="Rectangle 22"/>
           <p:cNvSpPr/>
           <p:nvPr/>
         </p:nvSpPr>
@@ -7893,7 +7923,7 @@
       </p:sp>
       <p:sp>
         <p:nvSpPr>
-          <p:cNvPr id="23" name="TextBox 22"/>
+          <p:cNvPr id="24" name="TextBox 23"/>
           <p:cNvSpPr txBox="1"/>
           <p:nvPr/>
         </p:nvSpPr>
@@ -7935,7 +7965,7 @@
       </p:sp>
       <p:sp>
         <p:nvSpPr>
-          <p:cNvPr id="24" name="TextBox 23"/>
+          <p:cNvPr id="25" name="TextBox 24"/>
           <p:cNvSpPr txBox="1"/>
           <p:nvPr/>
         </p:nvSpPr>
@@ -7977,7 +8007,7 @@
       </p:sp>
       <p:sp>
         <p:nvSpPr>
-          <p:cNvPr id="25" name="TextBox 24"/>
+          <p:cNvPr id="26" name="TextBox 25"/>
           <p:cNvSpPr txBox="1"/>
           <p:nvPr/>
         </p:nvSpPr>
@@ -8019,7 +8049,7 @@
       </p:sp>
       <p:sp>
         <p:nvSpPr>
-          <p:cNvPr id="26" name="TextBox 25"/>
+          <p:cNvPr id="27" name="TextBox 26"/>
           <p:cNvSpPr txBox="1"/>
           <p:nvPr/>
         </p:nvSpPr>
@@ -8061,7 +8091,7 @@
       </p:sp>
       <p:sp>
         <p:nvSpPr>
-          <p:cNvPr id="27" name="Rectangle 26"/>
+          <p:cNvPr id="28" name="Rectangle 27"/>
           <p:cNvSpPr/>
           <p:nvPr/>
         </p:nvSpPr>
@@ -8105,7 +8135,7 @@
       </p:sp>
       <p:sp>
         <p:nvSpPr>
-          <p:cNvPr id="28" name="TextBox 27"/>
+          <p:cNvPr id="29" name="TextBox 28"/>
           <p:cNvSpPr txBox="1"/>
           <p:nvPr/>
         </p:nvSpPr>
@@ -8147,7 +8177,7 @@
       </p:sp>
       <p:sp>
         <p:nvSpPr>
-          <p:cNvPr id="29" name="TextBox 28"/>
+          <p:cNvPr id="30" name="TextBox 29"/>
           <p:cNvSpPr txBox="1"/>
           <p:nvPr/>
         </p:nvSpPr>
@@ -8189,7 +8219,7 @@
       </p:sp>
       <p:sp>
         <p:nvSpPr>
-          <p:cNvPr id="30" name="TextBox 29"/>
+          <p:cNvPr id="31" name="TextBox 30"/>
           <p:cNvSpPr txBox="1"/>
           <p:nvPr/>
         </p:nvSpPr>
@@ -8231,7 +8261,7 @@
       </p:sp>
       <p:sp>
         <p:nvSpPr>
-          <p:cNvPr id="31" name="TextBox 30"/>
+          <p:cNvPr id="32" name="TextBox 31"/>
           <p:cNvSpPr txBox="1"/>
           <p:nvPr/>
         </p:nvSpPr>
@@ -8273,7 +8303,7 @@
       </p:sp>
       <p:sp>
         <p:nvSpPr>
-          <p:cNvPr id="32" name="Rectangle 31"/>
+          <p:cNvPr id="33" name="Rectangle 32"/>
           <p:cNvSpPr/>
           <p:nvPr/>
         </p:nvSpPr>
@@ -8317,7 +8347,7 @@
       </p:sp>
       <p:sp>
         <p:nvSpPr>
-          <p:cNvPr id="33" name="TextBox 32"/>
+          <p:cNvPr id="34" name="TextBox 33"/>
           <p:cNvSpPr txBox="1"/>
           <p:nvPr/>
         </p:nvSpPr>
@@ -8359,7 +8389,7 @@
       </p:sp>
       <p:sp>
         <p:nvSpPr>
-          <p:cNvPr id="34" name="TextBox 33"/>
+          <p:cNvPr id="35" name="TextBox 34"/>
           <p:cNvSpPr txBox="1"/>
           <p:nvPr/>
         </p:nvSpPr>
@@ -8401,7 +8431,7 @@
       </p:sp>
       <p:sp>
         <p:nvSpPr>
-          <p:cNvPr id="35" name="TextBox 34"/>
+          <p:cNvPr id="36" name="TextBox 35"/>
           <p:cNvSpPr txBox="1"/>
           <p:nvPr/>
         </p:nvSpPr>
@@ -8443,7 +8473,7 @@
       </p:sp>
       <p:sp>
         <p:nvSpPr>
-          <p:cNvPr id="36" name="TextBox 35"/>
+          <p:cNvPr id="37" name="TextBox 36"/>
           <p:cNvSpPr txBox="1"/>
           <p:nvPr/>
         </p:nvSpPr>
@@ -8485,7 +8515,7 @@
       </p:sp>
       <p:sp>
         <p:nvSpPr>
-          <p:cNvPr id="37" name="Rectangle 36"/>
+          <p:cNvPr id="38" name="Rectangle 37"/>
           <p:cNvSpPr/>
           <p:nvPr/>
         </p:nvSpPr>
@@ -8529,7 +8559,7 @@
       </p:sp>
       <p:sp>
         <p:nvSpPr>
-          <p:cNvPr id="38" name="TextBox 37"/>
+          <p:cNvPr id="39" name="TextBox 38"/>
           <p:cNvSpPr txBox="1"/>
           <p:nvPr/>
         </p:nvSpPr>
@@ -8809,9 +8839,33 @@
           </a:p>
         </p:txBody>
       </p:sp>
-      <p:sp>
-        <p:nvSpPr>
-          <p:cNvPr id="7" name="TextBox 6"/>
+      <p:pic>
+        <p:nvPicPr>
+          <p:cNvPr id="7" name="Picture 6" descr="GSDC Logo.png"/>
+          <p:cNvPicPr>
+            <a:picLocks noChangeAspect="1"/>
+          </p:cNvPicPr>
+          <p:nvPr/>
+        </p:nvPicPr>
+        <p:blipFill>
+          <a:blip r:embed="rId2"/>
+          <a:stretch>
+            <a:fillRect/>
+          </a:stretch>
+        </p:blipFill>
+        <p:spPr>
+          <a:xfrm>
+            <a:off x="10286695" y="310896"/>
+            <a:ext cx="1127760" cy="365760"/>
+          </a:xfrm>
+          <a:prstGeom prst="rect">
+            <a:avLst/>
+          </a:prstGeom>
+        </p:spPr>
+      </p:pic>
+      <p:sp>
+        <p:nvSpPr>
+          <p:cNvPr id="8" name="TextBox 7"/>
           <p:cNvSpPr txBox="1"/>
           <p:nvPr/>
         </p:nvSpPr>
@@ -8853,7 +8907,7 @@
       </p:sp>
       <p:sp>
         <p:nvSpPr>
-          <p:cNvPr id="8" name="TextBox 7"/>
+          <p:cNvPr id="9" name="TextBox 8"/>
           <p:cNvSpPr txBox="1"/>
           <p:nvPr/>
         </p:nvSpPr>
@@ -8895,7 +8949,7 @@
       </p:sp>
       <p:sp>
         <p:nvSpPr>
-          <p:cNvPr id="9" name="TextBox 8"/>
+          <p:cNvPr id="10" name="TextBox 9"/>
           <p:cNvSpPr txBox="1"/>
           <p:nvPr/>
         </p:nvSpPr>
@@ -8937,7 +8991,7 @@
       </p:sp>
       <p:sp>
         <p:nvSpPr>
-          <p:cNvPr id="10" name="TextBox 9"/>
+          <p:cNvPr id="11" name="TextBox 10"/>
           <p:cNvSpPr txBox="1"/>
           <p:nvPr/>
         </p:nvSpPr>
@@ -8979,7 +9033,7 @@
       </p:sp>
       <p:sp>
         <p:nvSpPr>
-          <p:cNvPr id="11" name="TextBox 10"/>
+          <p:cNvPr id="12" name="TextBox 11"/>
           <p:cNvSpPr txBox="1"/>
           <p:nvPr/>
         </p:nvSpPr>
@@ -9021,7 +9075,7 @@
       </p:sp>
       <p:sp>
         <p:nvSpPr>
-          <p:cNvPr id="12" name="TextBox 11"/>
+          <p:cNvPr id="13" name="TextBox 12"/>
           <p:cNvSpPr txBox="1"/>
           <p:nvPr/>
         </p:nvSpPr>
@@ -9063,7 +9117,7 @@
       </p:sp>
       <p:sp>
         <p:nvSpPr>
-          <p:cNvPr id="13" name="TextBox 12"/>
+          <p:cNvPr id="14" name="TextBox 13"/>
           <p:cNvSpPr txBox="1"/>
           <p:nvPr/>
         </p:nvSpPr>
@@ -9105,7 +9159,7 @@
       </p:sp>
       <p:sp>
         <p:nvSpPr>
-          <p:cNvPr id="14" name="TextBox 13"/>
+          <p:cNvPr id="15" name="TextBox 14"/>
           <p:cNvSpPr txBox="1"/>
           <p:nvPr/>
         </p:nvSpPr>
@@ -9147,7 +9201,7 @@
       </p:sp>
       <p:sp>
         <p:nvSpPr>
-          <p:cNvPr id="15" name="TextBox 14"/>
+          <p:cNvPr id="16" name="TextBox 15"/>
           <p:cNvSpPr txBox="1"/>
           <p:nvPr/>
         </p:nvSpPr>
@@ -9189,7 +9243,7 @@
       </p:sp>
       <p:sp>
         <p:nvSpPr>
-          <p:cNvPr id="16" name="Rectangle 15"/>
+          <p:cNvPr id="17" name="Rectangle 16"/>
           <p:cNvSpPr/>
           <p:nvPr/>
         </p:nvSpPr>
@@ -9233,7 +9287,7 @@
       </p:sp>
       <p:sp>
         <p:nvSpPr>
-          <p:cNvPr id="17" name="Rectangle 16"/>
+          <p:cNvPr id="18" name="Rectangle 17"/>
           <p:cNvSpPr/>
           <p:nvPr/>
         </p:nvSpPr>
@@ -9277,7 +9331,7 @@
       </p:sp>
       <p:sp>
         <p:nvSpPr>
-          <p:cNvPr id="18" name="Rectangle 17"/>
+          <p:cNvPr id="19" name="Rectangle 18"/>
           <p:cNvSpPr/>
           <p:nvPr/>
         </p:nvSpPr>
@@ -9321,7 +9375,7 @@
       </p:sp>
       <p:sp>
         <p:nvSpPr>
-          <p:cNvPr id="19" name="Rectangle 18"/>
+          <p:cNvPr id="20" name="Rectangle 19"/>
           <p:cNvSpPr/>
           <p:nvPr/>
         </p:nvSpPr>
@@ -9365,7 +9419,7 @@
       </p:sp>
       <p:sp>
         <p:nvSpPr>
-          <p:cNvPr id="20" name="Rectangle 19"/>
+          <p:cNvPr id="21" name="Rectangle 20"/>
           <p:cNvSpPr/>
           <p:nvPr/>
         </p:nvSpPr>
@@ -9409,7 +9463,7 @@
       </p:sp>
       <p:sp>
         <p:nvSpPr>
-          <p:cNvPr id="21" name="Rectangle 20"/>
+          <p:cNvPr id="22" name="Rectangle 21"/>
           <p:cNvSpPr/>
           <p:nvPr/>
         </p:nvSpPr>
@@ -9453,7 +9507,7 @@
       </p:sp>
       <p:sp>
         <p:nvSpPr>
-          <p:cNvPr id="22" name="TextBox 21"/>
+          <p:cNvPr id="23" name="TextBox 22"/>
           <p:cNvSpPr txBox="1"/>
           <p:nvPr/>
         </p:nvSpPr>
@@ -9495,7 +9549,7 @@
       </p:sp>
       <p:sp>
         <p:nvSpPr>
-          <p:cNvPr id="23" name="TextBox 22"/>
+          <p:cNvPr id="24" name="TextBox 23"/>
           <p:cNvSpPr txBox="1"/>
           <p:nvPr/>
         </p:nvSpPr>
@@ -9537,7 +9591,7 @@
       </p:sp>
       <p:sp>
         <p:nvSpPr>
-          <p:cNvPr id="24" name="Rounded Rectangle 23"/>
+          <p:cNvPr id="25" name="Rounded Rectangle 24"/>
           <p:cNvSpPr/>
           <p:nvPr/>
         </p:nvSpPr>
@@ -9583,7 +9637,7 @@
       </p:sp>
       <p:sp>
         <p:nvSpPr>
-          <p:cNvPr id="25" name="TextBox 24"/>
+          <p:cNvPr id="26" name="TextBox 25"/>
           <p:cNvSpPr txBox="1"/>
           <p:nvPr/>
         </p:nvSpPr>
@@ -9625,7 +9679,7 @@
       </p:sp>
       <p:sp>
         <p:nvSpPr>
-          <p:cNvPr id="26" name="TextBox 25"/>
+          <p:cNvPr id="27" name="TextBox 26"/>
           <p:cNvSpPr txBox="1"/>
           <p:nvPr/>
         </p:nvSpPr>
@@ -9667,7 +9721,7 @@
       </p:sp>
       <p:sp>
         <p:nvSpPr>
-          <p:cNvPr id="27" name="TextBox 26"/>
+          <p:cNvPr id="28" name="TextBox 27"/>
           <p:cNvSpPr txBox="1"/>
           <p:nvPr/>
         </p:nvSpPr>
@@ -9709,7 +9763,7 @@
       </p:sp>
       <p:sp>
         <p:nvSpPr>
-          <p:cNvPr id="28" name="TextBox 27"/>
+          <p:cNvPr id="29" name="TextBox 28"/>
           <p:cNvSpPr txBox="1"/>
           <p:nvPr/>
         </p:nvSpPr>
@@ -9751,7 +9805,7 @@
       </p:sp>
       <p:sp>
         <p:nvSpPr>
-          <p:cNvPr id="29" name="TextBox 28"/>
+          <p:cNvPr id="30" name="TextBox 29"/>
           <p:cNvSpPr txBox="1"/>
           <p:nvPr/>
         </p:nvSpPr>
@@ -10031,9 +10085,33 @@
           </a:p>
         </p:txBody>
       </p:sp>
-      <p:sp>
-        <p:nvSpPr>
-          <p:cNvPr id="7" name="TextBox 6"/>
+      <p:pic>
+        <p:nvPicPr>
+          <p:cNvPr id="7" name="Picture 6" descr="GSDC Logo.png"/>
+          <p:cNvPicPr>
+            <a:picLocks noChangeAspect="1"/>
+          </p:cNvPicPr>
+          <p:nvPr/>
+        </p:nvPicPr>
+        <p:blipFill>
+          <a:blip r:embed="rId2"/>
+          <a:stretch>
+            <a:fillRect/>
+          </a:stretch>
+        </p:blipFill>
+        <p:spPr>
+          <a:xfrm>
+            <a:off x="10286695" y="310896"/>
+            <a:ext cx="1127760" cy="365760"/>
+          </a:xfrm>
+          <a:prstGeom prst="rect">
+            <a:avLst/>
+          </a:prstGeom>
+        </p:spPr>
+      </p:pic>
+      <p:sp>
+        <p:nvSpPr>
+          <p:cNvPr id="8" name="TextBox 7"/>
           <p:cNvSpPr txBox="1"/>
           <p:nvPr/>
         </p:nvSpPr>
@@ -10075,7 +10153,7 @@
       </p:sp>
       <p:sp>
         <p:nvSpPr>
-          <p:cNvPr id="8" name="Rounded Rectangle 7"/>
+          <p:cNvPr id="9" name="Rounded Rectangle 8"/>
           <p:cNvSpPr/>
           <p:nvPr/>
         </p:nvSpPr>
@@ -10121,7 +10199,7 @@
       </p:sp>
       <p:sp>
         <p:nvSpPr>
-          <p:cNvPr id="9" name="TextBox 8"/>
+          <p:cNvPr id="10" name="TextBox 9"/>
           <p:cNvSpPr txBox="1"/>
           <p:nvPr/>
         </p:nvSpPr>
@@ -10163,7 +10241,7 @@
       </p:sp>
       <p:sp>
         <p:nvSpPr>
-          <p:cNvPr id="10" name="TextBox 9"/>
+          <p:cNvPr id="11" name="TextBox 10"/>
           <p:cNvSpPr txBox="1"/>
           <p:nvPr/>
         </p:nvSpPr>
@@ -10205,7 +10283,7 @@
       </p:sp>
       <p:sp>
         <p:nvSpPr>
-          <p:cNvPr id="11" name="Rounded Rectangle 10"/>
+          <p:cNvPr id="12" name="Rounded Rectangle 11"/>
           <p:cNvSpPr/>
           <p:nvPr/>
         </p:nvSpPr>
@@ -10251,7 +10329,7 @@
       </p:sp>
       <p:sp>
         <p:nvSpPr>
-          <p:cNvPr id="12" name="TextBox 11"/>
+          <p:cNvPr id="13" name="TextBox 12"/>
           <p:cNvSpPr txBox="1"/>
           <p:nvPr/>
         </p:nvSpPr>
@@ -10293,7 +10371,7 @@
       </p:sp>
       <p:sp>
         <p:nvSpPr>
-          <p:cNvPr id="13" name="TextBox 12"/>
+          <p:cNvPr id="14" name="TextBox 13"/>
           <p:cNvSpPr txBox="1"/>
           <p:nvPr/>
         </p:nvSpPr>
@@ -10335,7 +10413,7 @@
       </p:sp>
       <p:sp>
         <p:nvSpPr>
-          <p:cNvPr id="14" name="Rounded Rectangle 13"/>
+          <p:cNvPr id="15" name="Rounded Rectangle 14"/>
           <p:cNvSpPr/>
           <p:nvPr/>
         </p:nvSpPr>
@@ -10381,7 +10459,7 @@
       </p:sp>
       <p:sp>
         <p:nvSpPr>
-          <p:cNvPr id="15" name="TextBox 14"/>
+          <p:cNvPr id="16" name="TextBox 15"/>
           <p:cNvSpPr txBox="1"/>
           <p:nvPr/>
         </p:nvSpPr>
@@ -10423,7 +10501,7 @@
       </p:sp>
       <p:sp>
         <p:nvSpPr>
-          <p:cNvPr id="16" name="TextBox 15"/>
+          <p:cNvPr id="17" name="TextBox 16"/>
           <p:cNvSpPr txBox="1"/>
           <p:nvPr/>
         </p:nvSpPr>
@@ -10465,7 +10543,7 @@
       </p:sp>
       <p:sp>
         <p:nvSpPr>
-          <p:cNvPr id="17" name="Rounded Rectangle 16"/>
+          <p:cNvPr id="18" name="Rounded Rectangle 17"/>
           <p:cNvSpPr/>
           <p:nvPr/>
         </p:nvSpPr>
@@ -10511,7 +10589,7 @@
       </p:sp>
       <p:sp>
         <p:nvSpPr>
-          <p:cNvPr id="18" name="TextBox 17"/>
+          <p:cNvPr id="19" name="TextBox 18"/>
           <p:cNvSpPr txBox="1"/>
           <p:nvPr/>
         </p:nvSpPr>
@@ -10553,7 +10631,7 @@
       </p:sp>
       <p:sp>
         <p:nvSpPr>
-          <p:cNvPr id="19" name="TextBox 18"/>
+          <p:cNvPr id="20" name="TextBox 19"/>
           <p:cNvSpPr txBox="1"/>
           <p:nvPr/>
         </p:nvSpPr>
@@ -10595,7 +10673,7 @@
       </p:sp>
       <p:sp>
         <p:nvSpPr>
-          <p:cNvPr id="20" name="TextBox 19"/>
+          <p:cNvPr id="21" name="TextBox 20"/>
           <p:cNvSpPr txBox="1"/>
           <p:nvPr/>
         </p:nvSpPr>
@@ -10875,9 +10953,33 @@
           </a:p>
         </p:txBody>
       </p:sp>
-      <p:sp>
-        <p:nvSpPr>
-          <p:cNvPr id="7" name="TextBox 6"/>
+      <p:pic>
+        <p:nvPicPr>
+          <p:cNvPr id="7" name="Picture 6" descr="GSDC Logo.png"/>
+          <p:cNvPicPr>
+            <a:picLocks noChangeAspect="1"/>
+          </p:cNvPicPr>
+          <p:nvPr/>
+        </p:nvPicPr>
+        <p:blipFill>
+          <a:blip r:embed="rId2"/>
+          <a:stretch>
+            <a:fillRect/>
+          </a:stretch>
+        </p:blipFill>
+        <p:spPr>
+          <a:xfrm>
+            <a:off x="10286695" y="310896"/>
+            <a:ext cx="1127760" cy="365760"/>
+          </a:xfrm>
+          <a:prstGeom prst="rect">
+            <a:avLst/>
+          </a:prstGeom>
+        </p:spPr>
+      </p:pic>
+      <p:sp>
+        <p:nvSpPr>
+          <p:cNvPr id="8" name="TextBox 7"/>
           <p:cNvSpPr txBox="1"/>
           <p:nvPr/>
         </p:nvSpPr>
@@ -10919,7 +11021,7 @@
       </p:sp>
       <p:sp>
         <p:nvSpPr>
-          <p:cNvPr id="8" name="TextBox 7"/>
+          <p:cNvPr id="9" name="TextBox 8"/>
           <p:cNvSpPr txBox="1"/>
           <p:nvPr/>
         </p:nvSpPr>
@@ -10961,7 +11063,7 @@
       </p:sp>
       <p:sp>
         <p:nvSpPr>
-          <p:cNvPr id="9" name="TextBox 8"/>
+          <p:cNvPr id="10" name="TextBox 9"/>
           <p:cNvSpPr txBox="1"/>
           <p:nvPr/>
         </p:nvSpPr>
@@ -11003,7 +11105,7 @@
       </p:sp>
       <p:sp>
         <p:nvSpPr>
-          <p:cNvPr id="10" name="TextBox 9"/>
+          <p:cNvPr id="11" name="TextBox 10"/>
           <p:cNvSpPr txBox="1"/>
           <p:nvPr/>
         </p:nvSpPr>
@@ -11045,7 +11147,7 @@
       </p:sp>
       <p:sp>
         <p:nvSpPr>
-          <p:cNvPr id="11" name="Rectangle 10"/>
+          <p:cNvPr id="12" name="Rectangle 11"/>
           <p:cNvSpPr/>
           <p:nvPr/>
         </p:nvSpPr>
@@ -11089,7 +11191,7 @@
       </p:sp>
       <p:sp>
         <p:nvSpPr>
-          <p:cNvPr id="12" name="TextBox 11"/>
+          <p:cNvPr id="13" name="TextBox 12"/>
           <p:cNvSpPr txBox="1"/>
           <p:nvPr/>
         </p:nvSpPr>
@@ -11131,7 +11233,7 @@
       </p:sp>
       <p:sp>
         <p:nvSpPr>
-          <p:cNvPr id="13" name="TextBox 12"/>
+          <p:cNvPr id="14" name="TextBox 13"/>
           <p:cNvSpPr txBox="1"/>
           <p:nvPr/>
         </p:nvSpPr>
@@ -11173,7 +11275,7 @@
       </p:sp>
       <p:sp>
         <p:nvSpPr>
-          <p:cNvPr id="14" name="TextBox 13"/>
+          <p:cNvPr id="15" name="TextBox 14"/>
           <p:cNvSpPr txBox="1"/>
           <p:nvPr/>
         </p:nvSpPr>
@@ -11215,7 +11317,7 @@
       </p:sp>
       <p:sp>
         <p:nvSpPr>
-          <p:cNvPr id="15" name="Rectangle 14"/>
+          <p:cNvPr id="16" name="Rectangle 15"/>
           <p:cNvSpPr/>
           <p:nvPr/>
         </p:nvSpPr>
@@ -11259,7 +11361,7 @@
       </p:sp>
       <p:sp>
         <p:nvSpPr>
-          <p:cNvPr id="16" name="TextBox 15"/>
+          <p:cNvPr id="17" name="TextBox 16"/>
           <p:cNvSpPr txBox="1"/>
           <p:nvPr/>
         </p:nvSpPr>
@@ -11301,7 +11403,7 @@
       </p:sp>
       <p:sp>
         <p:nvSpPr>
-          <p:cNvPr id="17" name="TextBox 16"/>
+          <p:cNvPr id="18" name="TextBox 17"/>
           <p:cNvSpPr txBox="1"/>
           <p:nvPr/>
         </p:nvSpPr>
@@ -11343,7 +11445,7 @@
       </p:sp>
       <p:sp>
         <p:nvSpPr>
-          <p:cNvPr id="18" name="TextBox 17"/>
+          <p:cNvPr id="19" name="TextBox 18"/>
           <p:cNvSpPr txBox="1"/>
           <p:nvPr/>
         </p:nvSpPr>
@@ -11385,7 +11487,7 @@
       </p:sp>
       <p:sp>
         <p:nvSpPr>
-          <p:cNvPr id="19" name="Rectangle 18"/>
+          <p:cNvPr id="20" name="Rectangle 19"/>
           <p:cNvSpPr/>
           <p:nvPr/>
         </p:nvSpPr>
@@ -11429,7 +11531,7 @@
       </p:sp>
       <p:sp>
         <p:nvSpPr>
-          <p:cNvPr id="20" name="TextBox 19"/>
+          <p:cNvPr id="21" name="TextBox 20"/>
           <p:cNvSpPr txBox="1"/>
           <p:nvPr/>
         </p:nvSpPr>
@@ -11471,7 +11573,7 @@
       </p:sp>
       <p:sp>
         <p:nvSpPr>
-          <p:cNvPr id="21" name="TextBox 20"/>
+          <p:cNvPr id="22" name="TextBox 21"/>
           <p:cNvSpPr txBox="1"/>
           <p:nvPr/>
         </p:nvSpPr>
@@ -11513,7 +11615,7 @@
       </p:sp>
       <p:sp>
         <p:nvSpPr>
-          <p:cNvPr id="22" name="TextBox 21"/>
+          <p:cNvPr id="23" name="TextBox 22"/>
           <p:cNvSpPr txBox="1"/>
           <p:nvPr/>
         </p:nvSpPr>
@@ -11555,7 +11657,7 @@
       </p:sp>
       <p:sp>
         <p:nvSpPr>
-          <p:cNvPr id="23" name="Rectangle 22"/>
+          <p:cNvPr id="24" name="Rectangle 23"/>
           <p:cNvSpPr/>
           <p:nvPr/>
         </p:nvSpPr>
@@ -11599,7 +11701,7 @@
       </p:sp>
       <p:sp>
         <p:nvSpPr>
-          <p:cNvPr id="24" name="TextBox 23"/>
+          <p:cNvPr id="25" name="TextBox 24"/>
           <p:cNvSpPr txBox="1"/>
           <p:nvPr/>
         </p:nvSpPr>
@@ -11641,7 +11743,7 @@
       </p:sp>
       <p:sp>
         <p:nvSpPr>
-          <p:cNvPr id="25" name="TextBox 24"/>
+          <p:cNvPr id="26" name="TextBox 25"/>
           <p:cNvSpPr txBox="1"/>
           <p:nvPr/>
         </p:nvSpPr>
@@ -11683,7 +11785,7 @@
       </p:sp>
       <p:sp>
         <p:nvSpPr>
-          <p:cNvPr id="26" name="TextBox 25"/>
+          <p:cNvPr id="27" name="TextBox 26"/>
           <p:cNvSpPr txBox="1"/>
           <p:nvPr/>
         </p:nvSpPr>
@@ -11725,7 +11827,7 @@
       </p:sp>
       <p:sp>
         <p:nvSpPr>
-          <p:cNvPr id="27" name="Rectangle 26"/>
+          <p:cNvPr id="28" name="Rectangle 27"/>
           <p:cNvSpPr/>
           <p:nvPr/>
         </p:nvSpPr>
@@ -11769,7 +11871,7 @@
       </p:sp>
       <p:sp>
         <p:nvSpPr>
-          <p:cNvPr id="28" name="TextBox 27"/>
+          <p:cNvPr id="29" name="TextBox 28"/>
           <p:cNvSpPr txBox="1"/>
           <p:nvPr/>
         </p:nvSpPr>
@@ -11811,7 +11913,7 @@
       </p:sp>
       <p:sp>
         <p:nvSpPr>
-          <p:cNvPr id="29" name="TextBox 28"/>
+          <p:cNvPr id="30" name="TextBox 29"/>
           <p:cNvSpPr txBox="1"/>
           <p:nvPr/>
         </p:nvSpPr>
@@ -11853,7 +11955,7 @@
       </p:sp>
       <p:sp>
         <p:nvSpPr>
-          <p:cNvPr id="30" name="TextBox 29"/>
+          <p:cNvPr id="31" name="TextBox 30"/>
           <p:cNvSpPr txBox="1"/>
           <p:nvPr/>
         </p:nvSpPr>
@@ -11895,7 +11997,7 @@
       </p:sp>
       <p:sp>
         <p:nvSpPr>
-          <p:cNvPr id="31" name="Rectangle 30"/>
+          <p:cNvPr id="32" name="Rectangle 31"/>
           <p:cNvSpPr/>
           <p:nvPr/>
         </p:nvSpPr>
@@ -11939,7 +12041,7 @@
       </p:sp>
       <p:sp>
         <p:nvSpPr>
-          <p:cNvPr id="32" name="TextBox 31"/>
+          <p:cNvPr id="33" name="TextBox 32"/>
           <p:cNvSpPr txBox="1"/>
           <p:nvPr/>
         </p:nvSpPr>
@@ -12219,9 +12321,33 @@
           </a:p>
         </p:txBody>
       </p:sp>
-      <p:sp>
-        <p:nvSpPr>
-          <p:cNvPr id="7" name="TextBox 6"/>
+      <p:pic>
+        <p:nvPicPr>
+          <p:cNvPr id="7" name="Picture 6" descr="GSDC Logo.png"/>
+          <p:cNvPicPr>
+            <a:picLocks noChangeAspect="1"/>
+          </p:cNvPicPr>
+          <p:nvPr/>
+        </p:nvPicPr>
+        <p:blipFill>
+          <a:blip r:embed="rId2"/>
+          <a:stretch>
+            <a:fillRect/>
+          </a:stretch>
+        </p:blipFill>
+        <p:spPr>
+          <a:xfrm>
+            <a:off x="10286695" y="310896"/>
+            <a:ext cx="1127760" cy="365760"/>
+          </a:xfrm>
+          <a:prstGeom prst="rect">
+            <a:avLst/>
+          </a:prstGeom>
+        </p:spPr>
+      </p:pic>
+      <p:sp>
+        <p:nvSpPr>
+          <p:cNvPr id="8" name="TextBox 7"/>
           <p:cNvSpPr txBox="1"/>
           <p:nvPr/>
         </p:nvSpPr>
@@ -12263,7 +12389,7 @@
       </p:sp>
       <p:sp>
         <p:nvSpPr>
-          <p:cNvPr id="8" name="TextBox 7"/>
+          <p:cNvPr id="9" name="TextBox 8"/>
           <p:cNvSpPr txBox="1"/>
           <p:nvPr/>
         </p:nvSpPr>
@@ -12305,7 +12431,7 @@
       </p:sp>
       <p:sp>
         <p:nvSpPr>
-          <p:cNvPr id="9" name="TextBox 8"/>
+          <p:cNvPr id="10" name="TextBox 9"/>
           <p:cNvSpPr txBox="1"/>
           <p:nvPr/>
         </p:nvSpPr>
@@ -12347,7 +12473,7 @@
       </p:sp>
       <p:sp>
         <p:nvSpPr>
-          <p:cNvPr id="10" name="TextBox 9"/>
+          <p:cNvPr id="11" name="TextBox 10"/>
           <p:cNvSpPr txBox="1"/>
           <p:nvPr/>
         </p:nvSpPr>
@@ -12389,7 +12515,7 @@
       </p:sp>
       <p:sp>
         <p:nvSpPr>
-          <p:cNvPr id="11" name="Rectangle 10"/>
+          <p:cNvPr id="12" name="Rectangle 11"/>
           <p:cNvSpPr/>
           <p:nvPr/>
         </p:nvSpPr>
@@ -12433,7 +12559,7 @@
       </p:sp>
       <p:sp>
         <p:nvSpPr>
-          <p:cNvPr id="12" name="TextBox 11"/>
+          <p:cNvPr id="13" name="TextBox 12"/>
           <p:cNvSpPr txBox="1"/>
           <p:nvPr/>
         </p:nvSpPr>
@@ -12475,7 +12601,7 @@
       </p:sp>
       <p:sp>
         <p:nvSpPr>
-          <p:cNvPr id="13" name="TextBox 12"/>
+          <p:cNvPr id="14" name="TextBox 13"/>
           <p:cNvSpPr txBox="1"/>
           <p:nvPr/>
         </p:nvSpPr>
@@ -12517,7 +12643,7 @@
       </p:sp>
       <p:sp>
         <p:nvSpPr>
-          <p:cNvPr id="14" name="TextBox 13"/>
+          <p:cNvPr id="15" name="TextBox 14"/>
           <p:cNvSpPr txBox="1"/>
           <p:nvPr/>
         </p:nvSpPr>
@@ -12559,7 +12685,7 @@
       </p:sp>
       <p:sp>
         <p:nvSpPr>
-          <p:cNvPr id="15" name="Rectangle 14"/>
+          <p:cNvPr id="16" name="Rectangle 15"/>
           <p:cNvSpPr/>
           <p:nvPr/>
         </p:nvSpPr>
@@ -12603,7 +12729,7 @@
       </p:sp>
       <p:sp>
         <p:nvSpPr>
-          <p:cNvPr id="16" name="TextBox 15"/>
+          <p:cNvPr id="17" name="TextBox 16"/>
           <p:cNvSpPr txBox="1"/>
           <p:nvPr/>
         </p:nvSpPr>
@@ -12645,7 +12771,7 @@
       </p:sp>
       <p:sp>
         <p:nvSpPr>
-          <p:cNvPr id="17" name="TextBox 16"/>
+          <p:cNvPr id="18" name="TextBox 17"/>
           <p:cNvSpPr txBox="1"/>
           <p:nvPr/>
         </p:nvSpPr>
@@ -12687,7 +12813,7 @@
       </p:sp>
       <p:sp>
         <p:nvSpPr>
-          <p:cNvPr id="18" name="TextBox 17"/>
+          <p:cNvPr id="19" name="TextBox 18"/>
           <p:cNvSpPr txBox="1"/>
           <p:nvPr/>
         </p:nvSpPr>
@@ -12729,7 +12855,7 @@
       </p:sp>
       <p:sp>
         <p:nvSpPr>
-          <p:cNvPr id="19" name="Rectangle 18"/>
+          <p:cNvPr id="20" name="Rectangle 19"/>
           <p:cNvSpPr/>
           <p:nvPr/>
         </p:nvSpPr>
@@ -12773,7 +12899,7 @@
       </p:sp>
       <p:sp>
         <p:nvSpPr>
-          <p:cNvPr id="20" name="TextBox 19"/>
+          <p:cNvPr id="21" name="TextBox 20"/>
           <p:cNvSpPr txBox="1"/>
           <p:nvPr/>
         </p:nvSpPr>
@@ -12815,7 +12941,7 @@
       </p:sp>
       <p:sp>
         <p:nvSpPr>
-          <p:cNvPr id="21" name="TextBox 20"/>
+          <p:cNvPr id="22" name="TextBox 21"/>
           <p:cNvSpPr txBox="1"/>
           <p:nvPr/>
         </p:nvSpPr>
@@ -12857,7 +12983,7 @@
       </p:sp>
       <p:sp>
         <p:nvSpPr>
-          <p:cNvPr id="22" name="TextBox 21"/>
+          <p:cNvPr id="23" name="TextBox 22"/>
           <p:cNvSpPr txBox="1"/>
           <p:nvPr/>
         </p:nvSpPr>
@@ -12899,7 +13025,7 @@
       </p:sp>
       <p:sp>
         <p:nvSpPr>
-          <p:cNvPr id="23" name="Rectangle 22"/>
+          <p:cNvPr id="24" name="Rectangle 23"/>
           <p:cNvSpPr/>
           <p:nvPr/>
         </p:nvSpPr>
@@ -12943,7 +13069,7 @@
       </p:sp>
       <p:sp>
         <p:nvSpPr>
-          <p:cNvPr id="24" name="TextBox 23"/>
+          <p:cNvPr id="25" name="TextBox 24"/>
           <p:cNvSpPr txBox="1"/>
           <p:nvPr/>
         </p:nvSpPr>
@@ -12985,7 +13111,7 @@
       </p:sp>
       <p:sp>
         <p:nvSpPr>
-          <p:cNvPr id="25" name="TextBox 24"/>
+          <p:cNvPr id="26" name="TextBox 25"/>
           <p:cNvSpPr txBox="1"/>
           <p:nvPr/>
         </p:nvSpPr>
@@ -13027,7 +13153,7 @@
       </p:sp>
       <p:sp>
         <p:nvSpPr>
-          <p:cNvPr id="26" name="TextBox 25"/>
+          <p:cNvPr id="27" name="TextBox 26"/>
           <p:cNvSpPr txBox="1"/>
           <p:nvPr/>
         </p:nvSpPr>
@@ -13069,7 +13195,7 @@
       </p:sp>
       <p:sp>
         <p:nvSpPr>
-          <p:cNvPr id="27" name="Rectangle 26"/>
+          <p:cNvPr id="28" name="Rectangle 27"/>
           <p:cNvSpPr/>
           <p:nvPr/>
         </p:nvSpPr>
@@ -13113,7 +13239,7 @@
       </p:sp>
       <p:sp>
         <p:nvSpPr>
-          <p:cNvPr id="28" name="TextBox 27"/>
+          <p:cNvPr id="29" name="TextBox 28"/>
           <p:cNvSpPr txBox="1"/>
           <p:nvPr/>
         </p:nvSpPr>
@@ -13155,7 +13281,7 @@
       </p:sp>
       <p:sp>
         <p:nvSpPr>
-          <p:cNvPr id="29" name="TextBox 28"/>
+          <p:cNvPr id="30" name="TextBox 29"/>
           <p:cNvSpPr txBox="1"/>
           <p:nvPr/>
         </p:nvSpPr>
@@ -13197,7 +13323,7 @@
       </p:sp>
       <p:sp>
         <p:nvSpPr>
-          <p:cNvPr id="30" name="TextBox 29"/>
+          <p:cNvPr id="31" name="TextBox 30"/>
           <p:cNvSpPr txBox="1"/>
           <p:nvPr/>
         </p:nvSpPr>
@@ -13239,7 +13365,7 @@
       </p:sp>
       <p:sp>
         <p:nvSpPr>
-          <p:cNvPr id="31" name="Rectangle 30"/>
+          <p:cNvPr id="32" name="Rectangle 31"/>
           <p:cNvSpPr/>
           <p:nvPr/>
         </p:nvSpPr>
@@ -13283,7 +13409,7 @@
       </p:sp>
       <p:sp>
         <p:nvSpPr>
-          <p:cNvPr id="32" name="TextBox 31"/>
+          <p:cNvPr id="33" name="TextBox 32"/>
           <p:cNvSpPr txBox="1"/>
           <p:nvPr/>
         </p:nvSpPr>
@@ -13569,9 +13695,33 @@
           </a:p>
         </p:txBody>
       </p:sp>
-      <p:sp>
-        <p:nvSpPr>
-          <p:cNvPr id="7" name="TextBox 6"/>
+      <p:pic>
+        <p:nvPicPr>
+          <p:cNvPr id="7" name="Picture 6" descr="GSDC Logo.png"/>
+          <p:cNvPicPr>
+            <a:picLocks noChangeAspect="1"/>
+          </p:cNvPicPr>
+          <p:nvPr/>
+        </p:nvPicPr>
+        <p:blipFill>
+          <a:blip r:embed="rId2"/>
+          <a:stretch>
+            <a:fillRect/>
+          </a:stretch>
+        </p:blipFill>
+        <p:spPr>
+          <a:xfrm>
+            <a:off x="10286695" y="310896"/>
+            <a:ext cx="1127760" cy="365760"/>
+          </a:xfrm>
+          <a:prstGeom prst="rect">
+            <a:avLst/>
+          </a:prstGeom>
+        </p:spPr>
+      </p:pic>
+      <p:sp>
+        <p:nvSpPr>
+          <p:cNvPr id="8" name="TextBox 7"/>
           <p:cNvSpPr txBox="1"/>
           <p:nvPr/>
         </p:nvSpPr>
@@ -13613,7 +13763,7 @@
       </p:sp>
       <p:sp>
         <p:nvSpPr>
-          <p:cNvPr id="8" name="TextBox 7"/>
+          <p:cNvPr id="9" name="TextBox 8"/>
           <p:cNvSpPr txBox="1"/>
           <p:nvPr/>
         </p:nvSpPr>
@@ -13655,7 +13805,7 @@
       </p:sp>
       <p:sp>
         <p:nvSpPr>
-          <p:cNvPr id="9" name="TextBox 8"/>
+          <p:cNvPr id="10" name="TextBox 9"/>
           <p:cNvSpPr txBox="1"/>
           <p:nvPr/>
         </p:nvSpPr>
@@ -13697,7 +13847,7 @@
       </p:sp>
       <p:sp>
         <p:nvSpPr>
-          <p:cNvPr id="10" name="TextBox 9"/>
+          <p:cNvPr id="11" name="TextBox 10"/>
           <p:cNvSpPr txBox="1"/>
           <p:nvPr/>
         </p:nvSpPr>
@@ -13739,7 +13889,7 @@
       </p:sp>
       <p:sp>
         <p:nvSpPr>
-          <p:cNvPr id="11" name="Rectangle 10"/>
+          <p:cNvPr id="12" name="Rectangle 11"/>
           <p:cNvSpPr/>
           <p:nvPr/>
         </p:nvSpPr>
@@ -13783,7 +13933,7 @@
       </p:sp>
       <p:sp>
         <p:nvSpPr>
-          <p:cNvPr id="12" name="TextBox 11"/>
+          <p:cNvPr id="13" name="TextBox 12"/>
           <p:cNvSpPr txBox="1"/>
           <p:nvPr/>
         </p:nvSpPr>
@@ -13825,7 +13975,7 @@
       </p:sp>
       <p:sp>
         <p:nvSpPr>
-          <p:cNvPr id="13" name="TextBox 12"/>
+          <p:cNvPr id="14" name="TextBox 13"/>
           <p:cNvSpPr txBox="1"/>
           <p:nvPr/>
         </p:nvSpPr>
@@ -13867,7 +14017,7 @@
       </p:sp>
       <p:sp>
         <p:nvSpPr>
-          <p:cNvPr id="14" name="TextBox 13"/>
+          <p:cNvPr id="15" name="TextBox 14"/>
           <p:cNvSpPr txBox="1"/>
           <p:nvPr/>
         </p:nvSpPr>
@@ -13909,7 +14059,7 @@
       </p:sp>
       <p:sp>
         <p:nvSpPr>
-          <p:cNvPr id="15" name="Rectangle 14"/>
+          <p:cNvPr id="16" name="Rectangle 15"/>
           <p:cNvSpPr/>
           <p:nvPr/>
         </p:nvSpPr>
@@ -13953,7 +14103,7 @@
       </p:sp>
       <p:sp>
         <p:nvSpPr>
-          <p:cNvPr id="16" name="TextBox 15"/>
+          <p:cNvPr id="17" name="TextBox 16"/>
           <p:cNvSpPr txBox="1"/>
           <p:nvPr/>
         </p:nvSpPr>
@@ -13995,7 +14145,7 @@
       </p:sp>
       <p:sp>
         <p:nvSpPr>
-          <p:cNvPr id="17" name="TextBox 16"/>
+          <p:cNvPr id="18" name="TextBox 17"/>
           <p:cNvSpPr txBox="1"/>
           <p:nvPr/>
         </p:nvSpPr>
@@ -14037,7 +14187,7 @@
       </p:sp>
       <p:sp>
         <p:nvSpPr>
-          <p:cNvPr id="18" name="TextBox 17"/>
+          <p:cNvPr id="19" name="TextBox 18"/>
           <p:cNvSpPr txBox="1"/>
           <p:nvPr/>
         </p:nvSpPr>
@@ -14079,7 +14229,7 @@
       </p:sp>
       <p:sp>
         <p:nvSpPr>
-          <p:cNvPr id="19" name="Rectangle 18"/>
+          <p:cNvPr id="20" name="Rectangle 19"/>
           <p:cNvSpPr/>
           <p:nvPr/>
         </p:nvSpPr>
@@ -14123,7 +14273,7 @@
       </p:sp>
       <p:sp>
         <p:nvSpPr>
-          <p:cNvPr id="20" name="TextBox 19"/>
+          <p:cNvPr id="21" name="TextBox 20"/>
           <p:cNvSpPr txBox="1"/>
           <p:nvPr/>
         </p:nvSpPr>
@@ -14165,7 +14315,7 @@
       </p:sp>
       <p:sp>
         <p:nvSpPr>
-          <p:cNvPr id="21" name="TextBox 20"/>
+          <p:cNvPr id="22" name="TextBox 21"/>
           <p:cNvSpPr txBox="1"/>
           <p:nvPr/>
         </p:nvSpPr>
@@ -14207,7 +14357,7 @@
       </p:sp>
       <p:sp>
         <p:nvSpPr>
-          <p:cNvPr id="22" name="TextBox 21"/>
+          <p:cNvPr id="23" name="TextBox 22"/>
           <p:cNvSpPr txBox="1"/>
           <p:nvPr/>
         </p:nvSpPr>
@@ -14249,7 +14399,7 @@
       </p:sp>
       <p:sp>
         <p:nvSpPr>
-          <p:cNvPr id="23" name="Rectangle 22"/>
+          <p:cNvPr id="24" name="Rectangle 23"/>
           <p:cNvSpPr/>
           <p:nvPr/>
         </p:nvSpPr>
@@ -14293,7 +14443,7 @@
       </p:sp>
       <p:sp>
         <p:nvSpPr>
-          <p:cNvPr id="24" name="TextBox 23"/>
+          <p:cNvPr id="25" name="TextBox 24"/>
           <p:cNvSpPr txBox="1"/>
           <p:nvPr/>
         </p:nvSpPr>
@@ -14335,7 +14485,7 @@
       </p:sp>
       <p:sp>
         <p:nvSpPr>
-          <p:cNvPr id="25" name="TextBox 24"/>
+          <p:cNvPr id="26" name="TextBox 25"/>
           <p:cNvSpPr txBox="1"/>
           <p:nvPr/>
         </p:nvSpPr>
@@ -14377,7 +14527,7 @@
       </p:sp>
       <p:sp>
         <p:nvSpPr>
-          <p:cNvPr id="26" name="TextBox 25"/>
+          <p:cNvPr id="27" name="TextBox 26"/>
           <p:cNvSpPr txBox="1"/>
           <p:nvPr/>
         </p:nvSpPr>
@@ -14419,7 +14569,7 @@
       </p:sp>
       <p:sp>
         <p:nvSpPr>
-          <p:cNvPr id="27" name="Rectangle 26"/>
+          <p:cNvPr id="28" name="Rectangle 27"/>
           <p:cNvSpPr/>
           <p:nvPr/>
         </p:nvSpPr>
@@ -14463,7 +14613,7 @@
       </p:sp>
       <p:sp>
         <p:nvSpPr>
-          <p:cNvPr id="28" name="TextBox 27"/>
+          <p:cNvPr id="29" name="TextBox 28"/>
           <p:cNvSpPr txBox="1"/>
           <p:nvPr/>
         </p:nvSpPr>
@@ -14505,7 +14655,7 @@
       </p:sp>
       <p:sp>
         <p:nvSpPr>
-          <p:cNvPr id="29" name="TextBox 28"/>
+          <p:cNvPr id="30" name="TextBox 29"/>
           <p:cNvSpPr txBox="1"/>
           <p:nvPr/>
         </p:nvSpPr>
@@ -14547,7 +14697,7 @@
       </p:sp>
       <p:sp>
         <p:nvSpPr>
-          <p:cNvPr id="30" name="TextBox 29"/>
+          <p:cNvPr id="31" name="TextBox 30"/>
           <p:cNvSpPr txBox="1"/>
           <p:nvPr/>
         </p:nvSpPr>
@@ -14589,7 +14739,7 @@
       </p:sp>
       <p:sp>
         <p:nvSpPr>
-          <p:cNvPr id="31" name="Rectangle 30"/>
+          <p:cNvPr id="32" name="Rectangle 31"/>
           <p:cNvSpPr/>
           <p:nvPr/>
         </p:nvSpPr>
@@ -14633,7 +14783,7 @@
       </p:sp>
       <p:sp>
         <p:nvSpPr>
-          <p:cNvPr id="32" name="Rounded Rectangle 31"/>
+          <p:cNvPr id="33" name="Rounded Rectangle 32"/>
           <p:cNvSpPr/>
           <p:nvPr/>
         </p:nvSpPr>
@@ -14679,7 +14829,7 @@
       </p:sp>
       <p:sp>
         <p:nvSpPr>
-          <p:cNvPr id="33" name="TextBox 32"/>
+          <p:cNvPr id="34" name="TextBox 33"/>
           <p:cNvSpPr txBox="1"/>
           <p:nvPr/>
         </p:nvSpPr>
@@ -14759,7 +14909,7 @@
       </p:sp>
       <p:sp>
         <p:nvSpPr>
-          <p:cNvPr id="34" name="TextBox 33"/>
+          <p:cNvPr id="35" name="TextBox 34"/>
           <p:cNvSpPr txBox="1"/>
           <p:nvPr/>
         </p:nvSpPr>
@@ -15039,9 +15189,33 @@
           </a:p>
         </p:txBody>
       </p:sp>
-      <p:sp>
-        <p:nvSpPr>
-          <p:cNvPr id="7" name="TextBox 6"/>
+      <p:pic>
+        <p:nvPicPr>
+          <p:cNvPr id="7" name="Picture 6" descr="GSDC Logo.png"/>
+          <p:cNvPicPr>
+            <a:picLocks noChangeAspect="1"/>
+          </p:cNvPicPr>
+          <p:nvPr/>
+        </p:nvPicPr>
+        <p:blipFill>
+          <a:blip r:embed="rId2"/>
+          <a:stretch>
+            <a:fillRect/>
+          </a:stretch>
+        </p:blipFill>
+        <p:spPr>
+          <a:xfrm>
+            <a:off x="10286695" y="310896"/>
+            <a:ext cx="1127760" cy="365760"/>
+          </a:xfrm>
+          <a:prstGeom prst="rect">
+            <a:avLst/>
+          </a:prstGeom>
+        </p:spPr>
+      </p:pic>
+      <p:sp>
+        <p:nvSpPr>
+          <p:cNvPr id="8" name="TextBox 7"/>
           <p:cNvSpPr txBox="1"/>
           <p:nvPr/>
         </p:nvSpPr>
@@ -15083,7 +15257,7 @@
       </p:sp>
       <p:sp>
         <p:nvSpPr>
-          <p:cNvPr id="8" name="TextBox 7"/>
+          <p:cNvPr id="9" name="TextBox 8"/>
           <p:cNvSpPr txBox="1"/>
           <p:nvPr/>
         </p:nvSpPr>
@@ -15125,7 +15299,7 @@
       </p:sp>
       <p:sp>
         <p:nvSpPr>
-          <p:cNvPr id="9" name="Rectangle 8"/>
+          <p:cNvPr id="10" name="Rectangle 9"/>
           <p:cNvSpPr/>
           <p:nvPr/>
         </p:nvSpPr>
@@ -15169,7 +15343,7 @@
       </p:sp>
       <p:sp>
         <p:nvSpPr>
-          <p:cNvPr id="10" name="TextBox 9"/>
+          <p:cNvPr id="11" name="TextBox 10"/>
           <p:cNvSpPr txBox="1"/>
           <p:nvPr/>
         </p:nvSpPr>
@@ -15211,7 +15385,7 @@
       </p:sp>
       <p:sp>
         <p:nvSpPr>
-          <p:cNvPr id="11" name="TextBox 10"/>
+          <p:cNvPr id="12" name="TextBox 11"/>
           <p:cNvSpPr txBox="1"/>
           <p:nvPr/>
         </p:nvSpPr>
@@ -15253,7 +15427,7 @@
       </p:sp>
       <p:sp>
         <p:nvSpPr>
-          <p:cNvPr id="12" name="TextBox 11"/>
+          <p:cNvPr id="13" name="TextBox 12"/>
           <p:cNvSpPr txBox="1"/>
           <p:nvPr/>
         </p:nvSpPr>
@@ -15295,7 +15469,7 @@
       </p:sp>
       <p:sp>
         <p:nvSpPr>
-          <p:cNvPr id="13" name="TextBox 12"/>
+          <p:cNvPr id="14" name="TextBox 13"/>
           <p:cNvSpPr txBox="1"/>
           <p:nvPr/>
         </p:nvSpPr>
@@ -15337,7 +15511,7 @@
       </p:sp>
       <p:sp>
         <p:nvSpPr>
-          <p:cNvPr id="14" name="Right Arrow 13"/>
+          <p:cNvPr id="15" name="Right Arrow 14"/>
           <p:cNvSpPr/>
           <p:nvPr/>
         </p:nvSpPr>
@@ -15381,7 +15555,7 @@
       </p:sp>
       <p:sp>
         <p:nvSpPr>
-          <p:cNvPr id="15" name="TextBox 14"/>
+          <p:cNvPr id="16" name="TextBox 15"/>
           <p:cNvSpPr txBox="1"/>
           <p:nvPr/>
         </p:nvSpPr>
@@ -15423,7 +15597,7 @@
       </p:sp>
       <p:sp>
         <p:nvSpPr>
-          <p:cNvPr id="16" name="Rectangle 15"/>
+          <p:cNvPr id="17" name="Rectangle 16"/>
           <p:cNvSpPr/>
           <p:nvPr/>
         </p:nvSpPr>
@@ -15467,7 +15641,7 @@
       </p:sp>
       <p:sp>
         <p:nvSpPr>
-          <p:cNvPr id="17" name="TextBox 16"/>
+          <p:cNvPr id="18" name="TextBox 17"/>
           <p:cNvSpPr txBox="1"/>
           <p:nvPr/>
         </p:nvSpPr>
@@ -15509,7 +15683,7 @@
       </p:sp>
       <p:sp>
         <p:nvSpPr>
-          <p:cNvPr id="18" name="TextBox 17"/>
+          <p:cNvPr id="19" name="TextBox 18"/>
           <p:cNvSpPr txBox="1"/>
           <p:nvPr/>
         </p:nvSpPr>
@@ -15551,7 +15725,7 @@
       </p:sp>
       <p:sp>
         <p:nvSpPr>
-          <p:cNvPr id="19" name="TextBox 18"/>
+          <p:cNvPr id="20" name="TextBox 19"/>
           <p:cNvSpPr txBox="1"/>
           <p:nvPr/>
         </p:nvSpPr>
@@ -15593,7 +15767,7 @@
       </p:sp>
       <p:sp>
         <p:nvSpPr>
-          <p:cNvPr id="20" name="TextBox 19"/>
+          <p:cNvPr id="21" name="TextBox 20"/>
           <p:cNvSpPr txBox="1"/>
           <p:nvPr/>
         </p:nvSpPr>
@@ -15635,7 +15809,7 @@
       </p:sp>
       <p:sp>
         <p:nvSpPr>
-          <p:cNvPr id="21" name="Right Arrow 20"/>
+          <p:cNvPr id="22" name="Right Arrow 21"/>
           <p:cNvSpPr/>
           <p:nvPr/>
         </p:nvSpPr>
@@ -15679,7 +15853,7 @@
       </p:sp>
       <p:sp>
         <p:nvSpPr>
-          <p:cNvPr id="22" name="TextBox 21"/>
+          <p:cNvPr id="23" name="TextBox 22"/>
           <p:cNvSpPr txBox="1"/>
           <p:nvPr/>
         </p:nvSpPr>
@@ -15721,7 +15895,7 @@
       </p:sp>
       <p:sp>
         <p:nvSpPr>
-          <p:cNvPr id="23" name="Rectangle 22"/>
+          <p:cNvPr id="24" name="Rectangle 23"/>
           <p:cNvSpPr/>
           <p:nvPr/>
         </p:nvSpPr>
@@ -15765,7 +15939,7 @@
       </p:sp>
       <p:sp>
         <p:nvSpPr>
-          <p:cNvPr id="24" name="TextBox 23"/>
+          <p:cNvPr id="25" name="TextBox 24"/>
           <p:cNvSpPr txBox="1"/>
           <p:nvPr/>
         </p:nvSpPr>
@@ -15807,7 +15981,7 @@
       </p:sp>
       <p:sp>
         <p:nvSpPr>
-          <p:cNvPr id="25" name="TextBox 24"/>
+          <p:cNvPr id="26" name="TextBox 25"/>
           <p:cNvSpPr txBox="1"/>
           <p:nvPr/>
         </p:nvSpPr>
@@ -15849,7 +16023,7 @@
       </p:sp>
       <p:sp>
         <p:nvSpPr>
-          <p:cNvPr id="26" name="TextBox 25"/>
+          <p:cNvPr id="27" name="TextBox 26"/>
           <p:cNvSpPr txBox="1"/>
           <p:nvPr/>
         </p:nvSpPr>
@@ -15891,7 +16065,7 @@
       </p:sp>
       <p:sp>
         <p:nvSpPr>
-          <p:cNvPr id="27" name="TextBox 26"/>
+          <p:cNvPr id="28" name="TextBox 27"/>
           <p:cNvSpPr txBox="1"/>
           <p:nvPr/>
         </p:nvSpPr>
@@ -15933,7 +16107,7 @@
       </p:sp>
       <p:sp>
         <p:nvSpPr>
-          <p:cNvPr id="28" name="Right Arrow 27"/>
+          <p:cNvPr id="29" name="Right Arrow 28"/>
           <p:cNvSpPr/>
           <p:nvPr/>
         </p:nvSpPr>
@@ -15977,7 +16151,7 @@
       </p:sp>
       <p:sp>
         <p:nvSpPr>
-          <p:cNvPr id="29" name="TextBox 28"/>
+          <p:cNvPr id="30" name="TextBox 29"/>
           <p:cNvSpPr txBox="1"/>
           <p:nvPr/>
         </p:nvSpPr>
@@ -16019,7 +16193,7 @@
       </p:sp>
       <p:sp>
         <p:nvSpPr>
-          <p:cNvPr id="30" name="Rectangle 29"/>
+          <p:cNvPr id="31" name="Rectangle 30"/>
           <p:cNvSpPr/>
           <p:nvPr/>
         </p:nvSpPr>
@@ -16063,7 +16237,7 @@
       </p:sp>
       <p:sp>
         <p:nvSpPr>
-          <p:cNvPr id="31" name="TextBox 30"/>
+          <p:cNvPr id="32" name="TextBox 31"/>
           <p:cNvSpPr txBox="1"/>
           <p:nvPr/>
         </p:nvSpPr>
@@ -16105,7 +16279,7 @@
       </p:sp>
       <p:sp>
         <p:nvSpPr>
-          <p:cNvPr id="32" name="TextBox 31"/>
+          <p:cNvPr id="33" name="TextBox 32"/>
           <p:cNvSpPr txBox="1"/>
           <p:nvPr/>
         </p:nvSpPr>
@@ -16147,7 +16321,7 @@
       </p:sp>
       <p:sp>
         <p:nvSpPr>
-          <p:cNvPr id="33" name="TextBox 32"/>
+          <p:cNvPr id="34" name="TextBox 33"/>
           <p:cNvSpPr txBox="1"/>
           <p:nvPr/>
         </p:nvSpPr>
@@ -16189,7 +16363,7 @@
       </p:sp>
       <p:sp>
         <p:nvSpPr>
-          <p:cNvPr id="34" name="TextBox 33"/>
+          <p:cNvPr id="35" name="TextBox 34"/>
           <p:cNvSpPr txBox="1"/>
           <p:nvPr/>
         </p:nvSpPr>
@@ -16231,7 +16405,7 @@
       </p:sp>
       <p:sp>
         <p:nvSpPr>
-          <p:cNvPr id="35" name="Rectangle 34"/>
+          <p:cNvPr id="36" name="Rectangle 35"/>
           <p:cNvSpPr/>
           <p:nvPr/>
         </p:nvSpPr>
@@ -16275,7 +16449,7 @@
       </p:sp>
       <p:sp>
         <p:nvSpPr>
-          <p:cNvPr id="36" name="TextBox 35"/>
+          <p:cNvPr id="37" name="TextBox 36"/>
           <p:cNvSpPr txBox="1"/>
           <p:nvPr/>
         </p:nvSpPr>
@@ -16317,7 +16491,7 @@
       </p:sp>
       <p:sp>
         <p:nvSpPr>
-          <p:cNvPr id="37" name="TextBox 36"/>
+          <p:cNvPr id="38" name="TextBox 37"/>
           <p:cNvSpPr txBox="1"/>
           <p:nvPr/>
         </p:nvSpPr>
@@ -16597,9 +16771,33 @@
           </a:p>
         </p:txBody>
       </p:sp>
-      <p:sp>
-        <p:nvSpPr>
-          <p:cNvPr id="7" name="TextBox 6"/>
+      <p:pic>
+        <p:nvPicPr>
+          <p:cNvPr id="7" name="Picture 6" descr="GSDC Logo.png"/>
+          <p:cNvPicPr>
+            <a:picLocks noChangeAspect="1"/>
+          </p:cNvPicPr>
+          <p:nvPr/>
+        </p:nvPicPr>
+        <p:blipFill>
+          <a:blip r:embed="rId2"/>
+          <a:stretch>
+            <a:fillRect/>
+          </a:stretch>
+        </p:blipFill>
+        <p:spPr>
+          <a:xfrm>
+            <a:off x="10286695" y="310896"/>
+            <a:ext cx="1127760" cy="365760"/>
+          </a:xfrm>
+          <a:prstGeom prst="rect">
+            <a:avLst/>
+          </a:prstGeom>
+        </p:spPr>
+      </p:pic>
+      <p:sp>
+        <p:nvSpPr>
+          <p:cNvPr id="8" name="TextBox 7"/>
           <p:cNvSpPr txBox="1"/>
           <p:nvPr/>
         </p:nvSpPr>
@@ -16660,7 +16858,7 @@
       </p:sp>
       <p:sp>
         <p:nvSpPr>
-          <p:cNvPr id="8" name="Rounded Rectangle 7"/>
+          <p:cNvPr id="9" name="Rounded Rectangle 8"/>
           <p:cNvSpPr/>
           <p:nvPr/>
         </p:nvSpPr>
@@ -16706,7 +16904,7 @@
       </p:sp>
       <p:sp>
         <p:nvSpPr>
-          <p:cNvPr id="9" name="TextBox 8"/>
+          <p:cNvPr id="10" name="TextBox 9"/>
           <p:cNvSpPr txBox="1"/>
           <p:nvPr/>
         </p:nvSpPr>
@@ -16748,7 +16946,7 @@
       </p:sp>
       <p:sp>
         <p:nvSpPr>
-          <p:cNvPr id="10" name="TextBox 9"/>
+          <p:cNvPr id="11" name="TextBox 10"/>
           <p:cNvSpPr txBox="1"/>
           <p:nvPr/>
         </p:nvSpPr>
@@ -16790,7 +16988,7 @@
       </p:sp>
       <p:sp>
         <p:nvSpPr>
-          <p:cNvPr id="11" name="TextBox 10"/>
+          <p:cNvPr id="12" name="TextBox 11"/>
           <p:cNvSpPr txBox="1"/>
           <p:nvPr/>
         </p:nvSpPr>
@@ -16832,7 +17030,7 @@
       </p:sp>
       <p:sp>
         <p:nvSpPr>
-          <p:cNvPr id="12" name="Rectangle 11"/>
+          <p:cNvPr id="13" name="Rectangle 12"/>
           <p:cNvSpPr/>
           <p:nvPr/>
         </p:nvSpPr>
@@ -16876,7 +17074,7 @@
       </p:sp>
       <p:sp>
         <p:nvSpPr>
-          <p:cNvPr id="13" name="TextBox 12"/>
+          <p:cNvPr id="14" name="TextBox 13"/>
           <p:cNvSpPr txBox="1"/>
           <p:nvPr/>
         </p:nvSpPr>
@@ -16918,7 +17116,7 @@
       </p:sp>
       <p:sp>
         <p:nvSpPr>
-          <p:cNvPr id="14" name="TextBox 13"/>
+          <p:cNvPr id="15" name="TextBox 14"/>
           <p:cNvSpPr txBox="1"/>
           <p:nvPr/>
         </p:nvSpPr>
@@ -16960,7 +17158,7 @@
       </p:sp>
       <p:sp>
         <p:nvSpPr>
-          <p:cNvPr id="15" name="TextBox 14"/>
+          <p:cNvPr id="16" name="TextBox 15"/>
           <p:cNvSpPr txBox="1"/>
           <p:nvPr/>
         </p:nvSpPr>
@@ -17002,7 +17200,7 @@
       </p:sp>
       <p:sp>
         <p:nvSpPr>
-          <p:cNvPr id="16" name="Rectangle 15"/>
+          <p:cNvPr id="17" name="Rectangle 16"/>
           <p:cNvSpPr/>
           <p:nvPr/>
         </p:nvSpPr>
@@ -17046,7 +17244,7 @@
       </p:sp>
       <p:sp>
         <p:nvSpPr>
-          <p:cNvPr id="17" name="TextBox 16"/>
+          <p:cNvPr id="18" name="TextBox 17"/>
           <p:cNvSpPr txBox="1"/>
           <p:nvPr/>
         </p:nvSpPr>
@@ -17088,7 +17286,7 @@
       </p:sp>
       <p:sp>
         <p:nvSpPr>
-          <p:cNvPr id="18" name="TextBox 17"/>
+          <p:cNvPr id="19" name="TextBox 18"/>
           <p:cNvSpPr txBox="1"/>
           <p:nvPr/>
         </p:nvSpPr>
@@ -17130,7 +17328,7 @@
       </p:sp>
       <p:sp>
         <p:nvSpPr>
-          <p:cNvPr id="19" name="TextBox 18"/>
+          <p:cNvPr id="20" name="TextBox 19"/>
           <p:cNvSpPr txBox="1"/>
           <p:nvPr/>
         </p:nvSpPr>
@@ -17172,7 +17370,7 @@
       </p:sp>
       <p:sp>
         <p:nvSpPr>
-          <p:cNvPr id="20" name="Rectangle 19"/>
+          <p:cNvPr id="21" name="Rectangle 20"/>
           <p:cNvSpPr/>
           <p:nvPr/>
         </p:nvSpPr>
@@ -17216,7 +17414,7 @@
       </p:sp>
       <p:sp>
         <p:nvSpPr>
-          <p:cNvPr id="21" name="TextBox 20"/>
+          <p:cNvPr id="22" name="TextBox 21"/>
           <p:cNvSpPr txBox="1"/>
           <p:nvPr/>
         </p:nvSpPr>
@@ -17258,7 +17456,7 @@
       </p:sp>
       <p:sp>
         <p:nvSpPr>
-          <p:cNvPr id="22" name="TextBox 21"/>
+          <p:cNvPr id="23" name="TextBox 22"/>
           <p:cNvSpPr txBox="1"/>
           <p:nvPr/>
         </p:nvSpPr>
@@ -17300,7 +17498,7 @@
       </p:sp>
       <p:sp>
         <p:nvSpPr>
-          <p:cNvPr id="23" name="TextBox 22"/>
+          <p:cNvPr id="24" name="TextBox 23"/>
           <p:cNvSpPr txBox="1"/>
           <p:nvPr/>
         </p:nvSpPr>
@@ -17580,9 +17778,33 @@
           </a:p>
         </p:txBody>
       </p:sp>
-      <p:sp>
-        <p:nvSpPr>
-          <p:cNvPr id="7" name="TextBox 6"/>
+      <p:pic>
+        <p:nvPicPr>
+          <p:cNvPr id="7" name="Picture 6" descr="GSDC Logo.png"/>
+          <p:cNvPicPr>
+            <a:picLocks noChangeAspect="1"/>
+          </p:cNvPicPr>
+          <p:nvPr/>
+        </p:nvPicPr>
+        <p:blipFill>
+          <a:blip r:embed="rId2"/>
+          <a:stretch>
+            <a:fillRect/>
+          </a:stretch>
+        </p:blipFill>
+        <p:spPr>
+          <a:xfrm>
+            <a:off x="10286695" y="310896"/>
+            <a:ext cx="1127760" cy="365760"/>
+          </a:xfrm>
+          <a:prstGeom prst="rect">
+            <a:avLst/>
+          </a:prstGeom>
+        </p:spPr>
+      </p:pic>
+      <p:sp>
+        <p:nvSpPr>
+          <p:cNvPr id="8" name="TextBox 7"/>
           <p:cNvSpPr txBox="1"/>
           <p:nvPr/>
         </p:nvSpPr>
@@ -17624,7 +17846,7 @@
       </p:sp>
       <p:sp>
         <p:nvSpPr>
-          <p:cNvPr id="8" name="TextBox 7"/>
+          <p:cNvPr id="9" name="TextBox 8"/>
           <p:cNvSpPr txBox="1"/>
           <p:nvPr/>
         </p:nvSpPr>
@@ -17666,7 +17888,7 @@
       </p:sp>
       <p:sp>
         <p:nvSpPr>
-          <p:cNvPr id="9" name="TextBox 8"/>
+          <p:cNvPr id="10" name="TextBox 9"/>
           <p:cNvSpPr txBox="1"/>
           <p:nvPr/>
         </p:nvSpPr>
@@ -17708,7 +17930,7 @@
       </p:sp>
       <p:sp>
         <p:nvSpPr>
-          <p:cNvPr id="10" name="TextBox 9"/>
+          <p:cNvPr id="11" name="TextBox 10"/>
           <p:cNvSpPr txBox="1"/>
           <p:nvPr/>
         </p:nvSpPr>
@@ -17750,7 +17972,7 @@
       </p:sp>
       <p:sp>
         <p:nvSpPr>
-          <p:cNvPr id="11" name="Rectangle 10"/>
+          <p:cNvPr id="12" name="Rectangle 11"/>
           <p:cNvSpPr/>
           <p:nvPr/>
         </p:nvSpPr>
@@ -17794,7 +18016,7 @@
       </p:sp>
       <p:sp>
         <p:nvSpPr>
-          <p:cNvPr id="12" name="TextBox 11"/>
+          <p:cNvPr id="13" name="TextBox 12"/>
           <p:cNvSpPr txBox="1"/>
           <p:nvPr/>
         </p:nvSpPr>
@@ -17836,7 +18058,7 @@
       </p:sp>
       <p:sp>
         <p:nvSpPr>
-          <p:cNvPr id="13" name="TextBox 12"/>
+          <p:cNvPr id="14" name="TextBox 13"/>
           <p:cNvSpPr txBox="1"/>
           <p:nvPr/>
         </p:nvSpPr>
@@ -17878,7 +18100,7 @@
       </p:sp>
       <p:sp>
         <p:nvSpPr>
-          <p:cNvPr id="14" name="TextBox 13"/>
+          <p:cNvPr id="15" name="TextBox 14"/>
           <p:cNvSpPr txBox="1"/>
           <p:nvPr/>
         </p:nvSpPr>
@@ -17920,7 +18142,7 @@
       </p:sp>
       <p:sp>
         <p:nvSpPr>
-          <p:cNvPr id="15" name="Rectangle 14"/>
+          <p:cNvPr id="16" name="Rectangle 15"/>
           <p:cNvSpPr/>
           <p:nvPr/>
         </p:nvSpPr>
@@ -17964,7 +18186,7 @@
       </p:sp>
       <p:sp>
         <p:nvSpPr>
-          <p:cNvPr id="16" name="TextBox 15"/>
+          <p:cNvPr id="17" name="TextBox 16"/>
           <p:cNvSpPr txBox="1"/>
           <p:nvPr/>
         </p:nvSpPr>
@@ -18006,7 +18228,7 @@
       </p:sp>
       <p:sp>
         <p:nvSpPr>
-          <p:cNvPr id="17" name="TextBox 16"/>
+          <p:cNvPr id="18" name="TextBox 17"/>
           <p:cNvSpPr txBox="1"/>
           <p:nvPr/>
         </p:nvSpPr>
@@ -18048,7 +18270,7 @@
       </p:sp>
       <p:sp>
         <p:nvSpPr>
-          <p:cNvPr id="18" name="TextBox 17"/>
+          <p:cNvPr id="19" name="TextBox 18"/>
           <p:cNvSpPr txBox="1"/>
           <p:nvPr/>
         </p:nvSpPr>
@@ -18090,7 +18312,7 @@
       </p:sp>
       <p:sp>
         <p:nvSpPr>
-          <p:cNvPr id="19" name="Rectangle 18"/>
+          <p:cNvPr id="20" name="Rectangle 19"/>
           <p:cNvSpPr/>
           <p:nvPr/>
         </p:nvSpPr>
@@ -18134,7 +18356,7 @@
       </p:sp>
       <p:sp>
         <p:nvSpPr>
-          <p:cNvPr id="20" name="TextBox 19"/>
+          <p:cNvPr id="21" name="TextBox 20"/>
           <p:cNvSpPr txBox="1"/>
           <p:nvPr/>
         </p:nvSpPr>
@@ -18176,7 +18398,7 @@
       </p:sp>
       <p:sp>
         <p:nvSpPr>
-          <p:cNvPr id="21" name="TextBox 20"/>
+          <p:cNvPr id="22" name="TextBox 21"/>
           <p:cNvSpPr txBox="1"/>
           <p:nvPr/>
         </p:nvSpPr>
@@ -18218,7 +18440,7 @@
       </p:sp>
       <p:sp>
         <p:nvSpPr>
-          <p:cNvPr id="22" name="TextBox 21"/>
+          <p:cNvPr id="23" name="TextBox 22"/>
           <p:cNvSpPr txBox="1"/>
           <p:nvPr/>
         </p:nvSpPr>
@@ -18260,7 +18482,7 @@
       </p:sp>
       <p:sp>
         <p:nvSpPr>
-          <p:cNvPr id="23" name="Rectangle 22"/>
+          <p:cNvPr id="24" name="Rectangle 23"/>
           <p:cNvSpPr/>
           <p:nvPr/>
         </p:nvSpPr>
@@ -18304,7 +18526,7 @@
       </p:sp>
       <p:sp>
         <p:nvSpPr>
-          <p:cNvPr id="24" name="TextBox 23"/>
+          <p:cNvPr id="25" name="TextBox 24"/>
           <p:cNvSpPr txBox="1"/>
           <p:nvPr/>
         </p:nvSpPr>
@@ -18346,7 +18568,7 @@
       </p:sp>
       <p:sp>
         <p:nvSpPr>
-          <p:cNvPr id="25" name="TextBox 24"/>
+          <p:cNvPr id="26" name="TextBox 25"/>
           <p:cNvSpPr txBox="1"/>
           <p:nvPr/>
         </p:nvSpPr>
@@ -18388,7 +18610,7 @@
       </p:sp>
       <p:sp>
         <p:nvSpPr>
-          <p:cNvPr id="26" name="TextBox 25"/>
+          <p:cNvPr id="27" name="TextBox 26"/>
           <p:cNvSpPr txBox="1"/>
           <p:nvPr/>
         </p:nvSpPr>
@@ -18430,7 +18652,7 @@
       </p:sp>
       <p:sp>
         <p:nvSpPr>
-          <p:cNvPr id="27" name="Rectangle 26"/>
+          <p:cNvPr id="28" name="Rectangle 27"/>
           <p:cNvSpPr/>
           <p:nvPr/>
         </p:nvSpPr>
@@ -18474,7 +18696,7 @@
       </p:sp>
       <p:sp>
         <p:nvSpPr>
-          <p:cNvPr id="28" name="TextBox 27"/>
+          <p:cNvPr id="29" name="TextBox 28"/>
           <p:cNvSpPr txBox="1"/>
           <p:nvPr/>
         </p:nvSpPr>
@@ -18516,7 +18738,7 @@
       </p:sp>
       <p:sp>
         <p:nvSpPr>
-          <p:cNvPr id="29" name="TextBox 28"/>
+          <p:cNvPr id="30" name="TextBox 29"/>
           <p:cNvSpPr txBox="1"/>
           <p:nvPr/>
         </p:nvSpPr>
@@ -18558,7 +18780,7 @@
       </p:sp>
       <p:sp>
         <p:nvSpPr>
-          <p:cNvPr id="30" name="TextBox 29"/>
+          <p:cNvPr id="31" name="TextBox 30"/>
           <p:cNvSpPr txBox="1"/>
           <p:nvPr/>
         </p:nvSpPr>
@@ -18600,7 +18822,7 @@
       </p:sp>
       <p:sp>
         <p:nvSpPr>
-          <p:cNvPr id="31" name="Rectangle 30"/>
+          <p:cNvPr id="32" name="Rectangle 31"/>
           <p:cNvSpPr/>
           <p:nvPr/>
         </p:nvSpPr>
@@ -18644,7 +18866,7 @@
       </p:sp>
       <p:sp>
         <p:nvSpPr>
-          <p:cNvPr id="32" name="TextBox 31"/>
+          <p:cNvPr id="33" name="TextBox 32"/>
           <p:cNvSpPr txBox="1"/>
           <p:nvPr/>
         </p:nvSpPr>
@@ -18686,7 +18908,7 @@
       </p:sp>
       <p:sp>
         <p:nvSpPr>
-          <p:cNvPr id="33" name="TextBox 32"/>
+          <p:cNvPr id="34" name="TextBox 33"/>
           <p:cNvSpPr txBox="1"/>
           <p:nvPr/>
         </p:nvSpPr>
@@ -18728,7 +18950,7 @@
       </p:sp>
       <p:sp>
         <p:nvSpPr>
-          <p:cNvPr id="34" name="TextBox 33"/>
+          <p:cNvPr id="35" name="TextBox 34"/>
           <p:cNvSpPr txBox="1"/>
           <p:nvPr/>
         </p:nvSpPr>
@@ -18770,7 +18992,7 @@
       </p:sp>
       <p:sp>
         <p:nvSpPr>
-          <p:cNvPr id="35" name="Rectangle 34"/>
+          <p:cNvPr id="36" name="Rectangle 35"/>
           <p:cNvSpPr/>
           <p:nvPr/>
         </p:nvSpPr>
@@ -18814,7 +19036,7 @@
       </p:sp>
       <p:sp>
         <p:nvSpPr>
-          <p:cNvPr id="36" name="TextBox 35"/>
+          <p:cNvPr id="37" name="TextBox 36"/>
           <p:cNvSpPr txBox="1"/>
           <p:nvPr/>
         </p:nvSpPr>
@@ -19290,9 +19512,33 @@
           </a:p>
         </p:txBody>
       </p:sp>
-      <p:sp>
-        <p:nvSpPr>
-          <p:cNvPr id="7" name="TextBox 6"/>
+      <p:pic>
+        <p:nvPicPr>
+          <p:cNvPr id="7" name="Picture 6" descr="GSDC Logo.png"/>
+          <p:cNvPicPr>
+            <a:picLocks noChangeAspect="1"/>
+          </p:cNvPicPr>
+          <p:nvPr/>
+        </p:nvPicPr>
+        <p:blipFill>
+          <a:blip r:embed="rId2"/>
+          <a:stretch>
+            <a:fillRect/>
+          </a:stretch>
+        </p:blipFill>
+        <p:spPr>
+          <a:xfrm>
+            <a:off x="10286695" y="310896"/>
+            <a:ext cx="1127760" cy="365760"/>
+          </a:xfrm>
+          <a:prstGeom prst="rect">
+            <a:avLst/>
+          </a:prstGeom>
+        </p:spPr>
+      </p:pic>
+      <p:sp>
+        <p:nvSpPr>
+          <p:cNvPr id="8" name="TextBox 7"/>
           <p:cNvSpPr txBox="1"/>
           <p:nvPr/>
         </p:nvSpPr>
@@ -19334,7 +19580,7 @@
       </p:sp>
       <p:sp>
         <p:nvSpPr>
-          <p:cNvPr id="8" name="TextBox 7"/>
+          <p:cNvPr id="9" name="TextBox 8"/>
           <p:cNvSpPr txBox="1"/>
           <p:nvPr/>
         </p:nvSpPr>
@@ -19376,7 +19622,7 @@
       </p:sp>
       <p:sp>
         <p:nvSpPr>
-          <p:cNvPr id="9" name="TextBox 8"/>
+          <p:cNvPr id="10" name="TextBox 9"/>
           <p:cNvSpPr txBox="1"/>
           <p:nvPr/>
         </p:nvSpPr>
@@ -19418,7 +19664,7 @@
       </p:sp>
       <p:sp>
         <p:nvSpPr>
-          <p:cNvPr id="10" name="Rectangle 9"/>
+          <p:cNvPr id="11" name="Rectangle 10"/>
           <p:cNvSpPr/>
           <p:nvPr/>
         </p:nvSpPr>
@@ -19462,7 +19708,7 @@
       </p:sp>
       <p:sp>
         <p:nvSpPr>
-          <p:cNvPr id="11" name="TextBox 10"/>
+          <p:cNvPr id="12" name="TextBox 11"/>
           <p:cNvSpPr txBox="1"/>
           <p:nvPr/>
         </p:nvSpPr>
@@ -19504,7 +19750,7 @@
       </p:sp>
       <p:sp>
         <p:nvSpPr>
-          <p:cNvPr id="12" name="TextBox 11"/>
+          <p:cNvPr id="13" name="TextBox 12"/>
           <p:cNvSpPr txBox="1"/>
           <p:nvPr/>
         </p:nvSpPr>
@@ -19546,7 +19792,7 @@
       </p:sp>
       <p:sp>
         <p:nvSpPr>
-          <p:cNvPr id="13" name="TextBox 12"/>
+          <p:cNvPr id="14" name="TextBox 13"/>
           <p:cNvSpPr txBox="1"/>
           <p:nvPr/>
         </p:nvSpPr>
@@ -19588,7 +19834,7 @@
       </p:sp>
       <p:sp>
         <p:nvSpPr>
-          <p:cNvPr id="14" name="TextBox 13"/>
+          <p:cNvPr id="15" name="TextBox 14"/>
           <p:cNvSpPr txBox="1"/>
           <p:nvPr/>
         </p:nvSpPr>
@@ -19630,7 +19876,7 @@
       </p:sp>
       <p:sp>
         <p:nvSpPr>
-          <p:cNvPr id="15" name="Rectangle 14"/>
+          <p:cNvPr id="16" name="Rectangle 15"/>
           <p:cNvSpPr/>
           <p:nvPr/>
         </p:nvSpPr>
@@ -19674,7 +19920,7 @@
       </p:sp>
       <p:sp>
         <p:nvSpPr>
-          <p:cNvPr id="16" name="TextBox 15"/>
+          <p:cNvPr id="17" name="TextBox 16"/>
           <p:cNvSpPr txBox="1"/>
           <p:nvPr/>
         </p:nvSpPr>
@@ -19716,7 +19962,7 @@
       </p:sp>
       <p:sp>
         <p:nvSpPr>
-          <p:cNvPr id="17" name="TextBox 16"/>
+          <p:cNvPr id="18" name="TextBox 17"/>
           <p:cNvSpPr txBox="1"/>
           <p:nvPr/>
         </p:nvSpPr>
@@ -19758,7 +20004,7 @@
       </p:sp>
       <p:sp>
         <p:nvSpPr>
-          <p:cNvPr id="18" name="TextBox 17"/>
+          <p:cNvPr id="19" name="TextBox 18"/>
           <p:cNvSpPr txBox="1"/>
           <p:nvPr/>
         </p:nvSpPr>
@@ -19800,7 +20046,7 @@
       </p:sp>
       <p:sp>
         <p:nvSpPr>
-          <p:cNvPr id="19" name="Rounded Rectangle 18"/>
+          <p:cNvPr id="20" name="Rounded Rectangle 19"/>
           <p:cNvSpPr/>
           <p:nvPr/>
         </p:nvSpPr>
@@ -19846,7 +20092,7 @@
       </p:sp>
       <p:sp>
         <p:nvSpPr>
-          <p:cNvPr id="20" name="TextBox 19"/>
+          <p:cNvPr id="21" name="TextBox 20"/>
           <p:cNvSpPr txBox="1"/>
           <p:nvPr/>
         </p:nvSpPr>
@@ -19888,7 +20134,7 @@
       </p:sp>
       <p:sp>
         <p:nvSpPr>
-          <p:cNvPr id="21" name="TextBox 20"/>
+          <p:cNvPr id="22" name="TextBox 21"/>
           <p:cNvSpPr txBox="1"/>
           <p:nvPr/>
         </p:nvSpPr>
@@ -20206,9 +20452,33 @@
           </a:p>
         </p:txBody>
       </p:sp>
-      <p:sp>
-        <p:nvSpPr>
-          <p:cNvPr id="7" name="TextBox 6"/>
+      <p:pic>
+        <p:nvPicPr>
+          <p:cNvPr id="7" name="Picture 6" descr="GSDC Logo.png"/>
+          <p:cNvPicPr>
+            <a:picLocks noChangeAspect="1"/>
+          </p:cNvPicPr>
+          <p:nvPr/>
+        </p:nvPicPr>
+        <p:blipFill>
+          <a:blip r:embed="rId2"/>
+          <a:stretch>
+            <a:fillRect/>
+          </a:stretch>
+        </p:blipFill>
+        <p:spPr>
+          <a:xfrm>
+            <a:off x="10286695" y="310896"/>
+            <a:ext cx="1127760" cy="365760"/>
+          </a:xfrm>
+          <a:prstGeom prst="rect">
+            <a:avLst/>
+          </a:prstGeom>
+        </p:spPr>
+      </p:pic>
+      <p:sp>
+        <p:nvSpPr>
+          <p:cNvPr id="8" name="TextBox 7"/>
           <p:cNvSpPr txBox="1"/>
           <p:nvPr/>
         </p:nvSpPr>
@@ -20250,7 +20520,7 @@
       </p:sp>
       <p:sp>
         <p:nvSpPr>
-          <p:cNvPr id="8" name="Rectangle 7"/>
+          <p:cNvPr id="9" name="Rectangle 8"/>
           <p:cNvSpPr/>
           <p:nvPr/>
         </p:nvSpPr>
@@ -20294,7 +20564,7 @@
       </p:sp>
       <p:sp>
         <p:nvSpPr>
-          <p:cNvPr id="9" name="TextBox 8"/>
+          <p:cNvPr id="10" name="TextBox 9"/>
           <p:cNvSpPr txBox="1"/>
           <p:nvPr/>
         </p:nvSpPr>
@@ -20336,7 +20606,7 @@
       </p:sp>
       <p:sp>
         <p:nvSpPr>
-          <p:cNvPr id="10" name="TextBox 9"/>
+          <p:cNvPr id="11" name="TextBox 10"/>
           <p:cNvSpPr txBox="1"/>
           <p:nvPr/>
         </p:nvSpPr>
@@ -20378,7 +20648,7 @@
       </p:sp>
       <p:sp>
         <p:nvSpPr>
-          <p:cNvPr id="11" name="TextBox 10"/>
+          <p:cNvPr id="12" name="TextBox 11"/>
           <p:cNvSpPr txBox="1"/>
           <p:nvPr/>
         </p:nvSpPr>
@@ -20420,7 +20690,7 @@
       </p:sp>
       <p:sp>
         <p:nvSpPr>
-          <p:cNvPr id="12" name="Rectangle 11"/>
+          <p:cNvPr id="13" name="Rectangle 12"/>
           <p:cNvSpPr/>
           <p:nvPr/>
         </p:nvSpPr>
@@ -20464,7 +20734,7 @@
       </p:sp>
       <p:sp>
         <p:nvSpPr>
-          <p:cNvPr id="13" name="TextBox 12"/>
+          <p:cNvPr id="14" name="TextBox 13"/>
           <p:cNvSpPr txBox="1"/>
           <p:nvPr/>
         </p:nvSpPr>
@@ -20506,7 +20776,7 @@
       </p:sp>
       <p:sp>
         <p:nvSpPr>
-          <p:cNvPr id="14" name="TextBox 13"/>
+          <p:cNvPr id="15" name="TextBox 14"/>
           <p:cNvSpPr txBox="1"/>
           <p:nvPr/>
         </p:nvSpPr>
@@ -20548,7 +20818,7 @@
       </p:sp>
       <p:sp>
         <p:nvSpPr>
-          <p:cNvPr id="15" name="TextBox 14"/>
+          <p:cNvPr id="16" name="TextBox 15"/>
           <p:cNvSpPr txBox="1"/>
           <p:nvPr/>
         </p:nvSpPr>
@@ -20590,7 +20860,7 @@
       </p:sp>
       <p:sp>
         <p:nvSpPr>
-          <p:cNvPr id="16" name="Rectangle 15"/>
+          <p:cNvPr id="17" name="Rectangle 16"/>
           <p:cNvSpPr/>
           <p:nvPr/>
         </p:nvSpPr>
@@ -20634,7 +20904,7 @@
       </p:sp>
       <p:sp>
         <p:nvSpPr>
-          <p:cNvPr id="17" name="TextBox 16"/>
+          <p:cNvPr id="18" name="TextBox 17"/>
           <p:cNvSpPr txBox="1"/>
           <p:nvPr/>
         </p:nvSpPr>
@@ -20676,7 +20946,7 @@
       </p:sp>
       <p:sp>
         <p:nvSpPr>
-          <p:cNvPr id="18" name="TextBox 17"/>
+          <p:cNvPr id="19" name="TextBox 18"/>
           <p:cNvSpPr txBox="1"/>
           <p:nvPr/>
         </p:nvSpPr>
@@ -20718,7 +20988,7 @@
       </p:sp>
       <p:sp>
         <p:nvSpPr>
-          <p:cNvPr id="19" name="TextBox 18"/>
+          <p:cNvPr id="20" name="TextBox 19"/>
           <p:cNvSpPr txBox="1"/>
           <p:nvPr/>
         </p:nvSpPr>
@@ -20760,7 +21030,7 @@
       </p:sp>
       <p:sp>
         <p:nvSpPr>
-          <p:cNvPr id="20" name="Rectangle 19"/>
+          <p:cNvPr id="21" name="Rectangle 20"/>
           <p:cNvSpPr/>
           <p:nvPr/>
         </p:nvSpPr>
@@ -20804,7 +21074,7 @@
       </p:sp>
       <p:sp>
         <p:nvSpPr>
-          <p:cNvPr id="21" name="TextBox 20"/>
+          <p:cNvPr id="22" name="TextBox 21"/>
           <p:cNvSpPr txBox="1"/>
           <p:nvPr/>
         </p:nvSpPr>
@@ -20846,7 +21116,7 @@
       </p:sp>
       <p:sp>
         <p:nvSpPr>
-          <p:cNvPr id="22" name="TextBox 21"/>
+          <p:cNvPr id="23" name="TextBox 22"/>
           <p:cNvSpPr txBox="1"/>
           <p:nvPr/>
         </p:nvSpPr>
@@ -20888,7 +21158,7 @@
       </p:sp>
       <p:sp>
         <p:nvSpPr>
-          <p:cNvPr id="23" name="TextBox 22"/>
+          <p:cNvPr id="24" name="TextBox 23"/>
           <p:cNvSpPr txBox="1"/>
           <p:nvPr/>
         </p:nvSpPr>
@@ -20930,7 +21200,7 @@
       </p:sp>
       <p:sp>
         <p:nvSpPr>
-          <p:cNvPr id="24" name="Rectangle 23"/>
+          <p:cNvPr id="25" name="Rectangle 24"/>
           <p:cNvSpPr/>
           <p:nvPr/>
         </p:nvSpPr>
@@ -20974,7 +21244,7 @@
       </p:sp>
       <p:sp>
         <p:nvSpPr>
-          <p:cNvPr id="25" name="TextBox 24"/>
+          <p:cNvPr id="26" name="TextBox 25"/>
           <p:cNvSpPr txBox="1"/>
           <p:nvPr/>
         </p:nvSpPr>
@@ -21016,7 +21286,7 @@
       </p:sp>
       <p:sp>
         <p:nvSpPr>
-          <p:cNvPr id="26" name="TextBox 25"/>
+          <p:cNvPr id="27" name="TextBox 26"/>
           <p:cNvSpPr txBox="1"/>
           <p:nvPr/>
         </p:nvSpPr>
@@ -21058,7 +21328,7 @@
       </p:sp>
       <p:sp>
         <p:nvSpPr>
-          <p:cNvPr id="27" name="TextBox 26"/>
+          <p:cNvPr id="28" name="TextBox 27"/>
           <p:cNvSpPr txBox="1"/>
           <p:nvPr/>
         </p:nvSpPr>
@@ -21100,7 +21370,7 @@
       </p:sp>
       <p:sp>
         <p:nvSpPr>
-          <p:cNvPr id="28" name="TextBox 27"/>
+          <p:cNvPr id="29" name="TextBox 28"/>
           <p:cNvSpPr txBox="1"/>
           <p:nvPr/>
         </p:nvSpPr>
@@ -21142,7 +21412,7 @@
       </p:sp>
       <p:sp>
         <p:nvSpPr>
-          <p:cNvPr id="29" name="TextBox 28"/>
+          <p:cNvPr id="30" name="TextBox 29"/>
           <p:cNvSpPr txBox="1"/>
           <p:nvPr/>
         </p:nvSpPr>
@@ -21428,9 +21698,33 @@
           </a:p>
         </p:txBody>
       </p:sp>
-      <p:sp>
-        <p:nvSpPr>
-          <p:cNvPr id="7" name="TextBox 6"/>
+      <p:pic>
+        <p:nvPicPr>
+          <p:cNvPr id="7" name="Picture 6" descr="GSDC Logo.png"/>
+          <p:cNvPicPr>
+            <a:picLocks noChangeAspect="1"/>
+          </p:cNvPicPr>
+          <p:nvPr/>
+        </p:nvPicPr>
+        <p:blipFill>
+          <a:blip r:embed="rId2"/>
+          <a:stretch>
+            <a:fillRect/>
+          </a:stretch>
+        </p:blipFill>
+        <p:spPr>
+          <a:xfrm>
+            <a:off x="10286695" y="310896"/>
+            <a:ext cx="1127760" cy="365760"/>
+          </a:xfrm>
+          <a:prstGeom prst="rect">
+            <a:avLst/>
+          </a:prstGeom>
+        </p:spPr>
+      </p:pic>
+      <p:sp>
+        <p:nvSpPr>
+          <p:cNvPr id="8" name="TextBox 7"/>
           <p:cNvSpPr txBox="1"/>
           <p:nvPr/>
         </p:nvSpPr>
@@ -21472,7 +21766,7 @@
       </p:sp>
       <p:sp>
         <p:nvSpPr>
-          <p:cNvPr id="8" name="TextBox 7"/>
+          <p:cNvPr id="9" name="TextBox 8"/>
           <p:cNvSpPr txBox="1"/>
           <p:nvPr/>
         </p:nvSpPr>
@@ -21514,7 +21808,7 @@
       </p:sp>
       <p:sp>
         <p:nvSpPr>
-          <p:cNvPr id="9" name="Rectangle 8"/>
+          <p:cNvPr id="10" name="Rectangle 9"/>
           <p:cNvSpPr/>
           <p:nvPr/>
         </p:nvSpPr>
@@ -21558,7 +21852,7 @@
       </p:sp>
       <p:sp>
         <p:nvSpPr>
-          <p:cNvPr id="10" name="TextBox 9"/>
+          <p:cNvPr id="11" name="TextBox 10"/>
           <p:cNvSpPr txBox="1"/>
           <p:nvPr/>
         </p:nvSpPr>
@@ -21600,7 +21894,7 @@
       </p:sp>
       <p:sp>
         <p:nvSpPr>
-          <p:cNvPr id="11" name="TextBox 10"/>
+          <p:cNvPr id="12" name="TextBox 11"/>
           <p:cNvSpPr txBox="1"/>
           <p:nvPr/>
         </p:nvSpPr>
@@ -21642,7 +21936,7 @@
       </p:sp>
       <p:sp>
         <p:nvSpPr>
-          <p:cNvPr id="12" name="Rectangle 11"/>
+          <p:cNvPr id="13" name="Rectangle 12"/>
           <p:cNvSpPr/>
           <p:nvPr/>
         </p:nvSpPr>
@@ -21686,7 +21980,7 @@
       </p:sp>
       <p:sp>
         <p:nvSpPr>
-          <p:cNvPr id="13" name="TextBox 12"/>
+          <p:cNvPr id="14" name="TextBox 13"/>
           <p:cNvSpPr txBox="1"/>
           <p:nvPr/>
         </p:nvSpPr>
@@ -21728,7 +22022,7 @@
       </p:sp>
       <p:sp>
         <p:nvSpPr>
-          <p:cNvPr id="14" name="TextBox 13"/>
+          <p:cNvPr id="15" name="TextBox 14"/>
           <p:cNvSpPr txBox="1"/>
           <p:nvPr/>
         </p:nvSpPr>
@@ -21770,7 +22064,7 @@
       </p:sp>
       <p:sp>
         <p:nvSpPr>
-          <p:cNvPr id="15" name="TextBox 14"/>
+          <p:cNvPr id="16" name="TextBox 15"/>
           <p:cNvSpPr txBox="1"/>
           <p:nvPr/>
         </p:nvSpPr>
@@ -21812,7 +22106,7 @@
       </p:sp>
       <p:sp>
         <p:nvSpPr>
-          <p:cNvPr id="16" name="Rectangle 15"/>
+          <p:cNvPr id="17" name="Rectangle 16"/>
           <p:cNvSpPr/>
           <p:nvPr/>
         </p:nvSpPr>
@@ -21856,7 +22150,7 @@
       </p:sp>
       <p:sp>
         <p:nvSpPr>
-          <p:cNvPr id="17" name="TextBox 16"/>
+          <p:cNvPr id="18" name="TextBox 17"/>
           <p:cNvSpPr txBox="1"/>
           <p:nvPr/>
         </p:nvSpPr>
@@ -21898,7 +22192,7 @@
       </p:sp>
       <p:sp>
         <p:nvSpPr>
-          <p:cNvPr id="18" name="TextBox 17"/>
+          <p:cNvPr id="19" name="TextBox 18"/>
           <p:cNvSpPr txBox="1"/>
           <p:nvPr/>
         </p:nvSpPr>
@@ -21940,7 +22234,7 @@
       </p:sp>
       <p:sp>
         <p:nvSpPr>
-          <p:cNvPr id="19" name="Rectangle 18"/>
+          <p:cNvPr id="20" name="Rectangle 19"/>
           <p:cNvSpPr/>
           <p:nvPr/>
         </p:nvSpPr>
@@ -21984,7 +22278,7 @@
       </p:sp>
       <p:sp>
         <p:nvSpPr>
-          <p:cNvPr id="20" name="TextBox 19"/>
+          <p:cNvPr id="21" name="TextBox 20"/>
           <p:cNvSpPr txBox="1"/>
           <p:nvPr/>
         </p:nvSpPr>
@@ -22026,7 +22320,7 @@
       </p:sp>
       <p:sp>
         <p:nvSpPr>
-          <p:cNvPr id="21" name="TextBox 20"/>
+          <p:cNvPr id="22" name="TextBox 21"/>
           <p:cNvSpPr txBox="1"/>
           <p:nvPr/>
         </p:nvSpPr>
@@ -22068,7 +22362,7 @@
       </p:sp>
       <p:sp>
         <p:nvSpPr>
-          <p:cNvPr id="22" name="TextBox 21"/>
+          <p:cNvPr id="23" name="TextBox 22"/>
           <p:cNvSpPr txBox="1"/>
           <p:nvPr/>
         </p:nvSpPr>
@@ -22544,9 +22838,33 @@
           </a:p>
         </p:txBody>
       </p:sp>
-      <p:sp>
-        <p:nvSpPr>
-          <p:cNvPr id="7" name="TextBox 6"/>
+      <p:pic>
+        <p:nvPicPr>
+          <p:cNvPr id="7" name="Picture 6" descr="GSDC Logo.png"/>
+          <p:cNvPicPr>
+            <a:picLocks noChangeAspect="1"/>
+          </p:cNvPicPr>
+          <p:nvPr/>
+        </p:nvPicPr>
+        <p:blipFill>
+          <a:blip r:embed="rId2"/>
+          <a:stretch>
+            <a:fillRect/>
+          </a:stretch>
+        </p:blipFill>
+        <p:spPr>
+          <a:xfrm>
+            <a:off x="10286695" y="310896"/>
+            <a:ext cx="1127760" cy="365760"/>
+          </a:xfrm>
+          <a:prstGeom prst="rect">
+            <a:avLst/>
+          </a:prstGeom>
+        </p:spPr>
+      </p:pic>
+      <p:sp>
+        <p:nvSpPr>
+          <p:cNvPr id="8" name="TextBox 7"/>
           <p:cNvSpPr txBox="1"/>
           <p:nvPr/>
         </p:nvSpPr>
@@ -22588,7 +22906,7 @@
       </p:sp>
       <p:sp>
         <p:nvSpPr>
-          <p:cNvPr id="8" name="Rectangle 7"/>
+          <p:cNvPr id="9" name="Rectangle 8"/>
           <p:cNvSpPr/>
           <p:nvPr/>
         </p:nvSpPr>
@@ -22632,7 +22950,7 @@
       </p:sp>
       <p:sp>
         <p:nvSpPr>
-          <p:cNvPr id="9" name="TextBox 8"/>
+          <p:cNvPr id="10" name="TextBox 9"/>
           <p:cNvSpPr txBox="1"/>
           <p:nvPr/>
         </p:nvSpPr>
@@ -22674,7 +22992,7 @@
       </p:sp>
       <p:sp>
         <p:nvSpPr>
-          <p:cNvPr id="10" name="TextBox 9"/>
+          <p:cNvPr id="11" name="TextBox 10"/>
           <p:cNvSpPr txBox="1"/>
           <p:nvPr/>
         </p:nvSpPr>
@@ -22716,7 +23034,7 @@
       </p:sp>
       <p:sp>
         <p:nvSpPr>
-          <p:cNvPr id="11" name="TextBox 10"/>
+          <p:cNvPr id="12" name="TextBox 11"/>
           <p:cNvSpPr txBox="1"/>
           <p:nvPr/>
         </p:nvSpPr>
@@ -22758,7 +23076,7 @@
       </p:sp>
       <p:sp>
         <p:nvSpPr>
-          <p:cNvPr id="12" name="TextBox 11"/>
+          <p:cNvPr id="13" name="TextBox 12"/>
           <p:cNvSpPr txBox="1"/>
           <p:nvPr/>
         </p:nvSpPr>
@@ -22800,7 +23118,7 @@
       </p:sp>
       <p:sp>
         <p:nvSpPr>
-          <p:cNvPr id="13" name="TextBox 12"/>
+          <p:cNvPr id="14" name="TextBox 13"/>
           <p:cNvSpPr txBox="1"/>
           <p:nvPr/>
         </p:nvSpPr>
@@ -22842,7 +23160,7 @@
       </p:sp>
       <p:sp>
         <p:nvSpPr>
-          <p:cNvPr id="14" name="TextBox 13"/>
+          <p:cNvPr id="15" name="TextBox 14"/>
           <p:cNvSpPr txBox="1"/>
           <p:nvPr/>
         </p:nvSpPr>
@@ -22884,7 +23202,7 @@
       </p:sp>
       <p:sp>
         <p:nvSpPr>
-          <p:cNvPr id="15" name="TextBox 14"/>
+          <p:cNvPr id="16" name="TextBox 15"/>
           <p:cNvSpPr txBox="1"/>
           <p:nvPr/>
         </p:nvSpPr>
@@ -22926,7 +23244,7 @@
       </p:sp>
       <p:sp>
         <p:nvSpPr>
-          <p:cNvPr id="16" name="TextBox 15"/>
+          <p:cNvPr id="17" name="TextBox 16"/>
           <p:cNvSpPr txBox="1"/>
           <p:nvPr/>
         </p:nvSpPr>
@@ -22968,7 +23286,7 @@
       </p:sp>
       <p:sp>
         <p:nvSpPr>
-          <p:cNvPr id="17" name="TextBox 16"/>
+          <p:cNvPr id="18" name="TextBox 17"/>
           <p:cNvSpPr txBox="1"/>
           <p:nvPr/>
         </p:nvSpPr>
@@ -23010,7 +23328,7 @@
       </p:sp>
       <p:sp>
         <p:nvSpPr>
-          <p:cNvPr id="18" name="TextBox 17"/>
+          <p:cNvPr id="19" name="TextBox 18"/>
           <p:cNvSpPr txBox="1"/>
           <p:nvPr/>
         </p:nvSpPr>
@@ -23052,7 +23370,7 @@
       </p:sp>
       <p:sp>
         <p:nvSpPr>
-          <p:cNvPr id="19" name="TextBox 18"/>
+          <p:cNvPr id="20" name="TextBox 19"/>
           <p:cNvSpPr txBox="1"/>
           <p:nvPr/>
         </p:nvSpPr>
@@ -23094,7 +23412,7 @@
       </p:sp>
       <p:sp>
         <p:nvSpPr>
-          <p:cNvPr id="20" name="TextBox 19"/>
+          <p:cNvPr id="21" name="TextBox 20"/>
           <p:cNvSpPr txBox="1"/>
           <p:nvPr/>
         </p:nvSpPr>
@@ -23136,7 +23454,7 @@
       </p:sp>
       <p:sp>
         <p:nvSpPr>
-          <p:cNvPr id="21" name="TextBox 20"/>
+          <p:cNvPr id="22" name="TextBox 21"/>
           <p:cNvSpPr txBox="1"/>
           <p:nvPr/>
         </p:nvSpPr>
@@ -23178,7 +23496,7 @@
       </p:sp>
       <p:sp>
         <p:nvSpPr>
-          <p:cNvPr id="22" name="TextBox 21"/>
+          <p:cNvPr id="23" name="TextBox 22"/>
           <p:cNvSpPr txBox="1"/>
           <p:nvPr/>
         </p:nvSpPr>
@@ -23220,7 +23538,7 @@
       </p:sp>
       <p:sp>
         <p:nvSpPr>
-          <p:cNvPr id="23" name="TextBox 22"/>
+          <p:cNvPr id="24" name="TextBox 23"/>
           <p:cNvSpPr txBox="1"/>
           <p:nvPr/>
         </p:nvSpPr>
@@ -23262,7 +23580,7 @@
       </p:sp>
       <p:sp>
         <p:nvSpPr>
-          <p:cNvPr id="24" name="Rectangle 23"/>
+          <p:cNvPr id="25" name="Rectangle 24"/>
           <p:cNvSpPr/>
           <p:nvPr/>
         </p:nvSpPr>
@@ -23306,7 +23624,7 @@
       </p:sp>
       <p:sp>
         <p:nvSpPr>
-          <p:cNvPr id="25" name="TextBox 24"/>
+          <p:cNvPr id="26" name="TextBox 25"/>
           <p:cNvSpPr txBox="1"/>
           <p:nvPr/>
         </p:nvSpPr>
@@ -23367,7 +23685,7 @@
       </p:sp>
       <p:sp>
         <p:nvSpPr>
-          <p:cNvPr id="26" name="TextBox 25"/>
+          <p:cNvPr id="27" name="TextBox 26"/>
           <p:cNvSpPr txBox="1"/>
           <p:nvPr/>
         </p:nvSpPr>
@@ -23685,9 +24003,33 @@
           </a:p>
         </p:txBody>
       </p:sp>
-      <p:sp>
-        <p:nvSpPr>
-          <p:cNvPr id="7" name="TextBox 6"/>
+      <p:pic>
+        <p:nvPicPr>
+          <p:cNvPr id="7" name="Picture 6" descr="GSDC Logo.png"/>
+          <p:cNvPicPr>
+            <a:picLocks noChangeAspect="1"/>
+          </p:cNvPicPr>
+          <p:nvPr/>
+        </p:nvPicPr>
+        <p:blipFill>
+          <a:blip r:embed="rId2"/>
+          <a:stretch>
+            <a:fillRect/>
+          </a:stretch>
+        </p:blipFill>
+        <p:spPr>
+          <a:xfrm>
+            <a:off x="10286695" y="310896"/>
+            <a:ext cx="1127760" cy="365760"/>
+          </a:xfrm>
+          <a:prstGeom prst="rect">
+            <a:avLst/>
+          </a:prstGeom>
+        </p:spPr>
+      </p:pic>
+      <p:sp>
+        <p:nvSpPr>
+          <p:cNvPr id="8" name="TextBox 7"/>
           <p:cNvSpPr txBox="1"/>
           <p:nvPr/>
         </p:nvSpPr>
@@ -23729,7 +24071,7 @@
       </p:sp>
       <p:sp>
         <p:nvSpPr>
-          <p:cNvPr id="8" name="TextBox 7"/>
+          <p:cNvPr id="9" name="TextBox 8"/>
           <p:cNvSpPr txBox="1"/>
           <p:nvPr/>
         </p:nvSpPr>
@@ -23771,7 +24113,7 @@
       </p:sp>
       <p:sp>
         <p:nvSpPr>
-          <p:cNvPr id="9" name="TextBox 8"/>
+          <p:cNvPr id="10" name="TextBox 9"/>
           <p:cNvSpPr txBox="1"/>
           <p:nvPr/>
         </p:nvSpPr>
@@ -23813,7 +24155,7 @@
       </p:sp>
       <p:sp>
         <p:nvSpPr>
-          <p:cNvPr id="10" name="Rectangle 9"/>
+          <p:cNvPr id="11" name="Rectangle 10"/>
           <p:cNvSpPr/>
           <p:nvPr/>
         </p:nvSpPr>
@@ -23857,7 +24199,7 @@
       </p:sp>
       <p:sp>
         <p:nvSpPr>
-          <p:cNvPr id="11" name="TextBox 10"/>
+          <p:cNvPr id="12" name="TextBox 11"/>
           <p:cNvSpPr txBox="1"/>
           <p:nvPr/>
         </p:nvSpPr>
@@ -23899,7 +24241,7 @@
       </p:sp>
       <p:sp>
         <p:nvSpPr>
-          <p:cNvPr id="12" name="TextBox 11"/>
+          <p:cNvPr id="13" name="TextBox 12"/>
           <p:cNvSpPr txBox="1"/>
           <p:nvPr/>
         </p:nvSpPr>
@@ -23941,7 +24283,7 @@
       </p:sp>
       <p:sp>
         <p:nvSpPr>
-          <p:cNvPr id="13" name="Rectangle 12"/>
+          <p:cNvPr id="14" name="Rectangle 13"/>
           <p:cNvSpPr/>
           <p:nvPr/>
         </p:nvSpPr>
@@ -23985,7 +24327,7 @@
       </p:sp>
       <p:sp>
         <p:nvSpPr>
-          <p:cNvPr id="14" name="TextBox 13"/>
+          <p:cNvPr id="15" name="TextBox 14"/>
           <p:cNvSpPr txBox="1"/>
           <p:nvPr/>
         </p:nvSpPr>
@@ -24027,7 +24369,7 @@
       </p:sp>
       <p:sp>
         <p:nvSpPr>
-          <p:cNvPr id="15" name="TextBox 14"/>
+          <p:cNvPr id="16" name="TextBox 15"/>
           <p:cNvSpPr txBox="1"/>
           <p:nvPr/>
         </p:nvSpPr>
@@ -24069,7 +24411,7 @@
       </p:sp>
       <p:sp>
         <p:nvSpPr>
-          <p:cNvPr id="16" name="Rectangle 15"/>
+          <p:cNvPr id="17" name="Rectangle 16"/>
           <p:cNvSpPr/>
           <p:nvPr/>
         </p:nvSpPr>
@@ -24113,7 +24455,7 @@
       </p:sp>
       <p:sp>
         <p:nvSpPr>
-          <p:cNvPr id="17" name="TextBox 16"/>
+          <p:cNvPr id="18" name="TextBox 17"/>
           <p:cNvSpPr txBox="1"/>
           <p:nvPr/>
         </p:nvSpPr>
@@ -24155,7 +24497,7 @@
       </p:sp>
       <p:sp>
         <p:nvSpPr>
-          <p:cNvPr id="18" name="TextBox 17"/>
+          <p:cNvPr id="19" name="TextBox 18"/>
           <p:cNvSpPr txBox="1"/>
           <p:nvPr/>
         </p:nvSpPr>
@@ -24197,7 +24539,7 @@
       </p:sp>
       <p:sp>
         <p:nvSpPr>
-          <p:cNvPr id="19" name="Rectangle 18"/>
+          <p:cNvPr id="20" name="Rectangle 19"/>
           <p:cNvSpPr/>
           <p:nvPr/>
         </p:nvSpPr>
@@ -24241,7 +24583,7 @@
       </p:sp>
       <p:sp>
         <p:nvSpPr>
-          <p:cNvPr id="20" name="TextBox 19"/>
+          <p:cNvPr id="21" name="TextBox 20"/>
           <p:cNvSpPr txBox="1"/>
           <p:nvPr/>
         </p:nvSpPr>
@@ -24283,7 +24625,7 @@
       </p:sp>
       <p:sp>
         <p:nvSpPr>
-          <p:cNvPr id="21" name="TextBox 20"/>
+          <p:cNvPr id="22" name="TextBox 21"/>
           <p:cNvSpPr txBox="1"/>
           <p:nvPr/>
         </p:nvSpPr>
@@ -24325,7 +24667,7 @@
       </p:sp>
       <p:sp>
         <p:nvSpPr>
-          <p:cNvPr id="22" name="Rectangle 21"/>
+          <p:cNvPr id="23" name="Rectangle 22"/>
           <p:cNvSpPr/>
           <p:nvPr/>
         </p:nvSpPr>
@@ -24607,9 +24949,33 @@
           </a:p>
         </p:txBody>
       </p:sp>
-      <p:sp>
-        <p:nvSpPr>
-          <p:cNvPr id="7" name="TextBox 6"/>
+      <p:pic>
+        <p:nvPicPr>
+          <p:cNvPr id="7" name="Picture 6" descr="GSDC Logo.png"/>
+          <p:cNvPicPr>
+            <a:picLocks noChangeAspect="1"/>
+          </p:cNvPicPr>
+          <p:nvPr/>
+        </p:nvPicPr>
+        <p:blipFill>
+          <a:blip r:embed="rId2"/>
+          <a:stretch>
+            <a:fillRect/>
+          </a:stretch>
+        </p:blipFill>
+        <p:spPr>
+          <a:xfrm>
+            <a:off x="10286695" y="310896"/>
+            <a:ext cx="1127760" cy="365760"/>
+          </a:xfrm>
+          <a:prstGeom prst="rect">
+            <a:avLst/>
+          </a:prstGeom>
+        </p:spPr>
+      </p:pic>
+      <p:sp>
+        <p:nvSpPr>
+          <p:cNvPr id="8" name="TextBox 7"/>
           <p:cNvSpPr txBox="1"/>
           <p:nvPr/>
         </p:nvSpPr>
@@ -24651,7 +25017,7 @@
       </p:sp>
       <p:sp>
         <p:nvSpPr>
-          <p:cNvPr id="8" name="TextBox 7"/>
+          <p:cNvPr id="9" name="TextBox 8"/>
           <p:cNvSpPr txBox="1"/>
           <p:nvPr/>
         </p:nvSpPr>
@@ -24693,7 +25059,7 @@
       </p:sp>
       <p:sp>
         <p:nvSpPr>
-          <p:cNvPr id="9" name="TextBox 8"/>
+          <p:cNvPr id="10" name="TextBox 9"/>
           <p:cNvSpPr txBox="1"/>
           <p:nvPr/>
         </p:nvSpPr>
@@ -24735,7 +25101,7 @@
       </p:sp>
       <p:sp>
         <p:nvSpPr>
-          <p:cNvPr id="10" name="TextBox 9"/>
+          <p:cNvPr id="11" name="TextBox 10"/>
           <p:cNvSpPr txBox="1"/>
           <p:nvPr/>
         </p:nvSpPr>
@@ -24777,7 +25143,7 @@
       </p:sp>
       <p:sp>
         <p:nvSpPr>
-          <p:cNvPr id="11" name="Rectangle 10"/>
+          <p:cNvPr id="12" name="Rectangle 11"/>
           <p:cNvSpPr/>
           <p:nvPr/>
         </p:nvSpPr>
@@ -24821,7 +25187,7 @@
       </p:sp>
       <p:sp>
         <p:nvSpPr>
-          <p:cNvPr id="12" name="TextBox 11"/>
+          <p:cNvPr id="13" name="TextBox 12"/>
           <p:cNvSpPr txBox="1"/>
           <p:nvPr/>
         </p:nvSpPr>
@@ -24863,7 +25229,7 @@
       </p:sp>
       <p:sp>
         <p:nvSpPr>
-          <p:cNvPr id="13" name="TextBox 12"/>
+          <p:cNvPr id="14" name="TextBox 13"/>
           <p:cNvSpPr txBox="1"/>
           <p:nvPr/>
         </p:nvSpPr>
@@ -24905,7 +25271,7 @@
       </p:sp>
       <p:sp>
         <p:nvSpPr>
-          <p:cNvPr id="14" name="TextBox 13"/>
+          <p:cNvPr id="15" name="TextBox 14"/>
           <p:cNvSpPr txBox="1"/>
           <p:nvPr/>
         </p:nvSpPr>
@@ -24947,7 +25313,7 @@
       </p:sp>
       <p:sp>
         <p:nvSpPr>
-          <p:cNvPr id="15" name="Rectangle 14"/>
+          <p:cNvPr id="16" name="Rectangle 15"/>
           <p:cNvSpPr/>
           <p:nvPr/>
         </p:nvSpPr>
@@ -24991,7 +25357,7 @@
       </p:sp>
       <p:sp>
         <p:nvSpPr>
-          <p:cNvPr id="16" name="TextBox 15"/>
+          <p:cNvPr id="17" name="TextBox 16"/>
           <p:cNvSpPr txBox="1"/>
           <p:nvPr/>
         </p:nvSpPr>
@@ -25033,7 +25399,7 @@
       </p:sp>
       <p:sp>
         <p:nvSpPr>
-          <p:cNvPr id="17" name="TextBox 16"/>
+          <p:cNvPr id="18" name="TextBox 17"/>
           <p:cNvSpPr txBox="1"/>
           <p:nvPr/>
         </p:nvSpPr>
@@ -25075,7 +25441,7 @@
       </p:sp>
       <p:sp>
         <p:nvSpPr>
-          <p:cNvPr id="18" name="TextBox 17"/>
+          <p:cNvPr id="19" name="TextBox 18"/>
           <p:cNvSpPr txBox="1"/>
           <p:nvPr/>
         </p:nvSpPr>
@@ -25117,7 +25483,7 @@
       </p:sp>
       <p:sp>
         <p:nvSpPr>
-          <p:cNvPr id="19" name="Rectangle 18"/>
+          <p:cNvPr id="20" name="Rectangle 19"/>
           <p:cNvSpPr/>
           <p:nvPr/>
         </p:nvSpPr>
@@ -25161,7 +25527,7 @@
       </p:sp>
       <p:sp>
         <p:nvSpPr>
-          <p:cNvPr id="20" name="TextBox 19"/>
+          <p:cNvPr id="21" name="TextBox 20"/>
           <p:cNvSpPr txBox="1"/>
           <p:nvPr/>
         </p:nvSpPr>
@@ -25203,7 +25569,7 @@
       </p:sp>
       <p:sp>
         <p:nvSpPr>
-          <p:cNvPr id="21" name="TextBox 20"/>
+          <p:cNvPr id="22" name="TextBox 21"/>
           <p:cNvSpPr txBox="1"/>
           <p:nvPr/>
         </p:nvSpPr>
@@ -25245,7 +25611,7 @@
       </p:sp>
       <p:sp>
         <p:nvSpPr>
-          <p:cNvPr id="22" name="TextBox 21"/>
+          <p:cNvPr id="23" name="TextBox 22"/>
           <p:cNvSpPr txBox="1"/>
           <p:nvPr/>
         </p:nvSpPr>
@@ -25287,7 +25653,7 @@
       </p:sp>
       <p:sp>
         <p:nvSpPr>
-          <p:cNvPr id="23" name="Rectangle 22"/>
+          <p:cNvPr id="24" name="Rectangle 23"/>
           <p:cNvSpPr/>
           <p:nvPr/>
         </p:nvSpPr>
@@ -25331,7 +25697,7 @@
       </p:sp>
       <p:sp>
         <p:nvSpPr>
-          <p:cNvPr id="24" name="TextBox 23"/>
+          <p:cNvPr id="25" name="TextBox 24"/>
           <p:cNvSpPr txBox="1"/>
           <p:nvPr/>
         </p:nvSpPr>
@@ -26258,9 +26624,33 @@
           </a:p>
         </p:txBody>
       </p:sp>
-      <p:sp>
-        <p:nvSpPr>
-          <p:cNvPr id="7" name="TextBox 6"/>
+      <p:pic>
+        <p:nvPicPr>
+          <p:cNvPr id="7" name="Picture 6" descr="GSDC Logo.png"/>
+          <p:cNvPicPr>
+            <a:picLocks noChangeAspect="1"/>
+          </p:cNvPicPr>
+          <p:nvPr/>
+        </p:nvPicPr>
+        <p:blipFill>
+          <a:blip r:embed="rId2"/>
+          <a:stretch>
+            <a:fillRect/>
+          </a:stretch>
+        </p:blipFill>
+        <p:spPr>
+          <a:xfrm>
+            <a:off x="10286695" y="310896"/>
+            <a:ext cx="1127760" cy="365760"/>
+          </a:xfrm>
+          <a:prstGeom prst="rect">
+            <a:avLst/>
+          </a:prstGeom>
+        </p:spPr>
+      </p:pic>
+      <p:sp>
+        <p:nvSpPr>
+          <p:cNvPr id="8" name="TextBox 7"/>
           <p:cNvSpPr txBox="1"/>
           <p:nvPr/>
         </p:nvSpPr>
@@ -26321,7 +26711,7 @@
       </p:sp>
       <p:sp>
         <p:nvSpPr>
-          <p:cNvPr id="8" name="TextBox 7"/>
+          <p:cNvPr id="9" name="TextBox 8"/>
           <p:cNvSpPr txBox="1"/>
           <p:nvPr/>
         </p:nvSpPr>
@@ -26363,7 +26753,7 @@
       </p:sp>
       <p:sp>
         <p:nvSpPr>
-          <p:cNvPr id="9" name="TextBox 8"/>
+          <p:cNvPr id="10" name="TextBox 9"/>
           <p:cNvSpPr txBox="1"/>
           <p:nvPr/>
         </p:nvSpPr>
@@ -26411,7 +26801,7 @@
       </p:sp>
       <p:sp>
         <p:nvSpPr>
-          <p:cNvPr id="10" name="Rectangle 9"/>
+          <p:cNvPr id="11" name="Rectangle 10"/>
           <p:cNvSpPr/>
           <p:nvPr/>
         </p:nvSpPr>
@@ -26455,7 +26845,7 @@
       </p:sp>
       <p:sp>
         <p:nvSpPr>
-          <p:cNvPr id="11" name="TextBox 10"/>
+          <p:cNvPr id="12" name="TextBox 11"/>
           <p:cNvSpPr txBox="1"/>
           <p:nvPr/>
         </p:nvSpPr>
@@ -26497,7 +26887,7 @@
       </p:sp>
       <p:sp>
         <p:nvSpPr>
-          <p:cNvPr id="12" name="TextBox 11"/>
+          <p:cNvPr id="13" name="TextBox 12"/>
           <p:cNvSpPr txBox="1"/>
           <p:nvPr/>
         </p:nvSpPr>
@@ -26777,9 +27167,33 @@
           </a:p>
         </p:txBody>
       </p:sp>
-      <p:sp>
-        <p:nvSpPr>
-          <p:cNvPr id="7" name="TextBox 6"/>
+      <p:pic>
+        <p:nvPicPr>
+          <p:cNvPr id="7" name="Picture 6" descr="GSDC Logo.png"/>
+          <p:cNvPicPr>
+            <a:picLocks noChangeAspect="1"/>
+          </p:cNvPicPr>
+          <p:nvPr/>
+        </p:nvPicPr>
+        <p:blipFill>
+          <a:blip r:embed="rId2"/>
+          <a:stretch>
+            <a:fillRect/>
+          </a:stretch>
+        </p:blipFill>
+        <p:spPr>
+          <a:xfrm>
+            <a:off x="10286695" y="310896"/>
+            <a:ext cx="1127760" cy="365760"/>
+          </a:xfrm>
+          <a:prstGeom prst="rect">
+            <a:avLst/>
+          </a:prstGeom>
+        </p:spPr>
+      </p:pic>
+      <p:sp>
+        <p:nvSpPr>
+          <p:cNvPr id="8" name="TextBox 7"/>
           <p:cNvSpPr txBox="1"/>
           <p:nvPr/>
         </p:nvSpPr>
@@ -26821,7 +27235,7 @@
       </p:sp>
       <p:sp>
         <p:nvSpPr>
-          <p:cNvPr id="8" name="Rounded Rectangle 7"/>
+          <p:cNvPr id="9" name="Rounded Rectangle 8"/>
           <p:cNvSpPr/>
           <p:nvPr/>
         </p:nvSpPr>
@@ -26867,7 +27281,7 @@
       </p:sp>
       <p:sp>
         <p:nvSpPr>
-          <p:cNvPr id="9" name="TextBox 8"/>
+          <p:cNvPr id="10" name="TextBox 9"/>
           <p:cNvSpPr txBox="1"/>
           <p:nvPr/>
         </p:nvSpPr>
@@ -26909,7 +27323,7 @@
       </p:sp>
       <p:sp>
         <p:nvSpPr>
-          <p:cNvPr id="10" name="TextBox 9"/>
+          <p:cNvPr id="11" name="TextBox 10"/>
           <p:cNvSpPr txBox="1"/>
           <p:nvPr/>
         </p:nvSpPr>
@@ -26951,7 +27365,7 @@
       </p:sp>
       <p:sp>
         <p:nvSpPr>
-          <p:cNvPr id="11" name="Rectangle 10"/>
+          <p:cNvPr id="12" name="Rectangle 11"/>
           <p:cNvSpPr/>
           <p:nvPr/>
         </p:nvSpPr>
@@ -26995,7 +27409,7 @@
       </p:sp>
       <p:sp>
         <p:nvSpPr>
-          <p:cNvPr id="12" name="TextBox 11"/>
+          <p:cNvPr id="13" name="TextBox 12"/>
           <p:cNvSpPr txBox="1"/>
           <p:nvPr/>
         </p:nvSpPr>
@@ -27037,7 +27451,7 @@
       </p:sp>
       <p:sp>
         <p:nvSpPr>
-          <p:cNvPr id="13" name="Rectangle 12"/>
+          <p:cNvPr id="14" name="Rectangle 13"/>
           <p:cNvSpPr/>
           <p:nvPr/>
         </p:nvSpPr>
@@ -27081,7 +27495,7 @@
       </p:sp>
       <p:sp>
         <p:nvSpPr>
-          <p:cNvPr id="14" name="TextBox 13"/>
+          <p:cNvPr id="15" name="TextBox 14"/>
           <p:cNvSpPr txBox="1"/>
           <p:nvPr/>
         </p:nvSpPr>
@@ -27123,7 +27537,7 @@
       </p:sp>
       <p:sp>
         <p:nvSpPr>
-          <p:cNvPr id="15" name="Rounded Rectangle 14"/>
+          <p:cNvPr id="16" name="Rounded Rectangle 15"/>
           <p:cNvSpPr/>
           <p:nvPr/>
         </p:nvSpPr>
@@ -27169,7 +27583,7 @@
       </p:sp>
       <p:sp>
         <p:nvSpPr>
-          <p:cNvPr id="16" name="TextBox 15"/>
+          <p:cNvPr id="17" name="TextBox 16"/>
           <p:cNvSpPr txBox="1"/>
           <p:nvPr/>
         </p:nvSpPr>
@@ -27211,7 +27625,7 @@
       </p:sp>
       <p:sp>
         <p:nvSpPr>
-          <p:cNvPr id="17" name="TextBox 16"/>
+          <p:cNvPr id="18" name="TextBox 17"/>
           <p:cNvSpPr txBox="1"/>
           <p:nvPr/>
         </p:nvSpPr>
@@ -27253,7 +27667,7 @@
       </p:sp>
       <p:sp>
         <p:nvSpPr>
-          <p:cNvPr id="18" name="Rectangle 17"/>
+          <p:cNvPr id="19" name="Rectangle 18"/>
           <p:cNvSpPr/>
           <p:nvPr/>
         </p:nvSpPr>
@@ -27297,7 +27711,7 @@
       </p:sp>
       <p:sp>
         <p:nvSpPr>
-          <p:cNvPr id="19" name="TextBox 18"/>
+          <p:cNvPr id="20" name="TextBox 19"/>
           <p:cNvSpPr txBox="1"/>
           <p:nvPr/>
         </p:nvSpPr>
@@ -27339,7 +27753,7 @@
       </p:sp>
       <p:sp>
         <p:nvSpPr>
-          <p:cNvPr id="20" name="Rectangle 19"/>
+          <p:cNvPr id="21" name="Rectangle 20"/>
           <p:cNvSpPr/>
           <p:nvPr/>
         </p:nvSpPr>
@@ -27383,7 +27797,7 @@
       </p:sp>
       <p:sp>
         <p:nvSpPr>
-          <p:cNvPr id="21" name="TextBox 20"/>
+          <p:cNvPr id="22" name="TextBox 21"/>
           <p:cNvSpPr txBox="1"/>
           <p:nvPr/>
         </p:nvSpPr>
@@ -27425,7 +27839,7 @@
       </p:sp>
       <p:sp>
         <p:nvSpPr>
-          <p:cNvPr id="22" name="TextBox 21"/>
+          <p:cNvPr id="23" name="TextBox 22"/>
           <p:cNvSpPr txBox="1"/>
           <p:nvPr/>
         </p:nvSpPr>
@@ -27711,9 +28125,33 @@
           </a:p>
         </p:txBody>
       </p:sp>
-      <p:sp>
-        <p:nvSpPr>
-          <p:cNvPr id="7" name="TextBox 6"/>
+      <p:pic>
+        <p:nvPicPr>
+          <p:cNvPr id="7" name="Picture 6" descr="GSDC Logo.png"/>
+          <p:cNvPicPr>
+            <a:picLocks noChangeAspect="1"/>
+          </p:cNvPicPr>
+          <p:nvPr/>
+        </p:nvPicPr>
+        <p:blipFill>
+          <a:blip r:embed="rId2"/>
+          <a:stretch>
+            <a:fillRect/>
+          </a:stretch>
+        </p:blipFill>
+        <p:spPr>
+          <a:xfrm>
+            <a:off x="10286695" y="310896"/>
+            <a:ext cx="1127760" cy="365760"/>
+          </a:xfrm>
+          <a:prstGeom prst="rect">
+            <a:avLst/>
+          </a:prstGeom>
+        </p:spPr>
+      </p:pic>
+      <p:sp>
+        <p:nvSpPr>
+          <p:cNvPr id="8" name="TextBox 7"/>
           <p:cNvSpPr txBox="1"/>
           <p:nvPr/>
         </p:nvSpPr>
@@ -27755,7 +28193,7 @@
       </p:sp>
       <p:sp>
         <p:nvSpPr>
-          <p:cNvPr id="8" name="TextBox 7"/>
+          <p:cNvPr id="9" name="TextBox 8"/>
           <p:cNvSpPr txBox="1"/>
           <p:nvPr/>
         </p:nvSpPr>
@@ -27797,7 +28235,7 @@
       </p:sp>
       <p:sp>
         <p:nvSpPr>
-          <p:cNvPr id="9" name="TextBox 8"/>
+          <p:cNvPr id="10" name="TextBox 9"/>
           <p:cNvSpPr txBox="1"/>
           <p:nvPr/>
         </p:nvSpPr>
@@ -27839,7 +28277,7 @@
       </p:sp>
       <p:sp>
         <p:nvSpPr>
-          <p:cNvPr id="10" name="Rounded Rectangle 9"/>
+          <p:cNvPr id="11" name="Rounded Rectangle 10"/>
           <p:cNvSpPr/>
           <p:nvPr/>
         </p:nvSpPr>
@@ -27885,7 +28323,7 @@
       </p:sp>
       <p:sp>
         <p:nvSpPr>
-          <p:cNvPr id="11" name="TextBox 10"/>
+          <p:cNvPr id="12" name="TextBox 11"/>
           <p:cNvSpPr txBox="1"/>
           <p:nvPr/>
         </p:nvSpPr>
@@ -27927,7 +28365,7 @@
       </p:sp>
       <p:sp>
         <p:nvSpPr>
-          <p:cNvPr id="12" name="TextBox 11"/>
+          <p:cNvPr id="13" name="TextBox 12"/>
           <p:cNvSpPr txBox="1"/>
           <p:nvPr/>
         </p:nvSpPr>
@@ -28007,7 +28445,7 @@
       </p:sp>
       <p:sp>
         <p:nvSpPr>
-          <p:cNvPr id="13" name="TextBox 12"/>
+          <p:cNvPr id="14" name="TextBox 13"/>
           <p:cNvSpPr txBox="1"/>
           <p:nvPr/>
         </p:nvSpPr>
@@ -28287,9 +28725,33 @@
           </a:p>
         </p:txBody>
       </p:sp>
-      <p:sp>
-        <p:nvSpPr>
-          <p:cNvPr id="7" name="TextBox 6"/>
+      <p:pic>
+        <p:nvPicPr>
+          <p:cNvPr id="7" name="Picture 6" descr="GSDC Logo.png"/>
+          <p:cNvPicPr>
+            <a:picLocks noChangeAspect="1"/>
+          </p:cNvPicPr>
+          <p:nvPr/>
+        </p:nvPicPr>
+        <p:blipFill>
+          <a:blip r:embed="rId2"/>
+          <a:stretch>
+            <a:fillRect/>
+          </a:stretch>
+        </p:blipFill>
+        <p:spPr>
+          <a:xfrm>
+            <a:off x="10286695" y="310896"/>
+            <a:ext cx="1127760" cy="365760"/>
+          </a:xfrm>
+          <a:prstGeom prst="rect">
+            <a:avLst/>
+          </a:prstGeom>
+        </p:spPr>
+      </p:pic>
+      <p:sp>
+        <p:nvSpPr>
+          <p:cNvPr id="8" name="TextBox 7"/>
           <p:cNvSpPr txBox="1"/>
           <p:nvPr/>
         </p:nvSpPr>
@@ -28331,7 +28793,7 @@
       </p:sp>
       <p:sp>
         <p:nvSpPr>
-          <p:cNvPr id="8" name="Rounded Rectangle 7"/>
+          <p:cNvPr id="9" name="Rounded Rectangle 8"/>
           <p:cNvSpPr/>
           <p:nvPr/>
         </p:nvSpPr>
@@ -28377,7 +28839,7 @@
       </p:sp>
       <p:sp>
         <p:nvSpPr>
-          <p:cNvPr id="9" name="TextBox 8"/>
+          <p:cNvPr id="10" name="TextBox 9"/>
           <p:cNvSpPr txBox="1"/>
           <p:nvPr/>
         </p:nvSpPr>
@@ -28419,7 +28881,7 @@
       </p:sp>
       <p:sp>
         <p:nvSpPr>
-          <p:cNvPr id="10" name="Rectangle 9"/>
+          <p:cNvPr id="11" name="Rectangle 10"/>
           <p:cNvSpPr/>
           <p:nvPr/>
         </p:nvSpPr>
@@ -28463,7 +28925,7 @@
       </p:sp>
       <p:sp>
         <p:nvSpPr>
-          <p:cNvPr id="11" name="TextBox 10"/>
+          <p:cNvPr id="12" name="TextBox 11"/>
           <p:cNvSpPr txBox="1"/>
           <p:nvPr/>
         </p:nvSpPr>
@@ -28505,7 +28967,7 @@
       </p:sp>
       <p:sp>
         <p:nvSpPr>
-          <p:cNvPr id="12" name="TextBox 11"/>
+          <p:cNvPr id="13" name="TextBox 12"/>
           <p:cNvSpPr txBox="1"/>
           <p:nvPr/>
         </p:nvSpPr>
@@ -28547,7 +29009,7 @@
       </p:sp>
       <p:sp>
         <p:nvSpPr>
-          <p:cNvPr id="13" name="Rectangle 12"/>
+          <p:cNvPr id="14" name="Rectangle 13"/>
           <p:cNvSpPr/>
           <p:nvPr/>
         </p:nvSpPr>
@@ -28591,7 +29053,7 @@
       </p:sp>
       <p:sp>
         <p:nvSpPr>
-          <p:cNvPr id="14" name="TextBox 13"/>
+          <p:cNvPr id="15" name="TextBox 14"/>
           <p:cNvSpPr txBox="1"/>
           <p:nvPr/>
         </p:nvSpPr>
@@ -28633,7 +29095,7 @@
       </p:sp>
       <p:sp>
         <p:nvSpPr>
-          <p:cNvPr id="15" name="TextBox 14"/>
+          <p:cNvPr id="16" name="TextBox 15"/>
           <p:cNvSpPr txBox="1"/>
           <p:nvPr/>
         </p:nvSpPr>
@@ -28675,7 +29137,7 @@
       </p:sp>
       <p:sp>
         <p:nvSpPr>
-          <p:cNvPr id="16" name="Rectangle 15"/>
+          <p:cNvPr id="17" name="Rectangle 16"/>
           <p:cNvSpPr/>
           <p:nvPr/>
         </p:nvSpPr>
@@ -28719,7 +29181,7 @@
       </p:sp>
       <p:sp>
         <p:nvSpPr>
-          <p:cNvPr id="17" name="TextBox 16"/>
+          <p:cNvPr id="18" name="TextBox 17"/>
           <p:cNvSpPr txBox="1"/>
           <p:nvPr/>
         </p:nvSpPr>
@@ -28761,7 +29223,7 @@
       </p:sp>
       <p:sp>
         <p:nvSpPr>
-          <p:cNvPr id="18" name="TextBox 17"/>
+          <p:cNvPr id="19" name="TextBox 18"/>
           <p:cNvSpPr txBox="1"/>
           <p:nvPr/>
         </p:nvSpPr>
@@ -28803,7 +29265,7 @@
       </p:sp>
       <p:sp>
         <p:nvSpPr>
-          <p:cNvPr id="19" name="Rectangle 18"/>
+          <p:cNvPr id="20" name="Rectangle 19"/>
           <p:cNvSpPr/>
           <p:nvPr/>
         </p:nvSpPr>
@@ -28847,7 +29309,7 @@
       </p:sp>
       <p:sp>
         <p:nvSpPr>
-          <p:cNvPr id="20" name="TextBox 19"/>
+          <p:cNvPr id="21" name="TextBox 20"/>
           <p:cNvSpPr txBox="1"/>
           <p:nvPr/>
         </p:nvSpPr>
@@ -28889,7 +29351,7 @@
       </p:sp>
       <p:sp>
         <p:nvSpPr>
-          <p:cNvPr id="21" name="TextBox 20"/>
+          <p:cNvPr id="22" name="TextBox 21"/>
           <p:cNvSpPr txBox="1"/>
           <p:nvPr/>
         </p:nvSpPr>
@@ -28931,7 +29393,7 @@
       </p:sp>
       <p:sp>
         <p:nvSpPr>
-          <p:cNvPr id="22" name="TextBox 21"/>
+          <p:cNvPr id="23" name="TextBox 22"/>
           <p:cNvSpPr txBox="1"/>
           <p:nvPr/>
         </p:nvSpPr>
@@ -29211,9 +29673,33 @@
           </a:p>
         </p:txBody>
       </p:sp>
-      <p:sp>
-        <p:nvSpPr>
-          <p:cNvPr id="7" name="TextBox 6"/>
+      <p:pic>
+        <p:nvPicPr>
+          <p:cNvPr id="7" name="Picture 6" descr="GSDC Logo.png"/>
+          <p:cNvPicPr>
+            <a:picLocks noChangeAspect="1"/>
+          </p:cNvPicPr>
+          <p:nvPr/>
+        </p:nvPicPr>
+        <p:blipFill>
+          <a:blip r:embed="rId2"/>
+          <a:stretch>
+            <a:fillRect/>
+          </a:stretch>
+        </p:blipFill>
+        <p:spPr>
+          <a:xfrm>
+            <a:off x="10286695" y="310896"/>
+            <a:ext cx="1127760" cy="365760"/>
+          </a:xfrm>
+          <a:prstGeom prst="rect">
+            <a:avLst/>
+          </a:prstGeom>
+        </p:spPr>
+      </p:pic>
+      <p:sp>
+        <p:nvSpPr>
+          <p:cNvPr id="8" name="TextBox 7"/>
           <p:cNvSpPr txBox="1"/>
           <p:nvPr/>
         </p:nvSpPr>
@@ -29255,7 +29741,7 @@
       </p:sp>
       <p:sp>
         <p:nvSpPr>
-          <p:cNvPr id="8" name="TextBox 7"/>
+          <p:cNvPr id="9" name="TextBox 8"/>
           <p:cNvSpPr txBox="1"/>
           <p:nvPr/>
         </p:nvSpPr>
@@ -29297,7 +29783,7 @@
       </p:sp>
       <p:sp>
         <p:nvSpPr>
-          <p:cNvPr id="9" name="Rectangle 8"/>
+          <p:cNvPr id="10" name="Rectangle 9"/>
           <p:cNvSpPr/>
           <p:nvPr/>
         </p:nvSpPr>
@@ -29341,7 +29827,7 @@
       </p:sp>
       <p:sp>
         <p:nvSpPr>
-          <p:cNvPr id="10" name="TextBox 9"/>
+          <p:cNvPr id="11" name="TextBox 10"/>
           <p:cNvSpPr txBox="1"/>
           <p:nvPr/>
         </p:nvSpPr>
@@ -29383,7 +29869,7 @@
       </p:sp>
       <p:sp>
         <p:nvSpPr>
-          <p:cNvPr id="11" name="TextBox 10"/>
+          <p:cNvPr id="12" name="TextBox 11"/>
           <p:cNvSpPr txBox="1"/>
           <p:nvPr/>
         </p:nvSpPr>
@@ -29425,7 +29911,7 @@
       </p:sp>
       <p:sp>
         <p:nvSpPr>
-          <p:cNvPr id="12" name="TextBox 11"/>
+          <p:cNvPr id="13" name="TextBox 12"/>
           <p:cNvSpPr txBox="1"/>
           <p:nvPr/>
         </p:nvSpPr>
@@ -29467,7 +29953,7 @@
       </p:sp>
       <p:sp>
         <p:nvSpPr>
-          <p:cNvPr id="13" name="Rectangle 12"/>
+          <p:cNvPr id="14" name="Rectangle 13"/>
           <p:cNvSpPr/>
           <p:nvPr/>
         </p:nvSpPr>
@@ -29511,7 +29997,7 @@
       </p:sp>
       <p:sp>
         <p:nvSpPr>
-          <p:cNvPr id="14" name="TextBox 13"/>
+          <p:cNvPr id="15" name="TextBox 14"/>
           <p:cNvSpPr txBox="1"/>
           <p:nvPr/>
         </p:nvSpPr>
@@ -29553,7 +30039,7 @@
       </p:sp>
       <p:sp>
         <p:nvSpPr>
-          <p:cNvPr id="15" name="TextBox 14"/>
+          <p:cNvPr id="16" name="TextBox 15"/>
           <p:cNvSpPr txBox="1"/>
           <p:nvPr/>
         </p:nvSpPr>
@@ -29595,7 +30081,7 @@
       </p:sp>
       <p:sp>
         <p:nvSpPr>
-          <p:cNvPr id="16" name="TextBox 15"/>
+          <p:cNvPr id="17" name="TextBox 16"/>
           <p:cNvSpPr txBox="1"/>
           <p:nvPr/>
         </p:nvSpPr>
@@ -29637,7 +30123,7 @@
       </p:sp>
       <p:sp>
         <p:nvSpPr>
-          <p:cNvPr id="17" name="Rectangle 16"/>
+          <p:cNvPr id="18" name="Rectangle 17"/>
           <p:cNvSpPr/>
           <p:nvPr/>
         </p:nvSpPr>
@@ -29681,7 +30167,7 @@
       </p:sp>
       <p:sp>
         <p:nvSpPr>
-          <p:cNvPr id="18" name="TextBox 17"/>
+          <p:cNvPr id="19" name="TextBox 18"/>
           <p:cNvSpPr txBox="1"/>
           <p:nvPr/>
         </p:nvSpPr>
@@ -29723,7 +30209,7 @@
       </p:sp>
       <p:sp>
         <p:nvSpPr>
-          <p:cNvPr id="19" name="TextBox 18"/>
+          <p:cNvPr id="20" name="TextBox 19"/>
           <p:cNvSpPr txBox="1"/>
           <p:nvPr/>
         </p:nvSpPr>
@@ -29765,7 +30251,7 @@
       </p:sp>
       <p:sp>
         <p:nvSpPr>
-          <p:cNvPr id="20" name="TextBox 19"/>
+          <p:cNvPr id="21" name="TextBox 20"/>
           <p:cNvSpPr txBox="1"/>
           <p:nvPr/>
         </p:nvSpPr>
@@ -29807,7 +30293,7 @@
       </p:sp>
       <p:sp>
         <p:nvSpPr>
-          <p:cNvPr id="21" name="Rectangle 20"/>
+          <p:cNvPr id="22" name="Rectangle 21"/>
           <p:cNvSpPr/>
           <p:nvPr/>
         </p:nvSpPr>
@@ -29851,7 +30337,7 @@
       </p:sp>
       <p:sp>
         <p:nvSpPr>
-          <p:cNvPr id="22" name="TextBox 21"/>
+          <p:cNvPr id="23" name="TextBox 22"/>
           <p:cNvSpPr txBox="1"/>
           <p:nvPr/>
         </p:nvSpPr>
@@ -30131,9 +30617,33 @@
           </a:p>
         </p:txBody>
       </p:sp>
-      <p:sp>
-        <p:nvSpPr>
-          <p:cNvPr id="7" name="TextBox 6"/>
+      <p:pic>
+        <p:nvPicPr>
+          <p:cNvPr id="7" name="Picture 6" descr="GSDC Logo.png"/>
+          <p:cNvPicPr>
+            <a:picLocks noChangeAspect="1"/>
+          </p:cNvPicPr>
+          <p:nvPr/>
+        </p:nvPicPr>
+        <p:blipFill>
+          <a:blip r:embed="rId2"/>
+          <a:stretch>
+            <a:fillRect/>
+          </a:stretch>
+        </p:blipFill>
+        <p:spPr>
+          <a:xfrm>
+            <a:off x="10286695" y="310896"/>
+            <a:ext cx="1127760" cy="365760"/>
+          </a:xfrm>
+          <a:prstGeom prst="rect">
+            <a:avLst/>
+          </a:prstGeom>
+        </p:spPr>
+      </p:pic>
+      <p:sp>
+        <p:nvSpPr>
+          <p:cNvPr id="8" name="TextBox 7"/>
           <p:cNvSpPr txBox="1"/>
           <p:nvPr/>
         </p:nvSpPr>
@@ -30175,7 +30685,7 @@
       </p:sp>
       <p:sp>
         <p:nvSpPr>
-          <p:cNvPr id="8" name="TextBox 7"/>
+          <p:cNvPr id="9" name="TextBox 8"/>
           <p:cNvSpPr txBox="1"/>
           <p:nvPr/>
         </p:nvSpPr>
@@ -30217,7 +30727,7 @@
       </p:sp>
       <p:sp>
         <p:nvSpPr>
-          <p:cNvPr id="9" name="TextBox 8"/>
+          <p:cNvPr id="10" name="TextBox 9"/>
           <p:cNvSpPr txBox="1"/>
           <p:nvPr/>
         </p:nvSpPr>
@@ -30259,7 +30769,7 @@
       </p:sp>
       <p:sp>
         <p:nvSpPr>
-          <p:cNvPr id="10" name="TextBox 9"/>
+          <p:cNvPr id="11" name="TextBox 10"/>
           <p:cNvSpPr txBox="1"/>
           <p:nvPr/>
         </p:nvSpPr>
@@ -30301,7 +30811,7 @@
       </p:sp>
       <p:sp>
         <p:nvSpPr>
-          <p:cNvPr id="11" name="TextBox 10"/>
+          <p:cNvPr id="12" name="TextBox 11"/>
           <p:cNvSpPr txBox="1"/>
           <p:nvPr/>
         </p:nvSpPr>
@@ -30343,7 +30853,7 @@
       </p:sp>
       <p:sp>
         <p:nvSpPr>
-          <p:cNvPr id="12" name="Rectangle 11"/>
+          <p:cNvPr id="13" name="Rectangle 12"/>
           <p:cNvSpPr/>
           <p:nvPr/>
         </p:nvSpPr>
@@ -30387,7 +30897,7 @@
       </p:sp>
       <p:sp>
         <p:nvSpPr>
-          <p:cNvPr id="13" name="Rounded Rectangle 12"/>
+          <p:cNvPr id="14" name="Rounded Rectangle 13"/>
           <p:cNvSpPr/>
           <p:nvPr/>
         </p:nvSpPr>
@@ -30442,7 +30952,7 @@
       </p:sp>
       <p:sp>
         <p:nvSpPr>
-          <p:cNvPr id="14" name="TextBox 13"/>
+          <p:cNvPr id="15" name="TextBox 14"/>
           <p:cNvSpPr txBox="1"/>
           <p:nvPr/>
         </p:nvSpPr>
@@ -30484,7 +30994,7 @@
       </p:sp>
       <p:sp>
         <p:nvSpPr>
-          <p:cNvPr id="15" name="TextBox 14"/>
+          <p:cNvPr id="16" name="TextBox 15"/>
           <p:cNvSpPr txBox="1"/>
           <p:nvPr/>
         </p:nvSpPr>
@@ -30526,7 +31036,7 @@
       </p:sp>
       <p:sp>
         <p:nvSpPr>
-          <p:cNvPr id="16" name="TextBox 15"/>
+          <p:cNvPr id="17" name="TextBox 16"/>
           <p:cNvSpPr txBox="1"/>
           <p:nvPr/>
         </p:nvSpPr>
@@ -30568,7 +31078,7 @@
       </p:sp>
       <p:sp>
         <p:nvSpPr>
-          <p:cNvPr id="17" name="TextBox 16"/>
+          <p:cNvPr id="18" name="TextBox 17"/>
           <p:cNvSpPr txBox="1"/>
           <p:nvPr/>
         </p:nvSpPr>
@@ -30610,7 +31120,7 @@
       </p:sp>
       <p:sp>
         <p:nvSpPr>
-          <p:cNvPr id="18" name="Rectangle 17"/>
+          <p:cNvPr id="19" name="Rectangle 18"/>
           <p:cNvSpPr/>
           <p:nvPr/>
         </p:nvSpPr>
@@ -30654,7 +31164,7 @@
       </p:sp>
       <p:sp>
         <p:nvSpPr>
-          <p:cNvPr id="19" name="Rounded Rectangle 18"/>
+          <p:cNvPr id="20" name="Rounded Rectangle 19"/>
           <p:cNvSpPr/>
           <p:nvPr/>
         </p:nvSpPr>
@@ -30709,7 +31219,7 @@
       </p:sp>
       <p:sp>
         <p:nvSpPr>
-          <p:cNvPr id="20" name="TextBox 19"/>
+          <p:cNvPr id="21" name="TextBox 20"/>
           <p:cNvSpPr txBox="1"/>
           <p:nvPr/>
         </p:nvSpPr>
@@ -30751,7 +31261,7 @@
       </p:sp>
       <p:sp>
         <p:nvSpPr>
-          <p:cNvPr id="21" name="TextBox 20"/>
+          <p:cNvPr id="22" name="TextBox 21"/>
           <p:cNvSpPr txBox="1"/>
           <p:nvPr/>
         </p:nvSpPr>
@@ -30793,7 +31303,7 @@
       </p:sp>
       <p:sp>
         <p:nvSpPr>
-          <p:cNvPr id="22" name="TextBox 21"/>
+          <p:cNvPr id="23" name="TextBox 22"/>
           <p:cNvSpPr txBox="1"/>
           <p:nvPr/>
         </p:nvSpPr>
@@ -30835,7 +31345,7 @@
       </p:sp>
       <p:sp>
         <p:nvSpPr>
-          <p:cNvPr id="23" name="TextBox 22"/>
+          <p:cNvPr id="24" name="TextBox 23"/>
           <p:cNvSpPr txBox="1"/>
           <p:nvPr/>
         </p:nvSpPr>
@@ -30877,7 +31387,7 @@
       </p:sp>
       <p:sp>
         <p:nvSpPr>
-          <p:cNvPr id="24" name="Rectangle 23"/>
+          <p:cNvPr id="25" name="Rectangle 24"/>
           <p:cNvSpPr/>
           <p:nvPr/>
         </p:nvSpPr>
@@ -30921,7 +31431,7 @@
       </p:sp>
       <p:sp>
         <p:nvSpPr>
-          <p:cNvPr id="25" name="Rounded Rectangle 24"/>
+          <p:cNvPr id="26" name="Rounded Rectangle 25"/>
           <p:cNvSpPr/>
           <p:nvPr/>
         </p:nvSpPr>
@@ -30976,7 +31486,7 @@
       </p:sp>
       <p:sp>
         <p:nvSpPr>
-          <p:cNvPr id="26" name="TextBox 25"/>
+          <p:cNvPr id="27" name="TextBox 26"/>
           <p:cNvSpPr txBox="1"/>
           <p:nvPr/>
         </p:nvSpPr>
@@ -31018,7 +31528,7 @@
       </p:sp>
       <p:sp>
         <p:nvSpPr>
-          <p:cNvPr id="27" name="TextBox 26"/>
+          <p:cNvPr id="28" name="TextBox 27"/>
           <p:cNvSpPr txBox="1"/>
           <p:nvPr/>
         </p:nvSpPr>
@@ -31060,7 +31570,7 @@
       </p:sp>
       <p:sp>
         <p:nvSpPr>
-          <p:cNvPr id="28" name="TextBox 27"/>
+          <p:cNvPr id="29" name="TextBox 28"/>
           <p:cNvSpPr txBox="1"/>
           <p:nvPr/>
         </p:nvSpPr>
@@ -31102,7 +31612,7 @@
       </p:sp>
       <p:sp>
         <p:nvSpPr>
-          <p:cNvPr id="29" name="TextBox 28"/>
+          <p:cNvPr id="30" name="TextBox 29"/>
           <p:cNvSpPr txBox="1"/>
           <p:nvPr/>
         </p:nvSpPr>
@@ -31163,7 +31673,7 @@
       </p:sp>
       <p:sp>
         <p:nvSpPr>
-          <p:cNvPr id="30" name="Rectangle 29"/>
+          <p:cNvPr id="31" name="Rectangle 30"/>
           <p:cNvSpPr/>
           <p:nvPr/>
         </p:nvSpPr>
@@ -31207,7 +31717,7 @@
       </p:sp>
       <p:sp>
         <p:nvSpPr>
-          <p:cNvPr id="31" name="Rounded Rectangle 30"/>
+          <p:cNvPr id="32" name="Rounded Rectangle 31"/>
           <p:cNvSpPr/>
           <p:nvPr/>
         </p:nvSpPr>
@@ -31262,7 +31772,7 @@
       </p:sp>
       <p:sp>
         <p:nvSpPr>
-          <p:cNvPr id="32" name="TextBox 31"/>
+          <p:cNvPr id="33" name="TextBox 32"/>
           <p:cNvSpPr txBox="1"/>
           <p:nvPr/>
         </p:nvSpPr>
@@ -31304,7 +31814,7 @@
       </p:sp>
       <p:sp>
         <p:nvSpPr>
-          <p:cNvPr id="33" name="TextBox 32"/>
+          <p:cNvPr id="34" name="TextBox 33"/>
           <p:cNvSpPr txBox="1"/>
           <p:nvPr/>
         </p:nvSpPr>
@@ -31346,7 +31856,7 @@
       </p:sp>
       <p:sp>
         <p:nvSpPr>
-          <p:cNvPr id="34" name="TextBox 33"/>
+          <p:cNvPr id="35" name="TextBox 34"/>
           <p:cNvSpPr txBox="1"/>
           <p:nvPr/>
         </p:nvSpPr>
@@ -31388,7 +31898,7 @@
       </p:sp>
       <p:sp>
         <p:nvSpPr>
-          <p:cNvPr id="35" name="TextBox 34"/>
+          <p:cNvPr id="36" name="TextBox 35"/>
           <p:cNvSpPr txBox="1"/>
           <p:nvPr/>
         </p:nvSpPr>
@@ -31430,7 +31940,7 @@
       </p:sp>
       <p:sp>
         <p:nvSpPr>
-          <p:cNvPr id="36" name="Rectangle 35"/>
+          <p:cNvPr id="37" name="Rectangle 36"/>
           <p:cNvSpPr/>
           <p:nvPr/>
         </p:nvSpPr>
@@ -31474,7 +31984,7 @@
       </p:sp>
       <p:sp>
         <p:nvSpPr>
-          <p:cNvPr id="37" name="TextBox 36"/>
+          <p:cNvPr id="38" name="TextBox 37"/>
           <p:cNvSpPr txBox="1"/>
           <p:nvPr/>
         </p:nvSpPr>
@@ -31760,9 +32270,33 @@
           </a:p>
         </p:txBody>
       </p:sp>
-      <p:sp>
-        <p:nvSpPr>
-          <p:cNvPr id="7" name="TextBox 6"/>
+      <p:pic>
+        <p:nvPicPr>
+          <p:cNvPr id="7" name="Picture 6" descr="GSDC Logo.png"/>
+          <p:cNvPicPr>
+            <a:picLocks noChangeAspect="1"/>
+          </p:cNvPicPr>
+          <p:nvPr/>
+        </p:nvPicPr>
+        <p:blipFill>
+          <a:blip r:embed="rId2"/>
+          <a:stretch>
+            <a:fillRect/>
+          </a:stretch>
+        </p:blipFill>
+        <p:spPr>
+          <a:xfrm>
+            <a:off x="10286695" y="310896"/>
+            <a:ext cx="1127760" cy="365760"/>
+          </a:xfrm>
+          <a:prstGeom prst="rect">
+            <a:avLst/>
+          </a:prstGeom>
+        </p:spPr>
+      </p:pic>
+      <p:sp>
+        <p:nvSpPr>
+          <p:cNvPr id="8" name="TextBox 7"/>
           <p:cNvSpPr txBox="1"/>
           <p:nvPr/>
         </p:nvSpPr>
@@ -31823,7 +32357,7 @@
       </p:sp>
       <p:sp>
         <p:nvSpPr>
-          <p:cNvPr id="8" name="TextBox 7"/>
+          <p:cNvPr id="9" name="TextBox 8"/>
           <p:cNvSpPr txBox="1"/>
           <p:nvPr/>
         </p:nvSpPr>
@@ -31865,7 +32399,7 @@
       </p:sp>
       <p:sp>
         <p:nvSpPr>
-          <p:cNvPr id="9" name="TextBox 8"/>
+          <p:cNvPr id="10" name="TextBox 9"/>
           <p:cNvSpPr txBox="1"/>
           <p:nvPr/>
         </p:nvSpPr>
@@ -31907,7 +32441,7 @@
       </p:sp>
       <p:sp>
         <p:nvSpPr>
-          <p:cNvPr id="10" name="TextBox 9"/>
+          <p:cNvPr id="11" name="TextBox 10"/>
           <p:cNvSpPr txBox="1"/>
           <p:nvPr/>
         </p:nvSpPr>
@@ -31949,7 +32483,7 @@
       </p:sp>
       <p:sp>
         <p:nvSpPr>
-          <p:cNvPr id="11" name="TextBox 10"/>
+          <p:cNvPr id="12" name="TextBox 11"/>
           <p:cNvSpPr txBox="1"/>
           <p:nvPr/>
         </p:nvSpPr>
@@ -31991,7 +32525,7 @@
       </p:sp>
       <p:sp>
         <p:nvSpPr>
-          <p:cNvPr id="12" name="TextBox 11"/>
+          <p:cNvPr id="13" name="TextBox 12"/>
           <p:cNvSpPr txBox="1"/>
           <p:nvPr/>
         </p:nvSpPr>
@@ -32033,7 +32567,7 @@
       </p:sp>
       <p:sp>
         <p:nvSpPr>
-          <p:cNvPr id="13" name="TextBox 12"/>
+          <p:cNvPr id="14" name="TextBox 13"/>
           <p:cNvSpPr txBox="1"/>
           <p:nvPr/>
         </p:nvSpPr>
@@ -32075,7 +32609,7 @@
       </p:sp>
       <p:sp>
         <p:nvSpPr>
-          <p:cNvPr id="14" name="TextBox 13"/>
+          <p:cNvPr id="15" name="TextBox 14"/>
           <p:cNvSpPr txBox="1"/>
           <p:nvPr/>
         </p:nvSpPr>
@@ -32117,7 +32651,7 @@
       </p:sp>
       <p:sp>
         <p:nvSpPr>
-          <p:cNvPr id="15" name="TextBox 14"/>
+          <p:cNvPr id="16" name="TextBox 15"/>
           <p:cNvSpPr txBox="1"/>
           <p:nvPr/>
         </p:nvSpPr>
@@ -32159,7 +32693,7 @@
       </p:sp>
       <p:sp>
         <p:nvSpPr>
-          <p:cNvPr id="16" name="Rectangle 15"/>
+          <p:cNvPr id="17" name="Rectangle 16"/>
           <p:cNvSpPr/>
           <p:nvPr/>
         </p:nvSpPr>
@@ -32203,7 +32737,7 @@
       </p:sp>
       <p:sp>
         <p:nvSpPr>
-          <p:cNvPr id="17" name="Rectangle 16"/>
+          <p:cNvPr id="18" name="Rectangle 17"/>
           <p:cNvSpPr/>
           <p:nvPr/>
         </p:nvSpPr>
@@ -32247,7 +32781,7 @@
       </p:sp>
       <p:sp>
         <p:nvSpPr>
-          <p:cNvPr id="18" name="Rectangle 17"/>
+          <p:cNvPr id="19" name="Rectangle 18"/>
           <p:cNvSpPr/>
           <p:nvPr/>
         </p:nvSpPr>
@@ -32291,7 +32825,7 @@
       </p:sp>
       <p:sp>
         <p:nvSpPr>
-          <p:cNvPr id="19" name="Rectangle 18"/>
+          <p:cNvPr id="20" name="Rectangle 19"/>
           <p:cNvSpPr/>
           <p:nvPr/>
         </p:nvSpPr>
@@ -32335,7 +32869,7 @@
       </p:sp>
       <p:sp>
         <p:nvSpPr>
-          <p:cNvPr id="20" name="Rectangle 19"/>
+          <p:cNvPr id="21" name="Rectangle 20"/>
           <p:cNvSpPr/>
           <p:nvPr/>
         </p:nvSpPr>
@@ -32379,7 +32913,7 @@
       </p:sp>
       <p:sp>
         <p:nvSpPr>
-          <p:cNvPr id="21" name="Rectangle 20"/>
+          <p:cNvPr id="22" name="Rectangle 21"/>
           <p:cNvSpPr/>
           <p:nvPr/>
         </p:nvSpPr>
@@ -32423,7 +32957,7 @@
       </p:sp>
       <p:sp>
         <p:nvSpPr>
-          <p:cNvPr id="22" name="TextBox 21"/>
+          <p:cNvPr id="23" name="TextBox 22"/>
           <p:cNvSpPr txBox="1"/>
           <p:nvPr/>
         </p:nvSpPr>
@@ -32465,7 +32999,7 @@
       </p:sp>
       <p:sp>
         <p:nvSpPr>
-          <p:cNvPr id="23" name="TextBox 22"/>
+          <p:cNvPr id="24" name="TextBox 23"/>
           <p:cNvSpPr txBox="1"/>
           <p:nvPr/>
         </p:nvSpPr>
@@ -32507,7 +33041,7 @@
       </p:sp>
       <p:sp>
         <p:nvSpPr>
-          <p:cNvPr id="24" name="Rounded Rectangle 23"/>
+          <p:cNvPr id="25" name="Rounded Rectangle 24"/>
           <p:cNvSpPr/>
           <p:nvPr/>
         </p:nvSpPr>
@@ -32553,7 +33087,7 @@
       </p:sp>
       <p:sp>
         <p:nvSpPr>
-          <p:cNvPr id="25" name="TextBox 24"/>
+          <p:cNvPr id="26" name="TextBox 25"/>
           <p:cNvSpPr txBox="1"/>
           <p:nvPr/>
         </p:nvSpPr>
@@ -32595,7 +33129,7 @@
       </p:sp>
       <p:sp>
         <p:nvSpPr>
-          <p:cNvPr id="26" name="TextBox 25"/>
+          <p:cNvPr id="27" name="TextBox 26"/>
           <p:cNvSpPr txBox="1"/>
           <p:nvPr/>
         </p:nvSpPr>

--- a/deck/verification-budget.pptx
+++ b/deck/verification-budget.pptx
@@ -32,6 +32,7 @@
     <p:sldId id="280" r:id="rId32"/>
     <p:sldId id="281" r:id="rId33"/>
     <p:sldId id="282" r:id="rId34"/>
+    <p:sldId id="283" r:id="rId35"/>
   </p:sldIdLst>
   <p:sldSz cx="12191695" cy="6858000" type="screen4x3"/>
   <p:notesSz cx="6858000" cy="9144000"/>
@@ -7214,7 +7215,7 @@
                 </a:solidFill>
                 <a:latin typeface="Calibri"/>
               </a:rPr>
-              <a:t>11 / 27</a:t>
+              <a:t>11 / 28</a:t>
             </a:r>
           </a:p>
         </p:txBody>
@@ -8834,7 +8835,7 @@
                 </a:solidFill>
                 <a:latin typeface="Calibri"/>
               </a:rPr>
-              <a:t>12 / 27</a:t>
+              <a:t>12 / 28</a:t>
             </a:r>
           </a:p>
         </p:txBody>
@@ -10080,7 +10081,7 @@
                 </a:solidFill>
                 <a:latin typeface="Calibri"/>
               </a:rPr>
-              <a:t>13 / 27</a:t>
+              <a:t>13 / 28</a:t>
             </a:r>
           </a:p>
         </p:txBody>
@@ -10948,7 +10949,7 @@
                 </a:solidFill>
                 <a:latin typeface="Calibri"/>
               </a:rPr>
-              <a:t>14 / 27</a:t>
+              <a:t>14 / 28</a:t>
             </a:r>
           </a:p>
         </p:txBody>
@@ -12316,7 +12317,7 @@
                 </a:solidFill>
                 <a:latin typeface="Calibri"/>
               </a:rPr>
-              <a:t>15 / 27</a:t>
+              <a:t>15 / 28</a:t>
             </a:r>
           </a:p>
         </p:txBody>
@@ -13690,7 +13691,7 @@
                 </a:solidFill>
                 <a:latin typeface="Calibri"/>
               </a:rPr>
-              <a:t>16 / 27</a:t>
+              <a:t>16 / 28</a:t>
             </a:r>
           </a:p>
         </p:txBody>
@@ -15184,7 +15185,7 @@
                 </a:solidFill>
                 <a:latin typeface="Calibri"/>
               </a:rPr>
-              <a:t>17 / 27</a:t>
+              <a:t>17 / 28</a:t>
             </a:r>
           </a:p>
         </p:txBody>
@@ -16766,7 +16767,7 @@
                 </a:solidFill>
                 <a:latin typeface="Calibri"/>
               </a:rPr>
-              <a:t>18 / 27</a:t>
+              <a:t>18 / 28</a:t>
             </a:r>
           </a:p>
         </p:txBody>
@@ -17773,7 +17774,7 @@
                 </a:solidFill>
                 <a:latin typeface="Calibri"/>
               </a:rPr>
-              <a:t>19 / 27</a:t>
+              <a:t>19 / 28</a:t>
             </a:r>
           </a:p>
         </p:txBody>
@@ -19507,7 +19508,7 @@
                 </a:solidFill>
                 <a:latin typeface="Calibri"/>
               </a:rPr>
-              <a:t>20 / 27</a:t>
+              <a:t>20 / 28</a:t>
             </a:r>
           </a:p>
         </p:txBody>
@@ -20447,7 +20448,7 @@
                 </a:solidFill>
                 <a:latin typeface="Calibri"/>
               </a:rPr>
-              <a:t>21 / 27</a:t>
+              <a:t>21 / 28</a:t>
             </a:r>
           </a:p>
         </p:txBody>
@@ -21693,7 +21694,7 @@
                 </a:solidFill>
                 <a:latin typeface="Calibri"/>
               </a:rPr>
-              <a:t>22 / 27</a:t>
+              <a:t>22 / 28</a:t>
             </a:r>
           </a:p>
         </p:txBody>
@@ -22833,7 +22834,7 @@
                 </a:solidFill>
                 <a:latin typeface="Calibri"/>
               </a:rPr>
-              <a:t>24 / 27</a:t>
+              <a:t>24 / 28</a:t>
             </a:r>
           </a:p>
         </p:txBody>
@@ -23998,7 +23999,7 @@
                 </a:solidFill>
                 <a:latin typeface="Calibri"/>
               </a:rPr>
-              <a:t>25 / 27</a:t>
+              <a:t>25 / 28</a:t>
             </a:r>
           </a:p>
         </p:txBody>
@@ -24772,7 +24773,7 @@
                 </a:solidFill>
                 <a:latin typeface="Calibri"/>
               </a:rPr>
-              <a:t>WHAT TO DO</a:t>
+              <a:t>THE PAYOFF</a:t>
             </a:r>
           </a:p>
         </p:txBody>
@@ -24944,7 +24945,7 @@
                 </a:solidFill>
                 <a:latin typeface="Calibri"/>
               </a:rPr>
-              <a:t>26 / 27</a:t>
+              <a:t>26 / 28</a:t>
             </a:r>
           </a:p>
         </p:txBody>
@@ -25010,7 +25011,7 @@
                 </a:solidFill>
                 <a:latin typeface="Cambria"/>
               </a:rPr>
-              <a:t>Four things you can do on Monday.</a:t>
+              <a:t>What this buys you.</a:t>
             </a:r>
           </a:p>
         </p:txBody>
@@ -25023,92 +25024,8 @@
         </p:nvSpPr>
         <p:spPr>
           <a:xfrm>
-            <a:off x="777240" y="2267712"/>
-            <a:ext cx="365760" cy="365760"/>
-          </a:xfrm>
-          <a:prstGeom prst="rect">
-            <a:avLst/>
-          </a:prstGeom>
-          <a:noFill/>
-        </p:spPr>
-        <p:txBody>
-          <a:bodyPr wrap="square" anchor="t" lIns="0" rIns="0" tIns="0" bIns="0">
-            <a:spAutoFit/>
-          </a:bodyPr>
-          <a:lstStyle/>
-          <a:p>
-            <a:pPr algn="l">
-              <a:lnSpc>
-                <a:spcPct val="125000"/>
-              </a:lnSpc>
-              <a:spcAft>
-                <a:spcPts val="0"/>
-              </a:spcAft>
-            </a:pPr>
-            <a:r>
-              <a:rPr sz="2000" b="1" i="0">
-                <a:solidFill>
-                  <a:srgbClr val="1F3A34"/>
-                </a:solidFill>
-                <a:latin typeface="Cambria"/>
-              </a:rPr>
-              <a:t>1</a:t>
-            </a:r>
-          </a:p>
-        </p:txBody>
-      </p:sp>
-      <p:sp>
-        <p:nvSpPr>
-          <p:cNvPr id="10" name="TextBox 9"/>
-          <p:cNvSpPr txBox="1"/>
-          <p:nvPr/>
-        </p:nvSpPr>
-        <p:spPr>
-          <a:xfrm>
-            <a:off x="1280160" y="2249424"/>
-            <a:ext cx="4114800" cy="640080"/>
-          </a:xfrm>
-          <a:prstGeom prst="rect">
-            <a:avLst/>
-          </a:prstGeom>
-          <a:noFill/>
-        </p:spPr>
-        <p:txBody>
-          <a:bodyPr wrap="square" anchor="t" lIns="0" rIns="0" tIns="0" bIns="0">
-            <a:spAutoFit/>
-          </a:bodyPr>
-          <a:lstStyle/>
-          <a:p>
-            <a:pPr algn="l">
-              <a:lnSpc>
-                <a:spcPct val="122000"/>
-              </a:lnSpc>
-              <a:spcAft>
-                <a:spcPts val="0"/>
-              </a:spcAft>
-            </a:pPr>
-            <a:r>
-              <a:rPr sz="1550" b="1" i="0">
-                <a:solidFill>
-                  <a:srgbClr val="101418"/>
-                </a:solidFill>
-                <a:latin typeface="Calibri"/>
-              </a:rPr>
-              <a:t>Pick one decision type an agent already touches.</a:t>
-            </a:r>
-          </a:p>
-        </p:txBody>
-      </p:sp>
-      <p:sp>
-        <p:nvSpPr>
-          <p:cNvPr id="11" name="TextBox 10"/>
-          <p:cNvSpPr txBox="1"/>
-          <p:nvPr/>
-        </p:nvSpPr>
-        <p:spPr>
-          <a:xfrm>
-            <a:off x="5394960" y="2249424"/>
-            <a:ext cx="6007608" cy="640080"/>
+            <a:off x="777240" y="1481328"/>
+            <a:ext cx="7863840" cy="457200"/>
           </a:xfrm>
           <a:prstGeom prst="rect">
             <a:avLst/>
@@ -25130,26 +25047,26 @@
               </a:spcAft>
             </a:pPr>
             <a:r>
-              <a:rPr sz="1350" b="0" i="0">
-                <a:solidFill>
-                  <a:srgbClr val="2A333B"/>
-                </a:solidFill>
-                <a:latin typeface="Calibri"/>
-              </a:rPr>
-              <a:t>One. Not a programme.</a:t>
-            </a:r>
-          </a:p>
-        </p:txBody>
-      </p:sp>
-      <p:sp>
-        <p:nvSpPr>
-          <p:cNvPr id="12" name="Rectangle 11"/>
+              <a:rPr sz="1500" b="0" i="0">
+                <a:solidFill>
+                  <a:srgbClr val="6B7780"/>
+                </a:solidFill>
+                <a:latin typeface="Calibri"/>
+              </a:rPr>
+              <a:t>This is a permission structure, not a brake. It tells you where you can go faster, and how fast.</a:t>
+            </a:r>
+          </a:p>
+        </p:txBody>
+      </p:sp>
+      <p:sp>
+        <p:nvSpPr>
+          <p:cNvPr id="10" name="Rectangle 9"/>
           <p:cNvSpPr/>
           <p:nvPr/>
         </p:nvSpPr>
         <p:spPr>
           <a:xfrm>
-            <a:off x="777240" y="2944368"/>
+            <a:off x="777240" y="2212848"/>
             <a:ext cx="10637215" cy="8572"/>
           </a:xfrm>
           <a:prstGeom prst="rect">
@@ -25187,14 +25104,14 @@
       </p:sp>
       <p:sp>
         <p:nvSpPr>
-          <p:cNvPr id="13" name="TextBox 12"/>
-          <p:cNvSpPr txBox="1"/>
-          <p:nvPr/>
-        </p:nvSpPr>
-        <p:spPr>
-          <a:xfrm>
-            <a:off x="777240" y="3127248"/>
-            <a:ext cx="365760" cy="365760"/>
+          <p:cNvPr id="11" name="TextBox 10"/>
+          <p:cNvSpPr txBox="1"/>
+          <p:nvPr/>
+        </p:nvSpPr>
+        <p:spPr>
+          <a:xfrm>
+            <a:off x="777240" y="2340864"/>
+            <a:ext cx="3657600" cy="310896"/>
           </a:xfrm>
           <a:prstGeom prst="rect">
             <a:avLst/>
@@ -25216,110 +25133,68 @@
               </a:spcAft>
             </a:pPr>
             <a:r>
-              <a:rPr sz="2000" b="1" i="0">
-                <a:solidFill>
-                  <a:srgbClr val="1F3A34"/>
+              <a:rPr sz="1550" b="1" i="0">
+                <a:solidFill>
+                  <a:srgbClr val="101418"/>
                 </a:solidFill>
                 <a:latin typeface="Cambria"/>
               </a:rPr>
-              <a:t>2</a:t>
-            </a:r>
-          </a:p>
-        </p:txBody>
-      </p:sp>
-      <p:sp>
-        <p:nvSpPr>
-          <p:cNvPr id="14" name="TextBox 13"/>
-          <p:cNvSpPr txBox="1"/>
-          <p:nvPr/>
-        </p:nvSpPr>
-        <p:spPr>
-          <a:xfrm>
-            <a:off x="1280160" y="3108960"/>
-            <a:ext cx="4114800" cy="640080"/>
-          </a:xfrm>
-          <a:prstGeom prst="rect">
-            <a:avLst/>
-          </a:prstGeom>
-          <a:noFill/>
-        </p:spPr>
-        <p:txBody>
-          <a:bodyPr wrap="square" anchor="t" lIns="0" rIns="0" tIns="0" bIns="0">
-            <a:spAutoFit/>
-          </a:bodyPr>
-          <a:lstStyle/>
-          <a:p>
-            <a:pPr algn="l">
-              <a:lnSpc>
-                <a:spcPct val="122000"/>
-              </a:lnSpc>
-              <a:spcAft>
-                <a:spcPts val="0"/>
-              </a:spcAft>
-            </a:pPr>
-            <a:r>
-              <a:rPr sz="1550" b="1" i="0">
-                <a:solidFill>
-                  <a:srgbClr val="101418"/>
-                </a:solidFill>
-                <a:latin typeface="Calibri"/>
-              </a:rPr>
-              <a:t>Time thirty reviews of it.</a:t>
-            </a:r>
-          </a:p>
-        </p:txBody>
-      </p:sp>
-      <p:sp>
-        <p:nvSpPr>
-          <p:cNvPr id="15" name="TextBox 14"/>
-          <p:cNvSpPr txBox="1"/>
-          <p:nvPr/>
-        </p:nvSpPr>
-        <p:spPr>
-          <a:xfrm>
-            <a:off x="5394960" y="3108960"/>
-            <a:ext cx="6007608" cy="640080"/>
-          </a:xfrm>
-          <a:prstGeom prst="rect">
-            <a:avLst/>
-          </a:prstGeom>
-          <a:noFill/>
-        </p:spPr>
-        <p:txBody>
-          <a:bodyPr wrap="square" anchor="t" lIns="0" rIns="0" tIns="0" bIns="0">
-            <a:spAutoFit/>
-          </a:bodyPr>
-          <a:lstStyle/>
-          <a:p>
-            <a:pPr algn="l">
-              <a:lnSpc>
-                <a:spcPct val="130000"/>
-              </a:lnSpc>
-              <a:spcAft>
-                <a:spcPts val="0"/>
-              </a:spcAft>
-            </a:pPr>
-            <a:r>
-              <a:rPr sz="1350" b="0" i="0">
+              <a:t>More autonomy, not less.</a:t>
+            </a:r>
+          </a:p>
+        </p:txBody>
+      </p:sp>
+      <p:sp>
+        <p:nvSpPr>
+          <p:cNvPr id="12" name="TextBox 11"/>
+          <p:cNvSpPr txBox="1"/>
+          <p:nvPr/>
+        </p:nvSpPr>
+        <p:spPr>
+          <a:xfrm>
+            <a:off x="4709159" y="2340864"/>
+            <a:ext cx="6705295" cy="786384"/>
+          </a:xfrm>
+          <a:prstGeom prst="rect">
+            <a:avLst/>
+          </a:prstGeom>
+          <a:noFill/>
+        </p:spPr>
+        <p:txBody>
+          <a:bodyPr wrap="square" anchor="t" lIns="0" rIns="0" tIns="0" bIns="0">
+            <a:spAutoFit/>
+          </a:bodyPr>
+          <a:lstStyle/>
+          <a:p>
+            <a:pPr algn="l">
+              <a:lnSpc>
+                <a:spcPct val="132000"/>
+              </a:lnSpc>
+              <a:spcAft>
+                <a:spcPts val="0"/>
+              </a:spcAft>
+            </a:pPr>
+            <a:r>
+              <a:rPr sz="1250" b="0" i="0">
                 <a:solidFill>
                   <a:srgbClr val="2A333B"/>
                 </a:solidFill>
                 <a:latin typeface="Calibri"/>
               </a:rPr>
-              <a:t>Then ask each reviewer whether they genuinely checked, and discard the ones who say no. That last step is the whole thing.</a:t>
-            </a:r>
-          </a:p>
-        </p:txBody>
-      </p:sp>
-      <p:sp>
-        <p:nvSpPr>
-          <p:cNvPr id="16" name="Rectangle 15"/>
+              <a:t>Machine-checkable work runs at three thousand decisions a week in the worked example. Expert-checkable work runs at twenty-one. Same people, same models. Pick the first kind and you are not throttled at all.</a:t>
+            </a:r>
+          </a:p>
+        </p:txBody>
+      </p:sp>
+      <p:sp>
+        <p:nvSpPr>
+          <p:cNvPr id="13" name="Rectangle 12"/>
           <p:cNvSpPr/>
           <p:nvPr/>
         </p:nvSpPr>
         <p:spPr>
           <a:xfrm>
-            <a:off x="777240" y="3803904"/>
+            <a:off x="777240" y="3182112"/>
             <a:ext cx="10637215" cy="8572"/>
           </a:xfrm>
           <a:prstGeom prst="rect">
@@ -25357,14 +25232,14 @@
       </p:sp>
       <p:sp>
         <p:nvSpPr>
-          <p:cNvPr id="17" name="TextBox 16"/>
-          <p:cNvSpPr txBox="1"/>
-          <p:nvPr/>
-        </p:nvSpPr>
-        <p:spPr>
-          <a:xfrm>
-            <a:off x="777240" y="3986783"/>
-            <a:ext cx="365760" cy="365760"/>
+          <p:cNvPr id="14" name="TextBox 13"/>
+          <p:cNvSpPr txBox="1"/>
+          <p:nvPr/>
+        </p:nvSpPr>
+        <p:spPr>
+          <a:xfrm>
+            <a:off x="777240" y="3310128"/>
+            <a:ext cx="3657600" cy="310896"/>
           </a:xfrm>
           <a:prstGeom prst="rect">
             <a:avLst/>
@@ -25386,110 +25261,68 @@
               </a:spcAft>
             </a:pPr>
             <a:r>
-              <a:rPr sz="2000" b="1" i="0">
-                <a:solidFill>
-                  <a:srgbClr val="1F3A34"/>
+              <a:rPr sz="1550" b="1" i="0">
+                <a:solidFill>
+                  <a:srgbClr val="101418"/>
                 </a:solidFill>
                 <a:latin typeface="Cambria"/>
               </a:rPr>
-              <a:t>3</a:t>
-            </a:r>
-          </a:p>
-        </p:txBody>
-      </p:sp>
-      <p:sp>
-        <p:nvSpPr>
-          <p:cNvPr id="18" name="TextBox 17"/>
-          <p:cNvSpPr txBox="1"/>
-          <p:nvPr/>
-        </p:nvSpPr>
-        <p:spPr>
-          <a:xfrm>
-            <a:off x="1280160" y="3968496"/>
-            <a:ext cx="4114800" cy="640080"/>
-          </a:xfrm>
-          <a:prstGeom prst="rect">
-            <a:avLst/>
-          </a:prstGeom>
-          <a:noFill/>
-        </p:spPr>
-        <p:txBody>
-          <a:bodyPr wrap="square" anchor="t" lIns="0" rIns="0" tIns="0" bIns="0">
-            <a:spAutoFit/>
-          </a:bodyPr>
-          <a:lstStyle/>
-          <a:p>
-            <a:pPr algn="l">
-              <a:lnSpc>
-                <a:spcPct val="122000"/>
-              </a:lnSpc>
-              <a:spcAft>
-                <a:spcPts val="0"/>
-              </a:spcAft>
-            </a:pPr>
-            <a:r>
-              <a:rPr sz="1550" b="1" i="0">
-                <a:solidFill>
-                  <a:srgbClr val="101418"/>
-                </a:solidFill>
-                <a:latin typeface="Calibri"/>
-              </a:rPr>
-              <a:t>Do the division.</a:t>
-            </a:r>
-          </a:p>
-        </p:txBody>
-      </p:sp>
-      <p:sp>
-        <p:nvSpPr>
-          <p:cNvPr id="19" name="TextBox 18"/>
-          <p:cNvSpPr txBox="1"/>
-          <p:nvPr/>
-        </p:nvSpPr>
-        <p:spPr>
-          <a:xfrm>
-            <a:off x="5394960" y="3968496"/>
-            <a:ext cx="6007608" cy="640080"/>
-          </a:xfrm>
-          <a:prstGeom prst="rect">
-            <a:avLst/>
-          </a:prstGeom>
-          <a:noFill/>
-        </p:spPr>
-        <p:txBody>
-          <a:bodyPr wrap="square" anchor="t" lIns="0" rIns="0" tIns="0" bIns="0">
-            <a:spAutoFit/>
-          </a:bodyPr>
-          <a:lstStyle/>
-          <a:p>
-            <a:pPr algn="l">
-              <a:lnSpc>
-                <a:spcPct val="130000"/>
-              </a:lnSpc>
-              <a:spcAft>
-                <a:spcPts val="0"/>
-              </a:spcAft>
-            </a:pPr>
-            <a:r>
-              <a:rPr sz="1350" b="0" i="0">
+              <a:t>A number you can defend.</a:t>
+            </a:r>
+          </a:p>
+        </p:txBody>
+      </p:sp>
+      <p:sp>
+        <p:nvSpPr>
+          <p:cNvPr id="15" name="TextBox 14"/>
+          <p:cNvSpPr txBox="1"/>
+          <p:nvPr/>
+        </p:nvSpPr>
+        <p:spPr>
+          <a:xfrm>
+            <a:off x="4709159" y="3310128"/>
+            <a:ext cx="6705295" cy="786384"/>
+          </a:xfrm>
+          <a:prstGeom prst="rect">
+            <a:avLst/>
+          </a:prstGeom>
+          <a:noFill/>
+        </p:spPr>
+        <p:txBody>
+          <a:bodyPr wrap="square" anchor="t" lIns="0" rIns="0" tIns="0" bIns="0">
+            <a:spAutoFit/>
+          </a:bodyPr>
+          <a:lstStyle/>
+          <a:p>
+            <a:pPr algn="l">
+              <a:lnSpc>
+                <a:spcPct val="132000"/>
+              </a:lnSpc>
+              <a:spcAft>
+                <a:spcPts val="0"/>
+              </a:spcAft>
+            </a:pPr>
+            <a:r>
+              <a:rPr sz="1250" b="0" i="0">
                 <a:solidFill>
                   <a:srgbClr val="2A333B"/>
                 </a:solidFill>
                 <a:latin typeface="Calibri"/>
               </a:rPr>
-              <a:t>Four numbers into the calculator. About a minute, and it runs in your browser with nothing sent anywhere.</a:t>
-            </a:r>
-          </a:p>
-        </p:txBody>
-      </p:sp>
-      <p:sp>
-        <p:nvSpPr>
-          <p:cNvPr id="20" name="Rectangle 19"/>
+              <a:t>When the board asks how much AI you can safely run, you answer with arithmetic instead of a feeling, and you can show what would have to change to raise it.</a:t>
+            </a:r>
+          </a:p>
+        </p:txBody>
+      </p:sp>
+      <p:sp>
+        <p:nvSpPr>
+          <p:cNvPr id="16" name="Rectangle 15"/>
           <p:cNvSpPr/>
           <p:nvPr/>
         </p:nvSpPr>
         <p:spPr>
           <a:xfrm>
-            <a:off x="777240" y="4663440"/>
+            <a:off x="777240" y="4151376"/>
             <a:ext cx="10637215" cy="8572"/>
           </a:xfrm>
           <a:prstGeom prst="rect">
@@ -25527,14 +25360,14 @@
       </p:sp>
       <p:sp>
         <p:nvSpPr>
-          <p:cNvPr id="21" name="TextBox 20"/>
-          <p:cNvSpPr txBox="1"/>
-          <p:nvPr/>
-        </p:nvSpPr>
-        <p:spPr>
-          <a:xfrm>
-            <a:off x="777240" y="4846319"/>
-            <a:ext cx="365760" cy="365760"/>
+          <p:cNvPr id="17" name="TextBox 16"/>
+          <p:cNvSpPr txBox="1"/>
+          <p:nvPr/>
+        </p:nvSpPr>
+        <p:spPr>
+          <a:xfrm>
+            <a:off x="777240" y="4279392"/>
+            <a:ext cx="3657600" cy="310896"/>
           </a:xfrm>
           <a:prstGeom prst="rect">
             <a:avLst/>
@@ -25556,110 +25389,68 @@
               </a:spcAft>
             </a:pPr>
             <a:r>
-              <a:rPr sz="2000" b="1" i="0">
-                <a:solidFill>
-                  <a:srgbClr val="1F3A34"/>
+              <a:rPr sz="1550" b="1" i="0">
+                <a:solidFill>
+                  <a:srgbClr val="101418"/>
                 </a:solidFill>
                 <a:latin typeface="Cambria"/>
               </a:rPr>
-              <a:t>4</a:t>
-            </a:r>
-          </a:p>
-        </p:txBody>
-      </p:sp>
-      <p:sp>
-        <p:nvSpPr>
-          <p:cNvPr id="22" name="TextBox 21"/>
-          <p:cNvSpPr txBox="1"/>
-          <p:nvPr/>
-        </p:nvSpPr>
-        <p:spPr>
-          <a:xfrm>
-            <a:off x="1280160" y="4828031"/>
-            <a:ext cx="4114800" cy="640080"/>
-          </a:xfrm>
-          <a:prstGeom prst="rect">
-            <a:avLst/>
-          </a:prstGeom>
-          <a:noFill/>
-        </p:spPr>
-        <p:txBody>
-          <a:bodyPr wrap="square" anchor="t" lIns="0" rIns="0" tIns="0" bIns="0">
-            <a:spAutoFit/>
-          </a:bodyPr>
-          <a:lstStyle/>
-          <a:p>
-            <a:pPr algn="l">
-              <a:lnSpc>
-                <a:spcPct val="122000"/>
-              </a:lnSpc>
-              <a:spcAft>
-                <a:spcPts val="0"/>
-              </a:spcAft>
-            </a:pPr>
-            <a:r>
-              <a:rPr sz="1550" b="1" i="0">
-                <a:solidFill>
-                  <a:srgbClr val="101418"/>
-                </a:solidFill>
-                <a:latin typeface="Calibri"/>
-              </a:rPr>
-              <a:t>Show somebody the gap.</a:t>
-            </a:r>
-          </a:p>
-        </p:txBody>
-      </p:sp>
-      <p:sp>
-        <p:nvSpPr>
-          <p:cNvPr id="23" name="TextBox 22"/>
-          <p:cNvSpPr txBox="1"/>
-          <p:nvPr/>
-        </p:nvSpPr>
-        <p:spPr>
-          <a:xfrm>
-            <a:off x="5394960" y="4828031"/>
-            <a:ext cx="6007608" cy="640080"/>
-          </a:xfrm>
-          <a:prstGeom prst="rect">
-            <a:avLst/>
-          </a:prstGeom>
-          <a:noFill/>
-        </p:spPr>
-        <p:txBody>
-          <a:bodyPr wrap="square" anchor="t" lIns="0" rIns="0" tIns="0" bIns="0">
-            <a:spAutoFit/>
-          </a:bodyPr>
-          <a:lstStyle/>
-          <a:p>
-            <a:pPr algn="l">
-              <a:lnSpc>
-                <a:spcPct val="130000"/>
-              </a:lnSpc>
-              <a:spcAft>
-                <a:spcPts val="0"/>
-              </a:spcAft>
-            </a:pPr>
-            <a:r>
-              <a:rPr sz="1350" b="0" i="0">
+              <a:t>Capacity that grows without hiring.</a:t>
+            </a:r>
+          </a:p>
+        </p:txBody>
+      </p:sp>
+      <p:sp>
+        <p:nvSpPr>
+          <p:cNvPr id="18" name="TextBox 17"/>
+          <p:cNvSpPr txBox="1"/>
+          <p:nvPr/>
+        </p:nvSpPr>
+        <p:spPr>
+          <a:xfrm>
+            <a:off x="4709159" y="4279392"/>
+            <a:ext cx="6705295" cy="786384"/>
+          </a:xfrm>
+          <a:prstGeom prst="rect">
+            <a:avLst/>
+          </a:prstGeom>
+          <a:noFill/>
+        </p:spPr>
+        <p:txBody>
+          <a:bodyPr wrap="square" anchor="t" lIns="0" rIns="0" tIns="0" bIns="0">
+            <a:spAutoFit/>
+          </a:bodyPr>
+          <a:lstStyle/>
+          <a:p>
+            <a:pPr algn="l">
+              <a:lnSpc>
+                <a:spcPct val="132000"/>
+              </a:lnSpc>
+              <a:spcAft>
+                <a:spcPts val="0"/>
+              </a:spcAft>
+            </a:pPr>
+            <a:r>
+              <a:rPr sz="1250" b="0" i="0">
                 <a:solidFill>
                   <a:srgbClr val="2A333B"/>
                 </a:solidFill>
                 <a:latin typeface="Calibri"/>
               </a:rPr>
-              <a:t>Not a programme, not a policy. One number, one conversation.</a:t>
-            </a:r>
-          </a:p>
-        </p:txBody>
-      </p:sp>
-      <p:sp>
-        <p:nvSpPr>
-          <p:cNvPr id="24" name="Rectangle 23"/>
+              <a:t>A calibrated verifier agent cuts the cost of checking, so the budget rises on the same headcount. In the example it roughly triples the machine-checkable budget.</a:t>
+            </a:r>
+          </a:p>
+        </p:txBody>
+      </p:sp>
+      <p:sp>
+        <p:nvSpPr>
+          <p:cNvPr id="19" name="Rectangle 18"/>
           <p:cNvSpPr/>
           <p:nvPr/>
         </p:nvSpPr>
         <p:spPr>
           <a:xfrm>
-            <a:off x="777240" y="5522975"/>
+            <a:off x="777240" y="5120640"/>
             <a:ext cx="10637215" cy="8572"/>
           </a:xfrm>
           <a:prstGeom prst="rect">
@@ -25697,42 +25488,176 @@
       </p:sp>
       <p:sp>
         <p:nvSpPr>
-          <p:cNvPr id="25" name="TextBox 24"/>
-          <p:cNvSpPr txBox="1"/>
-          <p:nvPr/>
-        </p:nvSpPr>
-        <p:spPr>
-          <a:xfrm>
-            <a:off x="777240" y="5541264"/>
-            <a:ext cx="10424160" cy="566928"/>
-          </a:xfrm>
-          <a:prstGeom prst="rect">
-            <a:avLst/>
-          </a:prstGeom>
-          <a:noFill/>
-        </p:spPr>
-        <p:txBody>
-          <a:bodyPr wrap="square" anchor="t" lIns="0" rIns="0" tIns="0" bIns="0">
-            <a:spAutoFit/>
-          </a:bodyPr>
-          <a:lstStyle/>
-          <a:p>
-            <a:pPr algn="l">
-              <a:lnSpc>
-                <a:spcPct val="130000"/>
-              </a:lnSpc>
-              <a:spcAft>
-                <a:spcPts val="0"/>
-              </a:spcAft>
-            </a:pPr>
-            <a:r>
-              <a:rPr sz="1300" b="0" i="1">
-                <a:solidFill>
-                  <a:srgbClr val="6B7780"/>
-                </a:solidFill>
-                <a:latin typeface="Calibri"/>
-              </a:rPr>
-              <a:t>Under 1.0 and you have headroom, so deploy more. Over, and you now know something you did not know this morning. That is the entire first stage.</a:t>
+          <p:cNvPr id="20" name="TextBox 19"/>
+          <p:cNvSpPr txBox="1"/>
+          <p:nvPr/>
+        </p:nvSpPr>
+        <p:spPr>
+          <a:xfrm>
+            <a:off x="777240" y="5248655"/>
+            <a:ext cx="3657600" cy="310896"/>
+          </a:xfrm>
+          <a:prstGeom prst="rect">
+            <a:avLst/>
+          </a:prstGeom>
+          <a:noFill/>
+        </p:spPr>
+        <p:txBody>
+          <a:bodyPr wrap="square" anchor="t" lIns="0" rIns="0" tIns="0" bIns="0">
+            <a:spAutoFit/>
+          </a:bodyPr>
+          <a:lstStyle/>
+          <a:p>
+            <a:pPr algn="l">
+              <a:lnSpc>
+                <a:spcPct val="125000"/>
+              </a:lnSpc>
+              <a:spcAft>
+                <a:spcPts val="0"/>
+              </a:spcAft>
+            </a:pPr>
+            <a:r>
+              <a:rPr sz="1550" b="1" i="0">
+                <a:solidFill>
+                  <a:srgbClr val="101418"/>
+                </a:solidFill>
+                <a:latin typeface="Cambria"/>
+              </a:rPr>
+              <a:t>Failures you find before your customer does.</a:t>
+            </a:r>
+          </a:p>
+        </p:txBody>
+      </p:sp>
+      <p:sp>
+        <p:nvSpPr>
+          <p:cNvPr id="21" name="TextBox 20"/>
+          <p:cNvSpPr txBox="1"/>
+          <p:nvPr/>
+        </p:nvSpPr>
+        <p:spPr>
+          <a:xfrm>
+            <a:off x="4709159" y="5248655"/>
+            <a:ext cx="6705295" cy="786384"/>
+          </a:xfrm>
+          <a:prstGeom prst="rect">
+            <a:avLst/>
+          </a:prstGeom>
+          <a:noFill/>
+        </p:spPr>
+        <p:txBody>
+          <a:bodyPr wrap="square" anchor="t" lIns="0" rIns="0" tIns="0" bIns="0">
+            <a:spAutoFit/>
+          </a:bodyPr>
+          <a:lstStyle/>
+          <a:p>
+            <a:pPr algn="l">
+              <a:lnSpc>
+                <a:spcPct val="132000"/>
+              </a:lnSpc>
+              <a:spcAft>
+                <a:spcPts val="0"/>
+              </a:spcAft>
+            </a:pPr>
+            <a:r>
+              <a:rPr sz="1250" b="0" i="0">
+                <a:solidFill>
+                  <a:srgbClr val="2A333B"/>
+                </a:solidFill>
+                <a:latin typeface="Calibri"/>
+              </a:rPr>
+              <a:t>Drift arrives as a rising number weeks before it arrives as an incident. Every other dashboard in the room was green the whole time.</a:t>
+            </a:r>
+          </a:p>
+        </p:txBody>
+      </p:sp>
+      <p:sp>
+        <p:nvSpPr>
+          <p:cNvPr id="22" name="Rectangle 21"/>
+          <p:cNvSpPr/>
+          <p:nvPr/>
+        </p:nvSpPr>
+        <p:spPr>
+          <a:xfrm>
+            <a:off x="777240" y="6089904"/>
+            <a:ext cx="10637215" cy="13335"/>
+          </a:xfrm>
+          <a:prstGeom prst="rect">
+            <a:avLst/>
+          </a:prstGeom>
+          <a:solidFill>
+            <a:srgbClr val="101418"/>
+          </a:solidFill>
+          <a:ln>
+            <a:noFill/>
+          </a:ln>
+          <a:effectLst/>
+        </p:spPr>
+        <p:style>
+          <a:lnRef idx="1">
+            <a:schemeClr val="accent1"/>
+          </a:lnRef>
+          <a:fillRef idx="3">
+            <a:schemeClr val="accent1"/>
+          </a:fillRef>
+          <a:effectRef idx="2">
+            <a:schemeClr val="accent1"/>
+          </a:effectRef>
+          <a:fontRef idx="minor">
+            <a:schemeClr val="lt1"/>
+          </a:fontRef>
+        </p:style>
+        <p:txBody>
+          <a:bodyPr rtlCol="0" anchor="ctr"/>
+          <a:lstStyle/>
+          <a:p>
+            <a:pPr algn="ctr"/>
+          </a:p>
+        </p:txBody>
+      </p:sp>
+      <p:sp>
+        <p:nvSpPr>
+          <p:cNvPr id="23" name="TextBox 22"/>
+          <p:cNvSpPr txBox="1"/>
+          <p:nvPr/>
+        </p:nvSpPr>
+        <p:spPr>
+          <a:xfrm>
+            <a:off x="777240" y="6254496"/>
+            <a:ext cx="10637215" cy="457200"/>
+          </a:xfrm>
+          <a:prstGeom prst="rect">
+            <a:avLst/>
+          </a:prstGeom>
+          <a:noFill/>
+        </p:spPr>
+        <p:txBody>
+          <a:bodyPr wrap="square" lIns="0" rIns="0" tIns="0" bIns="0">
+            <a:spAutoFit/>
+          </a:bodyPr>
+          <a:lstStyle/>
+          <a:p>
+            <a:pPr>
+              <a:lnSpc>
+                <a:spcPct val="125000"/>
+              </a:lnSpc>
+            </a:pPr>
+            <a:r>
+              <a:rPr sz="1500" b="0" i="0">
+                <a:solidFill>
+                  <a:srgbClr val="2A333B"/>
+                </a:solidFill>
+                <a:latin typeface="Cambria"/>
+              </a:rPr>
+              <a:t>The teams that scale autonomy fastest are not the ones with the best models. </a:t>
+            </a:r>
+            <a:r>
+              <a:rPr sz="1500" b="1" i="0">
+                <a:solidFill>
+                  <a:srgbClr val="101418"/>
+                </a:solidFill>
+                <a:latin typeface="Cambria"/>
+              </a:rPr>
+              <a:t>They are the ones who made checking cheap.</a:t>
             </a:r>
           </a:p>
         </p:txBody>
@@ -25746,6 +25671,1034 @@
 </file>
 
 <file path=ppt/slides/slide27.xml><?xml version="1.0" encoding="utf-8"?>
+<p:sld xmlns:a="http://schemas.openxmlformats.org/drawingml/2006/main" xmlns:p="http://schemas.openxmlformats.org/presentationml/2006/main" xmlns:r="http://schemas.openxmlformats.org/officeDocument/2006/relationships">
+  <p:cSld>
+    <p:bg>
+      <p:bgPr>
+        <a:solidFill>
+          <a:srgbClr val="FFFFFF"/>
+        </a:solidFill>
+        <a:effectLst/>
+      </p:bgPr>
+    </p:bg>
+    <p:spTree>
+      <p:nvGrpSpPr>
+        <p:cNvPr id="1" name=""/>
+        <p:cNvGrpSpPr/>
+        <p:nvPr/>
+      </p:nvGrpSpPr>
+      <p:grpSpPr/>
+      <p:sp>
+        <p:nvSpPr>
+          <p:cNvPr id="2" name="TextBox 1"/>
+          <p:cNvSpPr txBox="1"/>
+          <p:nvPr/>
+        </p:nvSpPr>
+        <p:spPr>
+          <a:xfrm>
+            <a:off x="777240" y="475488"/>
+            <a:ext cx="10637215" cy="256032"/>
+          </a:xfrm>
+          <a:prstGeom prst="rect">
+            <a:avLst/>
+          </a:prstGeom>
+          <a:noFill/>
+        </p:spPr>
+        <p:txBody>
+          <a:bodyPr wrap="square" anchor="t" lIns="0" rIns="0" tIns="0" bIns="0">
+            <a:spAutoFit/>
+          </a:bodyPr>
+          <a:lstStyle/>
+          <a:p>
+            <a:pPr algn="l">
+              <a:lnSpc>
+                <a:spcPct val="125000"/>
+              </a:lnSpc>
+              <a:spcAft>
+                <a:spcPts val="0"/>
+              </a:spcAft>
+            </a:pPr>
+            <a:r>
+              <a:rPr sz="1000" b="1" i="0">
+                <a:solidFill>
+                  <a:srgbClr val="6B7780"/>
+                </a:solidFill>
+                <a:latin typeface="Calibri"/>
+              </a:rPr>
+              <a:t>WHAT TO DO</a:t>
+            </a:r>
+          </a:p>
+        </p:txBody>
+      </p:sp>
+      <p:sp>
+        <p:nvSpPr>
+          <p:cNvPr id="3" name="Rectangle 2"/>
+          <p:cNvSpPr/>
+          <p:nvPr/>
+        </p:nvSpPr>
+        <p:spPr>
+          <a:xfrm>
+            <a:off x="777240" y="786384"/>
+            <a:ext cx="10637215" cy="8572"/>
+          </a:xfrm>
+          <a:prstGeom prst="rect">
+            <a:avLst/>
+          </a:prstGeom>
+          <a:solidFill>
+            <a:srgbClr val="D8D4CB"/>
+          </a:solidFill>
+          <a:ln>
+            <a:noFill/>
+          </a:ln>
+          <a:effectLst/>
+        </p:spPr>
+        <p:style>
+          <a:lnRef idx="1">
+            <a:schemeClr val="accent1"/>
+          </a:lnRef>
+          <a:fillRef idx="3">
+            <a:schemeClr val="accent1"/>
+          </a:fillRef>
+          <a:effectRef idx="2">
+            <a:schemeClr val="accent1"/>
+          </a:effectRef>
+          <a:fontRef idx="minor">
+            <a:schemeClr val="lt1"/>
+          </a:fontRef>
+        </p:style>
+        <p:txBody>
+          <a:bodyPr rtlCol="0" anchor="ctr"/>
+          <a:lstStyle/>
+          <a:p>
+            <a:pPr algn="ctr"/>
+          </a:p>
+        </p:txBody>
+      </p:sp>
+      <p:sp>
+        <p:nvSpPr>
+          <p:cNvPr id="4" name="Rectangle 3"/>
+          <p:cNvSpPr/>
+          <p:nvPr/>
+        </p:nvSpPr>
+        <p:spPr>
+          <a:xfrm>
+            <a:off x="777240" y="6199632"/>
+            <a:ext cx="10637215" cy="8572"/>
+          </a:xfrm>
+          <a:prstGeom prst="rect">
+            <a:avLst/>
+          </a:prstGeom>
+          <a:solidFill>
+            <a:srgbClr val="D8D4CB"/>
+          </a:solidFill>
+          <a:ln>
+            <a:noFill/>
+          </a:ln>
+          <a:effectLst/>
+        </p:spPr>
+        <p:style>
+          <a:lnRef idx="1">
+            <a:schemeClr val="accent1"/>
+          </a:lnRef>
+          <a:fillRef idx="3">
+            <a:schemeClr val="accent1"/>
+          </a:fillRef>
+          <a:effectRef idx="2">
+            <a:schemeClr val="accent1"/>
+          </a:effectRef>
+          <a:fontRef idx="minor">
+            <a:schemeClr val="lt1"/>
+          </a:fontRef>
+        </p:style>
+        <p:txBody>
+          <a:bodyPr rtlCol="0" anchor="ctr"/>
+          <a:lstStyle/>
+          <a:p>
+            <a:pPr algn="ctr"/>
+          </a:p>
+        </p:txBody>
+      </p:sp>
+      <p:sp>
+        <p:nvSpPr>
+          <p:cNvPr id="5" name="TextBox 4"/>
+          <p:cNvSpPr txBox="1"/>
+          <p:nvPr/>
+        </p:nvSpPr>
+        <p:spPr>
+          <a:xfrm>
+            <a:off x="777240" y="6309360"/>
+            <a:ext cx="7680960" cy="237744"/>
+          </a:xfrm>
+          <a:prstGeom prst="rect">
+            <a:avLst/>
+          </a:prstGeom>
+          <a:noFill/>
+        </p:spPr>
+        <p:txBody>
+          <a:bodyPr wrap="square" anchor="t" lIns="0" rIns="0" tIns="0" bIns="0">
+            <a:spAutoFit/>
+          </a:bodyPr>
+          <a:lstStyle/>
+          <a:p>
+            <a:pPr algn="l">
+              <a:lnSpc>
+                <a:spcPct val="125000"/>
+              </a:lnSpc>
+              <a:spcAft>
+                <a:spcPts val="0"/>
+              </a:spcAft>
+            </a:pPr>
+            <a:r>
+              <a:rPr sz="900" b="0" i="0">
+                <a:solidFill>
+                  <a:srgbClr val="6B7780"/>
+                </a:solidFill>
+                <a:latin typeface="Calibri"/>
+              </a:rPr>
+              <a:t>github.com/hotragn/verb     x.com/hotragn     linkedin.com/in/hotragn-pettugani</a:t>
+            </a:r>
+          </a:p>
+        </p:txBody>
+      </p:sp>
+      <p:sp>
+        <p:nvSpPr>
+          <p:cNvPr id="6" name="TextBox 5"/>
+          <p:cNvSpPr txBox="1"/>
+          <p:nvPr/>
+        </p:nvSpPr>
+        <p:spPr>
+          <a:xfrm>
+            <a:off x="10317175" y="6309360"/>
+            <a:ext cx="1097280" cy="237744"/>
+          </a:xfrm>
+          <a:prstGeom prst="rect">
+            <a:avLst/>
+          </a:prstGeom>
+          <a:noFill/>
+        </p:spPr>
+        <p:txBody>
+          <a:bodyPr wrap="square" anchor="t" lIns="0" rIns="0" tIns="0" bIns="0">
+            <a:spAutoFit/>
+          </a:bodyPr>
+          <a:lstStyle/>
+          <a:p>
+            <a:pPr algn="r">
+              <a:lnSpc>
+                <a:spcPct val="125000"/>
+              </a:lnSpc>
+              <a:spcAft>
+                <a:spcPts val="0"/>
+              </a:spcAft>
+            </a:pPr>
+            <a:r>
+              <a:rPr sz="900" b="0" i="0">
+                <a:solidFill>
+                  <a:srgbClr val="6B7780"/>
+                </a:solidFill>
+                <a:latin typeface="Calibri"/>
+              </a:rPr>
+              <a:t>27 / 28</a:t>
+            </a:r>
+          </a:p>
+        </p:txBody>
+      </p:sp>
+      <p:pic>
+        <p:nvPicPr>
+          <p:cNvPr id="7" name="Picture 6" descr="GSDC Logo.png"/>
+          <p:cNvPicPr>
+            <a:picLocks noChangeAspect="1"/>
+          </p:cNvPicPr>
+          <p:nvPr/>
+        </p:nvPicPr>
+        <p:blipFill>
+          <a:blip r:embed="rId2"/>
+          <a:stretch>
+            <a:fillRect/>
+          </a:stretch>
+        </p:blipFill>
+        <p:spPr>
+          <a:xfrm>
+            <a:off x="10286695" y="310896"/>
+            <a:ext cx="1127760" cy="365760"/>
+          </a:xfrm>
+          <a:prstGeom prst="rect">
+            <a:avLst/>
+          </a:prstGeom>
+        </p:spPr>
+      </p:pic>
+      <p:sp>
+        <p:nvSpPr>
+          <p:cNvPr id="8" name="TextBox 7"/>
+          <p:cNvSpPr txBox="1"/>
+          <p:nvPr/>
+        </p:nvSpPr>
+        <p:spPr>
+          <a:xfrm>
+            <a:off x="777240" y="932688"/>
+            <a:ext cx="9509760" cy="1133856"/>
+          </a:xfrm>
+          <a:prstGeom prst="rect">
+            <a:avLst/>
+          </a:prstGeom>
+          <a:noFill/>
+        </p:spPr>
+        <p:txBody>
+          <a:bodyPr wrap="square" anchor="t" lIns="0" rIns="0" tIns="0" bIns="0">
+            <a:spAutoFit/>
+          </a:bodyPr>
+          <a:lstStyle/>
+          <a:p>
+            <a:pPr algn="l">
+              <a:lnSpc>
+                <a:spcPct val="106000"/>
+              </a:lnSpc>
+              <a:spcAft>
+                <a:spcPts val="0"/>
+              </a:spcAft>
+            </a:pPr>
+            <a:r>
+              <a:rPr sz="3300" b="1" i="0">
+                <a:solidFill>
+                  <a:srgbClr val="101418"/>
+                </a:solidFill>
+                <a:latin typeface="Cambria"/>
+              </a:rPr>
+              <a:t>Four things you can do on Monday.</a:t>
+            </a:r>
+          </a:p>
+        </p:txBody>
+      </p:sp>
+      <p:sp>
+        <p:nvSpPr>
+          <p:cNvPr id="9" name="TextBox 8"/>
+          <p:cNvSpPr txBox="1"/>
+          <p:nvPr/>
+        </p:nvSpPr>
+        <p:spPr>
+          <a:xfrm>
+            <a:off x="777240" y="2267712"/>
+            <a:ext cx="365760" cy="365760"/>
+          </a:xfrm>
+          <a:prstGeom prst="rect">
+            <a:avLst/>
+          </a:prstGeom>
+          <a:noFill/>
+        </p:spPr>
+        <p:txBody>
+          <a:bodyPr wrap="square" anchor="t" lIns="0" rIns="0" tIns="0" bIns="0">
+            <a:spAutoFit/>
+          </a:bodyPr>
+          <a:lstStyle/>
+          <a:p>
+            <a:pPr algn="l">
+              <a:lnSpc>
+                <a:spcPct val="125000"/>
+              </a:lnSpc>
+              <a:spcAft>
+                <a:spcPts val="0"/>
+              </a:spcAft>
+            </a:pPr>
+            <a:r>
+              <a:rPr sz="2000" b="1" i="0">
+                <a:solidFill>
+                  <a:srgbClr val="1F3A34"/>
+                </a:solidFill>
+                <a:latin typeface="Cambria"/>
+              </a:rPr>
+              <a:t>1</a:t>
+            </a:r>
+          </a:p>
+        </p:txBody>
+      </p:sp>
+      <p:sp>
+        <p:nvSpPr>
+          <p:cNvPr id="10" name="TextBox 9"/>
+          <p:cNvSpPr txBox="1"/>
+          <p:nvPr/>
+        </p:nvSpPr>
+        <p:spPr>
+          <a:xfrm>
+            <a:off x="1280160" y="2249424"/>
+            <a:ext cx="4114800" cy="640080"/>
+          </a:xfrm>
+          <a:prstGeom prst="rect">
+            <a:avLst/>
+          </a:prstGeom>
+          <a:noFill/>
+        </p:spPr>
+        <p:txBody>
+          <a:bodyPr wrap="square" anchor="t" lIns="0" rIns="0" tIns="0" bIns="0">
+            <a:spAutoFit/>
+          </a:bodyPr>
+          <a:lstStyle/>
+          <a:p>
+            <a:pPr algn="l">
+              <a:lnSpc>
+                <a:spcPct val="122000"/>
+              </a:lnSpc>
+              <a:spcAft>
+                <a:spcPts val="0"/>
+              </a:spcAft>
+            </a:pPr>
+            <a:r>
+              <a:rPr sz="1550" b="1" i="0">
+                <a:solidFill>
+                  <a:srgbClr val="101418"/>
+                </a:solidFill>
+                <a:latin typeface="Calibri"/>
+              </a:rPr>
+              <a:t>Pick one decision type an agent already touches.</a:t>
+            </a:r>
+          </a:p>
+        </p:txBody>
+      </p:sp>
+      <p:sp>
+        <p:nvSpPr>
+          <p:cNvPr id="11" name="TextBox 10"/>
+          <p:cNvSpPr txBox="1"/>
+          <p:nvPr/>
+        </p:nvSpPr>
+        <p:spPr>
+          <a:xfrm>
+            <a:off x="5394960" y="2249424"/>
+            <a:ext cx="6007608" cy="640080"/>
+          </a:xfrm>
+          <a:prstGeom prst="rect">
+            <a:avLst/>
+          </a:prstGeom>
+          <a:noFill/>
+        </p:spPr>
+        <p:txBody>
+          <a:bodyPr wrap="square" anchor="t" lIns="0" rIns="0" tIns="0" bIns="0">
+            <a:spAutoFit/>
+          </a:bodyPr>
+          <a:lstStyle/>
+          <a:p>
+            <a:pPr algn="l">
+              <a:lnSpc>
+                <a:spcPct val="130000"/>
+              </a:lnSpc>
+              <a:spcAft>
+                <a:spcPts val="0"/>
+              </a:spcAft>
+            </a:pPr>
+            <a:r>
+              <a:rPr sz="1350" b="0" i="0">
+                <a:solidFill>
+                  <a:srgbClr val="2A333B"/>
+                </a:solidFill>
+                <a:latin typeface="Calibri"/>
+              </a:rPr>
+              <a:t>One. Not a programme.</a:t>
+            </a:r>
+          </a:p>
+        </p:txBody>
+      </p:sp>
+      <p:sp>
+        <p:nvSpPr>
+          <p:cNvPr id="12" name="Rectangle 11"/>
+          <p:cNvSpPr/>
+          <p:nvPr/>
+        </p:nvSpPr>
+        <p:spPr>
+          <a:xfrm>
+            <a:off x="777240" y="2944368"/>
+            <a:ext cx="10637215" cy="8572"/>
+          </a:xfrm>
+          <a:prstGeom prst="rect">
+            <a:avLst/>
+          </a:prstGeom>
+          <a:solidFill>
+            <a:srgbClr val="D8D4CB"/>
+          </a:solidFill>
+          <a:ln>
+            <a:noFill/>
+          </a:ln>
+          <a:effectLst/>
+        </p:spPr>
+        <p:style>
+          <a:lnRef idx="1">
+            <a:schemeClr val="accent1"/>
+          </a:lnRef>
+          <a:fillRef idx="3">
+            <a:schemeClr val="accent1"/>
+          </a:fillRef>
+          <a:effectRef idx="2">
+            <a:schemeClr val="accent1"/>
+          </a:effectRef>
+          <a:fontRef idx="minor">
+            <a:schemeClr val="lt1"/>
+          </a:fontRef>
+        </p:style>
+        <p:txBody>
+          <a:bodyPr rtlCol="0" anchor="ctr"/>
+          <a:lstStyle/>
+          <a:p>
+            <a:pPr algn="ctr"/>
+          </a:p>
+        </p:txBody>
+      </p:sp>
+      <p:sp>
+        <p:nvSpPr>
+          <p:cNvPr id="13" name="TextBox 12"/>
+          <p:cNvSpPr txBox="1"/>
+          <p:nvPr/>
+        </p:nvSpPr>
+        <p:spPr>
+          <a:xfrm>
+            <a:off x="777240" y="3127248"/>
+            <a:ext cx="365760" cy="365760"/>
+          </a:xfrm>
+          <a:prstGeom prst="rect">
+            <a:avLst/>
+          </a:prstGeom>
+          <a:noFill/>
+        </p:spPr>
+        <p:txBody>
+          <a:bodyPr wrap="square" anchor="t" lIns="0" rIns="0" tIns="0" bIns="0">
+            <a:spAutoFit/>
+          </a:bodyPr>
+          <a:lstStyle/>
+          <a:p>
+            <a:pPr algn="l">
+              <a:lnSpc>
+                <a:spcPct val="125000"/>
+              </a:lnSpc>
+              <a:spcAft>
+                <a:spcPts val="0"/>
+              </a:spcAft>
+            </a:pPr>
+            <a:r>
+              <a:rPr sz="2000" b="1" i="0">
+                <a:solidFill>
+                  <a:srgbClr val="1F3A34"/>
+                </a:solidFill>
+                <a:latin typeface="Cambria"/>
+              </a:rPr>
+              <a:t>2</a:t>
+            </a:r>
+          </a:p>
+        </p:txBody>
+      </p:sp>
+      <p:sp>
+        <p:nvSpPr>
+          <p:cNvPr id="14" name="TextBox 13"/>
+          <p:cNvSpPr txBox="1"/>
+          <p:nvPr/>
+        </p:nvSpPr>
+        <p:spPr>
+          <a:xfrm>
+            <a:off x="1280160" y="3108960"/>
+            <a:ext cx="4114800" cy="640080"/>
+          </a:xfrm>
+          <a:prstGeom prst="rect">
+            <a:avLst/>
+          </a:prstGeom>
+          <a:noFill/>
+        </p:spPr>
+        <p:txBody>
+          <a:bodyPr wrap="square" anchor="t" lIns="0" rIns="0" tIns="0" bIns="0">
+            <a:spAutoFit/>
+          </a:bodyPr>
+          <a:lstStyle/>
+          <a:p>
+            <a:pPr algn="l">
+              <a:lnSpc>
+                <a:spcPct val="122000"/>
+              </a:lnSpc>
+              <a:spcAft>
+                <a:spcPts val="0"/>
+              </a:spcAft>
+            </a:pPr>
+            <a:r>
+              <a:rPr sz="1550" b="1" i="0">
+                <a:solidFill>
+                  <a:srgbClr val="101418"/>
+                </a:solidFill>
+                <a:latin typeface="Calibri"/>
+              </a:rPr>
+              <a:t>Time thirty reviews of it.</a:t>
+            </a:r>
+          </a:p>
+        </p:txBody>
+      </p:sp>
+      <p:sp>
+        <p:nvSpPr>
+          <p:cNvPr id="15" name="TextBox 14"/>
+          <p:cNvSpPr txBox="1"/>
+          <p:nvPr/>
+        </p:nvSpPr>
+        <p:spPr>
+          <a:xfrm>
+            <a:off x="5394960" y="3108960"/>
+            <a:ext cx="6007608" cy="640080"/>
+          </a:xfrm>
+          <a:prstGeom prst="rect">
+            <a:avLst/>
+          </a:prstGeom>
+          <a:noFill/>
+        </p:spPr>
+        <p:txBody>
+          <a:bodyPr wrap="square" anchor="t" lIns="0" rIns="0" tIns="0" bIns="0">
+            <a:spAutoFit/>
+          </a:bodyPr>
+          <a:lstStyle/>
+          <a:p>
+            <a:pPr algn="l">
+              <a:lnSpc>
+                <a:spcPct val="130000"/>
+              </a:lnSpc>
+              <a:spcAft>
+                <a:spcPts val="0"/>
+              </a:spcAft>
+            </a:pPr>
+            <a:r>
+              <a:rPr sz="1350" b="0" i="0">
+                <a:solidFill>
+                  <a:srgbClr val="2A333B"/>
+                </a:solidFill>
+                <a:latin typeface="Calibri"/>
+              </a:rPr>
+              <a:t>Then ask each reviewer whether they genuinely checked, and discard the ones who say no. That last step is the whole thing.</a:t>
+            </a:r>
+          </a:p>
+        </p:txBody>
+      </p:sp>
+      <p:sp>
+        <p:nvSpPr>
+          <p:cNvPr id="16" name="Rectangle 15"/>
+          <p:cNvSpPr/>
+          <p:nvPr/>
+        </p:nvSpPr>
+        <p:spPr>
+          <a:xfrm>
+            <a:off x="777240" y="3803904"/>
+            <a:ext cx="10637215" cy="8572"/>
+          </a:xfrm>
+          <a:prstGeom prst="rect">
+            <a:avLst/>
+          </a:prstGeom>
+          <a:solidFill>
+            <a:srgbClr val="D8D4CB"/>
+          </a:solidFill>
+          <a:ln>
+            <a:noFill/>
+          </a:ln>
+          <a:effectLst/>
+        </p:spPr>
+        <p:style>
+          <a:lnRef idx="1">
+            <a:schemeClr val="accent1"/>
+          </a:lnRef>
+          <a:fillRef idx="3">
+            <a:schemeClr val="accent1"/>
+          </a:fillRef>
+          <a:effectRef idx="2">
+            <a:schemeClr val="accent1"/>
+          </a:effectRef>
+          <a:fontRef idx="minor">
+            <a:schemeClr val="lt1"/>
+          </a:fontRef>
+        </p:style>
+        <p:txBody>
+          <a:bodyPr rtlCol="0" anchor="ctr"/>
+          <a:lstStyle/>
+          <a:p>
+            <a:pPr algn="ctr"/>
+          </a:p>
+        </p:txBody>
+      </p:sp>
+      <p:sp>
+        <p:nvSpPr>
+          <p:cNvPr id="17" name="TextBox 16"/>
+          <p:cNvSpPr txBox="1"/>
+          <p:nvPr/>
+        </p:nvSpPr>
+        <p:spPr>
+          <a:xfrm>
+            <a:off x="777240" y="3986783"/>
+            <a:ext cx="365760" cy="365760"/>
+          </a:xfrm>
+          <a:prstGeom prst="rect">
+            <a:avLst/>
+          </a:prstGeom>
+          <a:noFill/>
+        </p:spPr>
+        <p:txBody>
+          <a:bodyPr wrap="square" anchor="t" lIns="0" rIns="0" tIns="0" bIns="0">
+            <a:spAutoFit/>
+          </a:bodyPr>
+          <a:lstStyle/>
+          <a:p>
+            <a:pPr algn="l">
+              <a:lnSpc>
+                <a:spcPct val="125000"/>
+              </a:lnSpc>
+              <a:spcAft>
+                <a:spcPts val="0"/>
+              </a:spcAft>
+            </a:pPr>
+            <a:r>
+              <a:rPr sz="2000" b="1" i="0">
+                <a:solidFill>
+                  <a:srgbClr val="1F3A34"/>
+                </a:solidFill>
+                <a:latin typeface="Cambria"/>
+              </a:rPr>
+              <a:t>3</a:t>
+            </a:r>
+          </a:p>
+        </p:txBody>
+      </p:sp>
+      <p:sp>
+        <p:nvSpPr>
+          <p:cNvPr id="18" name="TextBox 17"/>
+          <p:cNvSpPr txBox="1"/>
+          <p:nvPr/>
+        </p:nvSpPr>
+        <p:spPr>
+          <a:xfrm>
+            <a:off x="1280160" y="3968496"/>
+            <a:ext cx="4114800" cy="640080"/>
+          </a:xfrm>
+          <a:prstGeom prst="rect">
+            <a:avLst/>
+          </a:prstGeom>
+          <a:noFill/>
+        </p:spPr>
+        <p:txBody>
+          <a:bodyPr wrap="square" anchor="t" lIns="0" rIns="0" tIns="0" bIns="0">
+            <a:spAutoFit/>
+          </a:bodyPr>
+          <a:lstStyle/>
+          <a:p>
+            <a:pPr algn="l">
+              <a:lnSpc>
+                <a:spcPct val="122000"/>
+              </a:lnSpc>
+              <a:spcAft>
+                <a:spcPts val="0"/>
+              </a:spcAft>
+            </a:pPr>
+            <a:r>
+              <a:rPr sz="1550" b="1" i="0">
+                <a:solidFill>
+                  <a:srgbClr val="101418"/>
+                </a:solidFill>
+                <a:latin typeface="Calibri"/>
+              </a:rPr>
+              <a:t>Do the division.</a:t>
+            </a:r>
+          </a:p>
+        </p:txBody>
+      </p:sp>
+      <p:sp>
+        <p:nvSpPr>
+          <p:cNvPr id="19" name="TextBox 18"/>
+          <p:cNvSpPr txBox="1"/>
+          <p:nvPr/>
+        </p:nvSpPr>
+        <p:spPr>
+          <a:xfrm>
+            <a:off x="5394960" y="3968496"/>
+            <a:ext cx="6007608" cy="640080"/>
+          </a:xfrm>
+          <a:prstGeom prst="rect">
+            <a:avLst/>
+          </a:prstGeom>
+          <a:noFill/>
+        </p:spPr>
+        <p:txBody>
+          <a:bodyPr wrap="square" anchor="t" lIns="0" rIns="0" tIns="0" bIns="0">
+            <a:spAutoFit/>
+          </a:bodyPr>
+          <a:lstStyle/>
+          <a:p>
+            <a:pPr algn="l">
+              <a:lnSpc>
+                <a:spcPct val="130000"/>
+              </a:lnSpc>
+              <a:spcAft>
+                <a:spcPts val="0"/>
+              </a:spcAft>
+            </a:pPr>
+            <a:r>
+              <a:rPr sz="1350" b="0" i="0">
+                <a:solidFill>
+                  <a:srgbClr val="2A333B"/>
+                </a:solidFill>
+                <a:latin typeface="Calibri"/>
+              </a:rPr>
+              <a:t>Four numbers into the calculator. About a minute, and it runs in your browser with nothing sent anywhere.</a:t>
+            </a:r>
+          </a:p>
+        </p:txBody>
+      </p:sp>
+      <p:sp>
+        <p:nvSpPr>
+          <p:cNvPr id="20" name="Rectangle 19"/>
+          <p:cNvSpPr/>
+          <p:nvPr/>
+        </p:nvSpPr>
+        <p:spPr>
+          <a:xfrm>
+            <a:off x="777240" y="4663440"/>
+            <a:ext cx="10637215" cy="8572"/>
+          </a:xfrm>
+          <a:prstGeom prst="rect">
+            <a:avLst/>
+          </a:prstGeom>
+          <a:solidFill>
+            <a:srgbClr val="D8D4CB"/>
+          </a:solidFill>
+          <a:ln>
+            <a:noFill/>
+          </a:ln>
+          <a:effectLst/>
+        </p:spPr>
+        <p:style>
+          <a:lnRef idx="1">
+            <a:schemeClr val="accent1"/>
+          </a:lnRef>
+          <a:fillRef idx="3">
+            <a:schemeClr val="accent1"/>
+          </a:fillRef>
+          <a:effectRef idx="2">
+            <a:schemeClr val="accent1"/>
+          </a:effectRef>
+          <a:fontRef idx="minor">
+            <a:schemeClr val="lt1"/>
+          </a:fontRef>
+        </p:style>
+        <p:txBody>
+          <a:bodyPr rtlCol="0" anchor="ctr"/>
+          <a:lstStyle/>
+          <a:p>
+            <a:pPr algn="ctr"/>
+          </a:p>
+        </p:txBody>
+      </p:sp>
+      <p:sp>
+        <p:nvSpPr>
+          <p:cNvPr id="21" name="TextBox 20"/>
+          <p:cNvSpPr txBox="1"/>
+          <p:nvPr/>
+        </p:nvSpPr>
+        <p:spPr>
+          <a:xfrm>
+            <a:off x="777240" y="4846319"/>
+            <a:ext cx="365760" cy="365760"/>
+          </a:xfrm>
+          <a:prstGeom prst="rect">
+            <a:avLst/>
+          </a:prstGeom>
+          <a:noFill/>
+        </p:spPr>
+        <p:txBody>
+          <a:bodyPr wrap="square" anchor="t" lIns="0" rIns="0" tIns="0" bIns="0">
+            <a:spAutoFit/>
+          </a:bodyPr>
+          <a:lstStyle/>
+          <a:p>
+            <a:pPr algn="l">
+              <a:lnSpc>
+                <a:spcPct val="125000"/>
+              </a:lnSpc>
+              <a:spcAft>
+                <a:spcPts val="0"/>
+              </a:spcAft>
+            </a:pPr>
+            <a:r>
+              <a:rPr sz="2000" b="1" i="0">
+                <a:solidFill>
+                  <a:srgbClr val="1F3A34"/>
+                </a:solidFill>
+                <a:latin typeface="Cambria"/>
+              </a:rPr>
+              <a:t>4</a:t>
+            </a:r>
+          </a:p>
+        </p:txBody>
+      </p:sp>
+      <p:sp>
+        <p:nvSpPr>
+          <p:cNvPr id="22" name="TextBox 21"/>
+          <p:cNvSpPr txBox="1"/>
+          <p:nvPr/>
+        </p:nvSpPr>
+        <p:spPr>
+          <a:xfrm>
+            <a:off x="1280160" y="4828031"/>
+            <a:ext cx="4114800" cy="640080"/>
+          </a:xfrm>
+          <a:prstGeom prst="rect">
+            <a:avLst/>
+          </a:prstGeom>
+          <a:noFill/>
+        </p:spPr>
+        <p:txBody>
+          <a:bodyPr wrap="square" anchor="t" lIns="0" rIns="0" tIns="0" bIns="0">
+            <a:spAutoFit/>
+          </a:bodyPr>
+          <a:lstStyle/>
+          <a:p>
+            <a:pPr algn="l">
+              <a:lnSpc>
+                <a:spcPct val="122000"/>
+              </a:lnSpc>
+              <a:spcAft>
+                <a:spcPts val="0"/>
+              </a:spcAft>
+            </a:pPr>
+            <a:r>
+              <a:rPr sz="1550" b="1" i="0">
+                <a:solidFill>
+                  <a:srgbClr val="101418"/>
+                </a:solidFill>
+                <a:latin typeface="Calibri"/>
+              </a:rPr>
+              <a:t>Show somebody the gap.</a:t>
+            </a:r>
+          </a:p>
+        </p:txBody>
+      </p:sp>
+      <p:sp>
+        <p:nvSpPr>
+          <p:cNvPr id="23" name="TextBox 22"/>
+          <p:cNvSpPr txBox="1"/>
+          <p:nvPr/>
+        </p:nvSpPr>
+        <p:spPr>
+          <a:xfrm>
+            <a:off x="5394960" y="4828031"/>
+            <a:ext cx="6007608" cy="640080"/>
+          </a:xfrm>
+          <a:prstGeom prst="rect">
+            <a:avLst/>
+          </a:prstGeom>
+          <a:noFill/>
+        </p:spPr>
+        <p:txBody>
+          <a:bodyPr wrap="square" anchor="t" lIns="0" rIns="0" tIns="0" bIns="0">
+            <a:spAutoFit/>
+          </a:bodyPr>
+          <a:lstStyle/>
+          <a:p>
+            <a:pPr algn="l">
+              <a:lnSpc>
+                <a:spcPct val="130000"/>
+              </a:lnSpc>
+              <a:spcAft>
+                <a:spcPts val="0"/>
+              </a:spcAft>
+            </a:pPr>
+            <a:r>
+              <a:rPr sz="1350" b="0" i="0">
+                <a:solidFill>
+                  <a:srgbClr val="2A333B"/>
+                </a:solidFill>
+                <a:latin typeface="Calibri"/>
+              </a:rPr>
+              <a:t>Not a programme, not a policy. One number, one conversation.</a:t>
+            </a:r>
+          </a:p>
+        </p:txBody>
+      </p:sp>
+      <p:sp>
+        <p:nvSpPr>
+          <p:cNvPr id="24" name="Rectangle 23"/>
+          <p:cNvSpPr/>
+          <p:nvPr/>
+        </p:nvSpPr>
+        <p:spPr>
+          <a:xfrm>
+            <a:off x="777240" y="5522975"/>
+            <a:ext cx="10637215" cy="8572"/>
+          </a:xfrm>
+          <a:prstGeom prst="rect">
+            <a:avLst/>
+          </a:prstGeom>
+          <a:solidFill>
+            <a:srgbClr val="D8D4CB"/>
+          </a:solidFill>
+          <a:ln>
+            <a:noFill/>
+          </a:ln>
+          <a:effectLst/>
+        </p:spPr>
+        <p:style>
+          <a:lnRef idx="1">
+            <a:schemeClr val="accent1"/>
+          </a:lnRef>
+          <a:fillRef idx="3">
+            <a:schemeClr val="accent1"/>
+          </a:fillRef>
+          <a:effectRef idx="2">
+            <a:schemeClr val="accent1"/>
+          </a:effectRef>
+          <a:fontRef idx="minor">
+            <a:schemeClr val="lt1"/>
+          </a:fontRef>
+        </p:style>
+        <p:txBody>
+          <a:bodyPr rtlCol="0" anchor="ctr"/>
+          <a:lstStyle/>
+          <a:p>
+            <a:pPr algn="ctr"/>
+          </a:p>
+        </p:txBody>
+      </p:sp>
+      <p:sp>
+        <p:nvSpPr>
+          <p:cNvPr id="25" name="TextBox 24"/>
+          <p:cNvSpPr txBox="1"/>
+          <p:nvPr/>
+        </p:nvSpPr>
+        <p:spPr>
+          <a:xfrm>
+            <a:off x="777240" y="5541264"/>
+            <a:ext cx="10424160" cy="566928"/>
+          </a:xfrm>
+          <a:prstGeom prst="rect">
+            <a:avLst/>
+          </a:prstGeom>
+          <a:noFill/>
+        </p:spPr>
+        <p:txBody>
+          <a:bodyPr wrap="square" anchor="t" lIns="0" rIns="0" tIns="0" bIns="0">
+            <a:spAutoFit/>
+          </a:bodyPr>
+          <a:lstStyle/>
+          <a:p>
+            <a:pPr algn="l">
+              <a:lnSpc>
+                <a:spcPct val="130000"/>
+              </a:lnSpc>
+              <a:spcAft>
+                <a:spcPts val="0"/>
+              </a:spcAft>
+            </a:pPr>
+            <a:r>
+              <a:rPr sz="1300" b="0" i="1">
+                <a:solidFill>
+                  <a:srgbClr val="6B7780"/>
+                </a:solidFill>
+                <a:latin typeface="Calibri"/>
+              </a:rPr>
+              <a:t>Under 1.0 and you have headroom, so deploy more. Over, and you now know something you did not know this morning. That is the entire first stage.</a:t>
+            </a:r>
+          </a:p>
+        </p:txBody>
+      </p:sp>
+    </p:spTree>
+  </p:cSld>
+  <p:clrMapOvr>
+    <a:masterClrMapping/>
+  </p:clrMapOvr>
+</p:sld>
+</file>
+
+<file path=ppt/slides/slide28.xml><?xml version="1.0" encoding="utf-8"?>
 <p:sld xmlns:a="http://schemas.openxmlformats.org/drawingml/2006/main" xmlns:p="http://schemas.openxmlformats.org/presentationml/2006/main" xmlns:r="http://schemas.openxmlformats.org/officeDocument/2006/relationships">
   <p:cSld>
     <p:bg>
@@ -25814,6 +26767,114 @@
           <p:nvPr/>
         </p:nvPicPr>
         <p:blipFill>
+          <a:blip r:embed="rId2"/>
+          <a:stretch>
+            <a:fillRect/>
+          </a:stretch>
+        </p:blipFill>
+        <p:spPr>
+          <a:xfrm>
+            <a:off x="777240" y="2487168"/>
+            <a:ext cx="1691640" cy="1691640"/>
+          </a:xfrm>
+          <a:prstGeom prst="rect">
+            <a:avLst/>
+          </a:prstGeom>
+        </p:spPr>
+      </p:pic>
+      <p:sp>
+        <p:nvSpPr>
+          <p:cNvPr id="4" name="TextBox 3"/>
+          <p:cNvSpPr txBox="1"/>
+          <p:nvPr/>
+        </p:nvSpPr>
+        <p:spPr>
+          <a:xfrm>
+            <a:off x="777240" y="4352544"/>
+            <a:ext cx="2258568" cy="256032"/>
+          </a:xfrm>
+          <a:prstGeom prst="rect">
+            <a:avLst/>
+          </a:prstGeom>
+          <a:noFill/>
+        </p:spPr>
+        <p:txBody>
+          <a:bodyPr wrap="square" anchor="t" lIns="0" rIns="0" tIns="0" bIns="0">
+            <a:spAutoFit/>
+          </a:bodyPr>
+          <a:lstStyle/>
+          <a:p>
+            <a:pPr algn="l">
+              <a:lnSpc>
+                <a:spcPct val="125000"/>
+              </a:lnSpc>
+              <a:spcAft>
+                <a:spcPts val="0"/>
+              </a:spcAft>
+            </a:pPr>
+            <a:r>
+              <a:rPr sz="1250" b="1" i="0">
+                <a:solidFill>
+                  <a:srgbClr val="F7F6F3"/>
+                </a:solidFill>
+                <a:latin typeface="Calibri"/>
+              </a:rPr>
+              <a:t>Repository</a:t>
+            </a:r>
+          </a:p>
+        </p:txBody>
+      </p:sp>
+      <p:sp>
+        <p:nvSpPr>
+          <p:cNvPr id="5" name="TextBox 4"/>
+          <p:cNvSpPr txBox="1"/>
+          <p:nvPr/>
+        </p:nvSpPr>
+        <p:spPr>
+          <a:xfrm>
+            <a:off x="777240" y="4608576"/>
+            <a:ext cx="2258568" cy="256032"/>
+          </a:xfrm>
+          <a:prstGeom prst="rect">
+            <a:avLst/>
+          </a:prstGeom>
+          <a:noFill/>
+        </p:spPr>
+        <p:txBody>
+          <a:bodyPr wrap="square" anchor="t" lIns="0" rIns="0" tIns="0" bIns="0">
+            <a:spAutoFit/>
+          </a:bodyPr>
+          <a:lstStyle/>
+          <a:p>
+            <a:pPr algn="l">
+              <a:lnSpc>
+                <a:spcPct val="125000"/>
+              </a:lnSpc>
+              <a:spcAft>
+                <a:spcPts val="0"/>
+              </a:spcAft>
+            </a:pPr>
+            <a:r>
+              <a:rPr sz="1100" b="0" i="0">
+                <a:solidFill>
+                  <a:srgbClr val="7FD8C2"/>
+                </a:solidFill>
+                <a:latin typeface="Calibri"/>
+              </a:rPr>
+              <a:t>github.com/hotragn/verb</a:t>
+            </a:r>
+          </a:p>
+        </p:txBody>
+      </p:sp>
+      <p:pic>
+        <p:nvPicPr>
+          <p:cNvPr id="6" name="Picture 5" descr="qr-calculator.png"/>
+          <p:cNvPicPr>
+            <a:picLocks noChangeAspect="1"/>
+          </p:cNvPicPr>
+          <p:nvPr/>
+        </p:nvPicPr>
+        <p:blipFill>
           <a:blip r:embed="rId3"/>
           <a:stretch>
             <a:fillRect/>
@@ -25821,7 +26882,7 @@
         </p:blipFill>
         <p:spPr>
           <a:xfrm>
-            <a:off x="777240" y="2487168"/>
+            <a:off x="3127248" y="2487168"/>
             <a:ext cx="1691640" cy="1691640"/>
           </a:xfrm>
           <a:prstGeom prst="rect">
@@ -25831,13 +26892,13 @@
       </p:pic>
       <p:sp>
         <p:nvSpPr>
-          <p:cNvPr id="4" name="TextBox 3"/>
-          <p:cNvSpPr txBox="1"/>
-          <p:nvPr/>
-        </p:nvSpPr>
-        <p:spPr>
-          <a:xfrm>
-            <a:off x="777240" y="4352544"/>
+          <p:cNvPr id="7" name="TextBox 6"/>
+          <p:cNvSpPr txBox="1"/>
+          <p:nvPr/>
+        </p:nvSpPr>
+        <p:spPr>
+          <a:xfrm>
+            <a:off x="3127248" y="4352544"/>
             <a:ext cx="2258568" cy="256032"/>
           </a:xfrm>
           <a:prstGeom prst="rect">
@@ -25866,20 +26927,20 @@
                 </a:solidFill>
                 <a:latin typeface="Calibri"/>
               </a:rPr>
-              <a:t>Repository</a:t>
-            </a:r>
-          </a:p>
-        </p:txBody>
-      </p:sp>
-      <p:sp>
-        <p:nvSpPr>
-          <p:cNvPr id="5" name="TextBox 4"/>
-          <p:cNvSpPr txBox="1"/>
-          <p:nvPr/>
-        </p:nvSpPr>
-        <p:spPr>
-          <a:xfrm>
-            <a:off x="777240" y="4608576"/>
+              <a:t>Calculator</a:t>
+            </a:r>
+          </a:p>
+        </p:txBody>
+      </p:sp>
+      <p:sp>
+        <p:nvSpPr>
+          <p:cNvPr id="8" name="TextBox 7"/>
+          <p:cNvSpPr txBox="1"/>
+          <p:nvPr/>
+        </p:nvSpPr>
+        <p:spPr>
+          <a:xfrm>
+            <a:off x="3127248" y="4608576"/>
             <a:ext cx="2258568" cy="256032"/>
           </a:xfrm>
           <a:prstGeom prst="rect">
@@ -25908,14 +26969,14 @@
                 </a:solidFill>
                 <a:latin typeface="Calibri"/>
               </a:rPr>
-              <a:t>github.com/hotragn/verb</a:t>
+              <a:t>hotragn.github.io/verb</a:t>
             </a:r>
           </a:p>
         </p:txBody>
       </p:sp>
       <p:pic>
         <p:nvPicPr>
-          <p:cNvPr id="6" name="Picture 5" descr="qr-calculator.png"/>
+          <p:cNvPr id="9" name="Picture 8" descr="qr-linkedin.png"/>
           <p:cNvPicPr>
             <a:picLocks noChangeAspect="1"/>
           </p:cNvPicPr>
@@ -25929,114 +26990,6 @@
         </p:blipFill>
         <p:spPr>
           <a:xfrm>
-            <a:off x="3127248" y="2487168"/>
-            <a:ext cx="1691640" cy="1691640"/>
-          </a:xfrm>
-          <a:prstGeom prst="rect">
-            <a:avLst/>
-          </a:prstGeom>
-        </p:spPr>
-      </p:pic>
-      <p:sp>
-        <p:nvSpPr>
-          <p:cNvPr id="7" name="TextBox 6"/>
-          <p:cNvSpPr txBox="1"/>
-          <p:nvPr/>
-        </p:nvSpPr>
-        <p:spPr>
-          <a:xfrm>
-            <a:off x="3127248" y="4352544"/>
-            <a:ext cx="2258568" cy="256032"/>
-          </a:xfrm>
-          <a:prstGeom prst="rect">
-            <a:avLst/>
-          </a:prstGeom>
-          <a:noFill/>
-        </p:spPr>
-        <p:txBody>
-          <a:bodyPr wrap="square" anchor="t" lIns="0" rIns="0" tIns="0" bIns="0">
-            <a:spAutoFit/>
-          </a:bodyPr>
-          <a:lstStyle/>
-          <a:p>
-            <a:pPr algn="l">
-              <a:lnSpc>
-                <a:spcPct val="125000"/>
-              </a:lnSpc>
-              <a:spcAft>
-                <a:spcPts val="0"/>
-              </a:spcAft>
-            </a:pPr>
-            <a:r>
-              <a:rPr sz="1250" b="1" i="0">
-                <a:solidFill>
-                  <a:srgbClr val="F7F6F3"/>
-                </a:solidFill>
-                <a:latin typeface="Calibri"/>
-              </a:rPr>
-              <a:t>Calculator</a:t>
-            </a:r>
-          </a:p>
-        </p:txBody>
-      </p:sp>
-      <p:sp>
-        <p:nvSpPr>
-          <p:cNvPr id="8" name="TextBox 7"/>
-          <p:cNvSpPr txBox="1"/>
-          <p:nvPr/>
-        </p:nvSpPr>
-        <p:spPr>
-          <a:xfrm>
-            <a:off x="3127248" y="4608576"/>
-            <a:ext cx="2258568" cy="256032"/>
-          </a:xfrm>
-          <a:prstGeom prst="rect">
-            <a:avLst/>
-          </a:prstGeom>
-          <a:noFill/>
-        </p:spPr>
-        <p:txBody>
-          <a:bodyPr wrap="square" anchor="t" lIns="0" rIns="0" tIns="0" bIns="0">
-            <a:spAutoFit/>
-          </a:bodyPr>
-          <a:lstStyle/>
-          <a:p>
-            <a:pPr algn="l">
-              <a:lnSpc>
-                <a:spcPct val="125000"/>
-              </a:lnSpc>
-              <a:spcAft>
-                <a:spcPts val="0"/>
-              </a:spcAft>
-            </a:pPr>
-            <a:r>
-              <a:rPr sz="1100" b="0" i="0">
-                <a:solidFill>
-                  <a:srgbClr val="7FD8C2"/>
-                </a:solidFill>
-                <a:latin typeface="Calibri"/>
-              </a:rPr>
-              <a:t>hotragn.github.io/verb</a:t>
-            </a:r>
-          </a:p>
-        </p:txBody>
-      </p:sp>
-      <p:pic>
-        <p:nvPicPr>
-          <p:cNvPr id="9" name="Picture 8" descr="qr-linkedin.png"/>
-          <p:cNvPicPr>
-            <a:picLocks noChangeAspect="1"/>
-          </p:cNvPicPr>
-          <p:nvPr/>
-        </p:nvPicPr>
-        <p:blipFill>
-          <a:blip r:embed="rId5"/>
-          <a:stretch>
-            <a:fillRect/>
-          </a:stretch>
-        </p:blipFill>
-        <p:spPr>
-          <a:xfrm>
             <a:off x="5477256" y="2487168"/>
             <a:ext cx="1691640" cy="1691640"/>
           </a:xfrm>
@@ -26138,7 +27091,7 @@
           <p:nvPr/>
         </p:nvPicPr>
         <p:blipFill>
-          <a:blip r:embed="rId6"/>
+          <a:blip r:embed="rId5"/>
           <a:stretch>
             <a:fillRect/>
           </a:stretch>
@@ -26619,7 +27572,7 @@
                 </a:solidFill>
                 <a:latin typeface="Calibri"/>
               </a:rPr>
-              <a:t>3 / 27</a:t>
+              <a:t>3 / 28</a:t>
             </a:r>
           </a:p>
         </p:txBody>
@@ -27162,7 +28115,7 @@
                 </a:solidFill>
                 <a:latin typeface="Calibri"/>
               </a:rPr>
-              <a:t>4 / 27</a:t>
+              <a:t>4 / 28</a:t>
             </a:r>
           </a:p>
         </p:txBody>
@@ -28120,7 +29073,7 @@
                 </a:solidFill>
                 <a:latin typeface="Calibri"/>
               </a:rPr>
-              <a:t>5 / 27</a:t>
+              <a:t>5 / 28</a:t>
             </a:r>
           </a:p>
         </p:txBody>
@@ -28720,7 +29673,7 @@
                 </a:solidFill>
                 <a:latin typeface="Calibri"/>
               </a:rPr>
-              <a:t>6 / 27</a:t>
+              <a:t>6 / 28</a:t>
             </a:r>
           </a:p>
         </p:txBody>
@@ -29668,7 +30621,7 @@
                 </a:solidFill>
                 <a:latin typeface="Calibri"/>
               </a:rPr>
-              <a:t>7 / 27</a:t>
+              <a:t>7 / 28</a:t>
             </a:r>
           </a:p>
         </p:txBody>
@@ -30612,7 +31565,7 @@
                 </a:solidFill>
                 <a:latin typeface="Calibri"/>
               </a:rPr>
-              <a:t>8 / 27</a:t>
+              <a:t>8 / 28</a:t>
             </a:r>
           </a:p>
         </p:txBody>
@@ -32265,7 +33218,7 @@
                 </a:solidFill>
                 <a:latin typeface="Calibri"/>
               </a:rPr>
-              <a:t>9 / 27</a:t>
+              <a:t>9 / 28</a:t>
             </a:r>
           </a:p>
         </p:txBody>
